--- a/Presentation/AsynchronousServices.pptx
+++ b/Presentation/AsynchronousServices.pptx
@@ -5,58 +5,50 @@
     <p:sldMasterId id="2147483648" r:id="rId1"/>
   </p:sldMasterIdLst>
   <p:notesMasterIdLst>
-    <p:notesMasterId r:id="rId30"/>
+    <p:notesMasterId r:id="rId3"/>
   </p:notesMasterIdLst>
   <p:handoutMasterIdLst>
-    <p:handoutMasterId r:id="rId31"/>
+    <p:handoutMasterId r:id="rId4"/>
   </p:handoutMasterIdLst>
   <p:sldIdLst>
-    <p:sldId id="256" r:id="rId2"/>
-    <p:sldId id="257" r:id="rId3"/>
-    <p:sldId id="258" r:id="rId4"/>
-    <p:sldId id="259" r:id="rId5"/>
-    <p:sldId id="260" r:id="rId6"/>
-    <p:sldId id="261" r:id="rId7"/>
-    <p:sldId id="262" r:id="rId8"/>
-    <p:sldId id="263" r:id="rId9"/>
-    <p:sldId id="264" r:id="rId10"/>
-    <p:sldId id="265" r:id="rId11"/>
-    <p:sldId id="266" r:id="rId12"/>
-    <p:sldId id="267" r:id="rId13"/>
-    <p:sldId id="268" r:id="rId14"/>
-    <p:sldId id="269" r:id="rId15"/>
-    <p:sldId id="270" r:id="rId16"/>
-    <p:sldId id="271" r:id="rId17"/>
-    <p:sldId id="272" r:id="rId18"/>
-    <p:sldId id="273" r:id="rId19"/>
-    <p:sldId id="274" r:id="rId20"/>
-    <p:sldId id="275" r:id="rId21"/>
-    <p:sldId id="276" r:id="rId22"/>
-    <p:sldId id="277" r:id="rId23"/>
-    <p:sldId id="278" r:id="rId24"/>
-    <p:sldId id="279" r:id="rId25"/>
-    <p:sldId id="280" r:id="rId26"/>
-    <p:sldId id="281" r:id="rId27"/>
-    <p:sldId id="282" r:id="rId28"/>
-    <p:sldId id="283" r:id="rId29"/>
+    <p:sldId id="256" r:id="rId5"/>
+    <p:sldId id="257" r:id="rId2"/>
+    <p:sldId id="258" r:id="rId14"/>
+    <p:sldId id="259" r:id="rId15"/>
+    <p:sldId id="260" r:id="rId16"/>
+    <p:sldId id="261" r:id="rId17"/>
+    <p:sldId id="262" r:id="rId18"/>
+    <p:sldId id="263" r:id="rId19"/>
+    <p:sldId id="264" r:id="rId20"/>
+    <p:sldId id="265" r:id="rId21"/>
+    <p:sldId id="266" r:id="rId22"/>
+    <p:sldId id="267" r:id="rId23"/>
+    <p:sldId id="268" r:id="rId24"/>
+    <p:sldId id="269" r:id="rId25"/>
+    <p:sldId id="270" r:id="rId26"/>
+    <p:sldId id="271" r:id="rId27"/>
+    <p:sldId id="272" r:id="rId28"/>
+    <p:sldId id="273" r:id="rId29"/>
+    <p:sldId id="274" r:id="rId30"/>
+    <p:sldId id="275" r:id="rId31"/>
+    <p:sldId id="276" r:id="rId32"/>
+    <p:sldId id="277" r:id="rId33"/>
+    <p:sldId id="278" r:id="rId34"/>
+    <p:sldId id="279" r:id="rId35"/>
+    <p:sldId id="280" r:id="rId36"/>
+    <p:sldId id="281" r:id="rId37"/>
+    <p:sldId id="282" r:id="rId38"/>
+    <p:sldId id="283" r:id="rId39"/>
   </p:sldIdLst>
   <p:sldSz cx="9144000" cy="5143500" type="screen16x9"/>
   <p:notesSz cx="6858000" cy="9144000"/>
   <p:embeddedFontLst>
     <p:embeddedFont>
-      <p:font typeface="APL385 Unicode" panose="020B0709000202000203" pitchFamily="49" charset="0"/>
-      <p:regular r:id="rId32"/>
-    </p:embeddedFont>
-    <p:embeddedFont>
       <p:font typeface="Sarabun" panose="00000500000000000000" pitchFamily="2" charset="-34"/>
-      <p:regular r:id="rId33"/>
-      <p:bold r:id="rId34"/>
-      <p:italic r:id="rId35"/>
-      <p:boldItalic r:id="rId36"/>
-    </p:embeddedFont>
-    <p:embeddedFont>
-      <p:font typeface="Wingdings 2" panose="05020102010507070707" pitchFamily="18" charset="2"/>
-      <p:regular r:id="rId37"/>
+      <p:regular r:id="rId6"/>
+      <p:bold r:id="rId7"/>
+      <p:italic r:id="rId8"/>
+      <p:boldItalic r:id="rId9"/>
     </p:embeddedFont>
   </p:embeddedFontLst>
   <p:defaultTextStyle>
@@ -157,12 +149,12 @@
   <p:extLst>
     <p:ext uri="{521415D9-36F7-43E2-AB2F-B90AF26B5E84}">
       <p14:sectionLst xmlns:p14="http://schemas.microsoft.com/office/powerpoint/2010/main">
-        <p14:section name="Welcome" id="{6BA96A46-491D-4170-89D8-E0FB1F1B69D5}">
+        <p14:section name="Welcome" id="{3B0BA1BA-3AA8-4179-94D3-F5439F7260ED}">
           <p14:sldIdLst>
             <p14:sldId id="256"/>
           </p14:sldIdLst>
         </p14:section>
-        <p14:section name="Asynchronous services and the tools" id="{4CAE9DB1-A0A8-42A6-A582-652ABD7560DC}">
+        <p14:section name="Asynchronous services and the tools" id="{54DF8042-6321-47A8-BD77-456EAE8E00F4}">
           <p14:sldIdLst>
             <p14:sldId id="257"/>
             <p14:sldId id="258"/>
@@ -173,7 +165,7 @@
             <p14:sldId id="263"/>
           </p14:sldIdLst>
         </p14:section>
-        <p14:section name="Web hooks" id="{4DF0E380-F5BD-4FD7-929C-E6E69FC09A16}">
+        <p14:section name="Web hooks" id="{1747C6B5-AEFA-4816-B96C-8F6A8AB03F39}">
           <p14:sldIdLst>
             <p14:sldId id="264"/>
             <p14:sldId id="265"/>
@@ -183,7 +175,7 @@
             <p14:sldId id="269"/>
           </p14:sldIdLst>
         </p14:section>
-        <p14:section name="Server-Sent Events" id="{EFE9A115-0E51-493E-AE1C-C503672E8FC5}">
+        <p14:section name="Server-Sent Events" id="{3B9B7D50-D763-4320-9217-75BAC91CD2AC}">
           <p14:sldIdLst>
             <p14:sldId id="270"/>
             <p14:sldId id="271"/>
@@ -193,7 +185,7 @@
             <p14:sldId id="275"/>
           </p14:sldIdLst>
         </p14:section>
-        <p14:section name="WebSockets" id="{FDCE103A-9C6D-4871-912D-32460BAE524B}">
+        <p14:section name="WebSockets" id="{2973A957-17E6-4294-AFD3-6BB4A80B4592}">
           <p14:sldIdLst>
             <p14:sldId id="276"/>
             <p14:sldId id="277"/>
@@ -203,7 +195,7 @@
             <p14:sldId id="281"/>
           </p14:sldIdLst>
         </p14:section>
-        <p14:section name="Wrap-up" id="{CD3861DE-CD81-4CAD-BB8C-00875ED73E3C}">
+        <p14:section name="Wrap-up" id="{44C2B4BB-3B2C-4114-B102-B9E2473A96B8}">
           <p14:sldIdLst>
             <p14:sldId id="282"/>
             <p14:sldId id="283"/>
@@ -781,7 +773,7 @@
 </file>
 
 <file path=ppt/notesSlides/notesSlide1.xml><?xml version="1.0" encoding="utf-8"?>
-<p:notes xmlns:a="http://schemas.openxmlformats.org/drawingml/2006/main" xmlns:r="http://schemas.openxmlformats.org/officeDocument/2006/relationships" xmlns:p="http://schemas.openxmlformats.org/presentationml/2006/main">
+<p:notes xmlns:a="http://schemas.openxmlformats.org/drawingml/2006/main" xmlns:p="http://schemas.openxmlformats.org/presentationml/2006/main" xmlns:r="http://schemas.openxmlformats.org/officeDocument/2006/relationships">
   <p:cSld>
     <p:spTree>
       <p:nvGrpSpPr>
@@ -801,7 +793,7 @@
         <p:nvSpPr>
           <p:cNvPr id="2" name="Slide Image Placeholder 1"/>
           <p:cNvSpPr>
-            <a:spLocks noGrp="1" noRot="1" noChangeAspect="1"/>
+            <a:spLocks noGrp="1"/>
           </p:cNvSpPr>
           <p:nvPr>
             <p:ph type="sldImg" idx="2"/>
@@ -816,7 +808,7 @@
             <a:spLocks noGrp="1"/>
           </p:cNvSpPr>
           <p:nvPr>
-            <p:ph type="body" sz="quarter" idx="3"/>
+            <p:ph type="body" idx="3" sz="quarter"/>
           </p:nvPr>
         </p:nvSpPr>
         <p:spPr/>
@@ -828,17 +820,13 @@
               <a:t>Welcome. This afternoon is about services that don't make the client wait for an answer.</a:t>
             </a:r>
           </a:p>
-          <a:p>
-            <a:endParaRPr/>
-          </a:p>
+          <a:p/>
           <a:p>
             <a:r>
               <a:t>Before starting: the APL code on these slides uses the APL385 Unicode font, which must be installed on the presenting machine, or the APL symbols will not display correctly.</a:t>
             </a:r>
           </a:p>
-          <a:p>
-            <a:endParaRPr/>
-          </a:p>
+          <a:p/>
           <a:p>
             <a:r>
               <a:t>Check that everyone has run Setup and seen Ready (Exercises/README.md). Use the first ten minutes for that.</a:t>
@@ -853,7 +841,7 @@
             <a:spLocks noGrp="1"/>
           </p:cNvSpPr>
           <p:nvPr>
-            <p:ph type="sldNum" sz="quarter" idx="5"/>
+            <p:ph type="sldNum" idx="5" sz="quarter"/>
           </p:nvPr>
         </p:nvSpPr>
         <p:spPr/>
@@ -867,7 +855,7 @@
 </file>
 
 <file path=ppt/notesSlides/notesSlide10.xml><?xml version="1.0" encoding="utf-8"?>
-<p:notes xmlns:a="http://schemas.openxmlformats.org/drawingml/2006/main" xmlns:r="http://schemas.openxmlformats.org/officeDocument/2006/relationships" xmlns:p="http://schemas.openxmlformats.org/presentationml/2006/main">
+<p:notes xmlns:a="http://schemas.openxmlformats.org/drawingml/2006/main" xmlns:p="http://schemas.openxmlformats.org/presentationml/2006/main" xmlns:r="http://schemas.openxmlformats.org/officeDocument/2006/relationships">
   <p:cSld>
     <p:spTree>
       <p:nvGrpSpPr>
@@ -887,7 +875,7 @@
         <p:nvSpPr>
           <p:cNvPr id="2" name="Slide Image Placeholder 1"/>
           <p:cNvSpPr>
-            <a:spLocks noGrp="1" noRot="1" noChangeAspect="1"/>
+            <a:spLocks noGrp="1"/>
           </p:cNvSpPr>
           <p:nvPr>
             <p:ph type="sldImg" idx="2"/>
@@ -902,7 +890,7 @@
             <a:spLocks noGrp="1"/>
           </p:cNvSpPr>
           <p:nvPr>
-            <p:ph type="body" sz="quarter" idx="3"/>
+            <p:ph type="body" idx="3" sz="quarter"/>
           </p:nvPr>
         </p:nvSpPr>
         <p:spPr/>
@@ -914,9 +902,7 @@
               <a:t>The flow in Exercise 2. The client posts a job with a callback URL. The ticket server answers immediately with a ticket number, and starts the work in a separate thread. When the work is done, the ticket server posts the result to the callback URL: that call is the web hook.</a:t>
             </a:r>
           </a:p>
-          <a:p>
-            <a:endParaRPr/>
-          </a:p>
+          <a:p/>
           <a:p>
             <a:r>
               <a:t>In real life the callback server belongs to someone else, on another machine. In the exercise both servers run in your session, so you can see everything happen.</a:t>
@@ -931,7 +917,7 @@
             <a:spLocks noGrp="1"/>
           </p:cNvSpPr>
           <p:nvPr>
-            <p:ph type="sldNum" sz="quarter" idx="5"/>
+            <p:ph type="sldNum" idx="5" sz="quarter"/>
           </p:nvPr>
         </p:nvSpPr>
         <p:spPr/>
@@ -945,7 +931,7 @@
 </file>
 
 <file path=ppt/notesSlides/notesSlide11.xml><?xml version="1.0" encoding="utf-8"?>
-<p:notes xmlns:a="http://schemas.openxmlformats.org/drawingml/2006/main" xmlns:r="http://schemas.openxmlformats.org/officeDocument/2006/relationships" xmlns:p="http://schemas.openxmlformats.org/presentationml/2006/main">
+<p:notes xmlns:a="http://schemas.openxmlformats.org/drawingml/2006/main" xmlns:p="http://schemas.openxmlformats.org/presentationml/2006/main" xmlns:r="http://schemas.openxmlformats.org/officeDocument/2006/relationships">
   <p:cSld>
     <p:spTree>
       <p:nvGrpSpPr>
@@ -965,7 +951,7 @@
         <p:nvSpPr>
           <p:cNvPr id="2" name="Slide Image Placeholder 1"/>
           <p:cNvSpPr>
-            <a:spLocks noGrp="1" noRot="1" noChangeAspect="1"/>
+            <a:spLocks noGrp="1"/>
           </p:cNvSpPr>
           <p:nvPr>
             <p:ph type="sldImg" idx="2"/>
@@ -980,7 +966,7 @@
             <a:spLocks noGrp="1"/>
           </p:cNvSpPr>
           <p:nvPr>
-            <p:ph type="body" sz="quarter" idx="3"/>
+            <p:ph type="body" idx="3" sz="quarter"/>
           </p:nvPr>
         </p:nvSpPr>
         <p:spPr/>
@@ -992,17 +978,13 @@
               <a:t>The heart of Submit. &amp; is the key: it starts Work in its own thread and Submit carries on and returns the ticket.</a:t>
             </a:r>
           </a:p>
-          <a:p>
-            <a:endParaRPr/>
-          </a:p>
+          <a:p/>
           <a:p>
             <a:r>
               <a:t>:Hold protects the ticket counter. Strictly, a one-line update can't be interleaved in Dyalog, but :Hold is the right habit.</a:t>
             </a:r>
           </a:p>
-          <a:p>
-            <a:endParaRPr/>
-          </a:p>
+          <a:p/>
           <a:p>
             <a:r>
               <a:t>The solution also checks that n is a whole number from 2 to 1E12 and that callback is text, replying 400 otherwise. Without that, a job with n of 'abc' gets a ticket and then fails inside Work.</a:t>
@@ -1017,7 +999,7 @@
             <a:spLocks noGrp="1"/>
           </p:cNvSpPr>
           <p:nvPr>
-            <p:ph type="sldNum" sz="quarter" idx="5"/>
+            <p:ph type="sldNum" idx="5" sz="quarter"/>
           </p:nvPr>
         </p:nvSpPr>
         <p:spPr/>
@@ -1031,7 +1013,7 @@
 </file>
 
 <file path=ppt/notesSlides/notesSlide12.xml><?xml version="1.0" encoding="utf-8"?>
-<p:notes xmlns:a="http://schemas.openxmlformats.org/drawingml/2006/main" xmlns:r="http://schemas.openxmlformats.org/officeDocument/2006/relationships" xmlns:p="http://schemas.openxmlformats.org/presentationml/2006/main">
+<p:notes xmlns:a="http://schemas.openxmlformats.org/drawingml/2006/main" xmlns:p="http://schemas.openxmlformats.org/presentationml/2006/main" xmlns:r="http://schemas.openxmlformats.org/officeDocument/2006/relationships">
   <p:cSld>
     <p:spTree>
       <p:nvGrpSpPr>
@@ -1051,7 +1033,7 @@
         <p:nvSpPr>
           <p:cNvPr id="2" name="Slide Image Placeholder 1"/>
           <p:cNvSpPr>
-            <a:spLocks noGrp="1" noRot="1" noChangeAspect="1"/>
+            <a:spLocks noGrp="1"/>
           </p:cNvSpPr>
           <p:nvPr>
             <p:ph type="sldImg" idx="2"/>
@@ -1066,7 +1048,7 @@
             <a:spLocks noGrp="1"/>
           </p:cNvSpPr>
           <p:nvPr>
-            <p:ph type="body" sz="quarter" idx="3"/>
+            <p:ph type="body" idx="3" sz="quarter"/>
           </p:nvPr>
         </p:nvSpPr>
         <p:spPr/>
@@ -1078,17 +1060,13 @@
               <a:t>Two lessons from building Exercise 2.</a:t>
             </a:r>
           </a:p>
-          <a:p>
-            <a:endParaRPr/>
-          </a:p>
+          <a:p/>
           <a:p>
             <a:r>
               <a:t>First, from Exercise 1: rc and HttpStatus mean different things. rc is about the request (did anyone answer?), HttpStatus is the server's answer.</a:t>
             </a:r>
           </a:p>
-          <a:p>
-            <a:endParaRPr/>
-          </a:p>
+          <a:p/>
           <a:p>
             <a:r>
               <a:t>Second: Jarvis catches errors in your endpoints and replies 500. A thread started with &amp; has no such protection. Untrapped, an error suspends that thread in a session, or stops APL altogether when the service runs as a script. So Work's whole body is inside :Trap 0, and failures are printed with the ticket number.</a:t>
@@ -1103,7 +1081,7 @@
             <a:spLocks noGrp="1"/>
           </p:cNvSpPr>
           <p:nvPr>
-            <p:ph type="sldNum" sz="quarter" idx="5"/>
+            <p:ph type="sldNum" idx="5" sz="quarter"/>
           </p:nvPr>
         </p:nvSpPr>
         <p:spPr/>
@@ -1117,7 +1095,7 @@
 </file>
 
 <file path=ppt/notesSlides/notesSlide13.xml><?xml version="1.0" encoding="utf-8"?>
-<p:notes xmlns:a="http://schemas.openxmlformats.org/drawingml/2006/main" xmlns:r="http://schemas.openxmlformats.org/officeDocument/2006/relationships" xmlns:p="http://schemas.openxmlformats.org/presentationml/2006/main">
+<p:notes xmlns:a="http://schemas.openxmlformats.org/drawingml/2006/main" xmlns:p="http://schemas.openxmlformats.org/presentationml/2006/main" xmlns:r="http://schemas.openxmlformats.org/officeDocument/2006/relationships">
   <p:cSld>
     <p:spTree>
       <p:nvGrpSpPr>
@@ -1137,7 +1115,7 @@
         <p:nvSpPr>
           <p:cNvPr id="2" name="Slide Image Placeholder 1"/>
           <p:cNvSpPr>
-            <a:spLocks noGrp="1" noRot="1" noChangeAspect="1"/>
+            <a:spLocks noGrp="1"/>
           </p:cNvSpPr>
           <p:nvPr>
             <p:ph type="sldImg" idx="2"/>
@@ -1152,7 +1130,7 @@
             <a:spLocks noGrp="1"/>
           </p:cNvSpPr>
           <p:nvPr>
-            <p:ph type="body" sz="quarter" idx="3"/>
+            <p:ph type="body" idx="3" sz="quarter"/>
           </p:nvPr>
         </p:nvSpPr>
         <p:spPr/>
@@ -1173,7 +1151,7 @@
             <a:spLocks noGrp="1"/>
           </p:cNvSpPr>
           <p:nvPr>
-            <p:ph type="sldNum" sz="quarter" idx="5"/>
+            <p:ph type="sldNum" idx="5" sz="quarter"/>
           </p:nvPr>
         </p:nvSpPr>
         <p:spPr/>
@@ -1187,7 +1165,7 @@
 </file>
 
 <file path=ppt/notesSlides/notesSlide14.xml><?xml version="1.0" encoding="utf-8"?>
-<p:notes xmlns:a="http://schemas.openxmlformats.org/drawingml/2006/main" xmlns:r="http://schemas.openxmlformats.org/officeDocument/2006/relationships" xmlns:p="http://schemas.openxmlformats.org/presentationml/2006/main">
+<p:notes xmlns:a="http://schemas.openxmlformats.org/drawingml/2006/main" xmlns:p="http://schemas.openxmlformats.org/presentationml/2006/main" xmlns:r="http://schemas.openxmlformats.org/officeDocument/2006/relationships">
   <p:cSld>
     <p:spTree>
       <p:nvGrpSpPr>
@@ -1207,7 +1185,7 @@
         <p:nvSpPr>
           <p:cNvPr id="2" name="Slide Image Placeholder 1"/>
           <p:cNvSpPr>
-            <a:spLocks noGrp="1" noRot="1" noChangeAspect="1"/>
+            <a:spLocks noGrp="1"/>
           </p:cNvSpPr>
           <p:nvPr>
             <p:ph type="sldImg" idx="2"/>
@@ -1222,7 +1200,7 @@
             <a:spLocks noGrp="1"/>
           </p:cNvSpPr>
           <p:nvPr>
-            <p:ph type="body" sz="quarter" idx="3"/>
+            <p:ph type="body" idx="3" sz="quarter"/>
           </p:nvPr>
         </p:nvSpPr>
         <p:spPr/>
@@ -1234,9 +1212,7 @@
               <a:t>Leave on screen after the break.</a:t>
             </a:r>
           </a:p>
-          <a:p>
-            <a:endParaRPr/>
-          </a:p>
+          <a:p/>
           <a:p>
             <a:r>
               <a:t>Watch for: Submit is dyadic (it needs req for req.Fail); Work's results arriving in a different order from the tickets is the point; with the callback server stopped (stretch S1), Work prints 'could not reach' and Client gives up after 10 seconds.</a:t>
@@ -1251,7 +1227,7 @@
             <a:spLocks noGrp="1"/>
           </p:cNvSpPr>
           <p:nvPr>
-            <p:ph type="sldNum" sz="quarter" idx="5"/>
+            <p:ph type="sldNum" idx="5" sz="quarter"/>
           </p:nvPr>
         </p:nvSpPr>
         <p:spPr/>
@@ -1265,7 +1241,7 @@
 </file>
 
 <file path=ppt/notesSlides/notesSlide15.xml><?xml version="1.0" encoding="utf-8"?>
-<p:notes xmlns:a="http://schemas.openxmlformats.org/drawingml/2006/main" xmlns:r="http://schemas.openxmlformats.org/officeDocument/2006/relationships" xmlns:p="http://schemas.openxmlformats.org/presentationml/2006/main">
+<p:notes xmlns:a="http://schemas.openxmlformats.org/drawingml/2006/main" xmlns:p="http://schemas.openxmlformats.org/presentationml/2006/main" xmlns:r="http://schemas.openxmlformats.org/officeDocument/2006/relationships">
   <p:cSld>
     <p:spTree>
       <p:nvGrpSpPr>
@@ -1285,7 +1261,7 @@
         <p:nvSpPr>
           <p:cNvPr id="2" name="Slide Image Placeholder 1"/>
           <p:cNvSpPr>
-            <a:spLocks noGrp="1" noRot="1" noChangeAspect="1"/>
+            <a:spLocks noGrp="1"/>
           </p:cNvSpPr>
           <p:nvPr>
             <p:ph type="sldImg" idx="2"/>
@@ -1300,7 +1276,7 @@
             <a:spLocks noGrp="1"/>
           </p:cNvSpPr>
           <p:nvPr>
-            <p:ph type="body" sz="quarter" idx="3"/>
+            <p:ph type="body" idx="3" sz="quarter"/>
           </p:nvPr>
         </p:nvSpPr>
         <p:spPr/>
@@ -1321,7 +1297,7 @@
             <a:spLocks noGrp="1"/>
           </p:cNvSpPr>
           <p:nvPr>
-            <p:ph type="sldNum" sz="quarter" idx="5"/>
+            <p:ph type="sldNum" idx="5" sz="quarter"/>
           </p:nvPr>
         </p:nvSpPr>
         <p:spPr/>
@@ -1335,7 +1311,7 @@
 </file>
 
 <file path=ppt/notesSlides/notesSlide16.xml><?xml version="1.0" encoding="utf-8"?>
-<p:notes xmlns:a="http://schemas.openxmlformats.org/drawingml/2006/main" xmlns:r="http://schemas.openxmlformats.org/officeDocument/2006/relationships" xmlns:p="http://schemas.openxmlformats.org/presentationml/2006/main">
+<p:notes xmlns:a="http://schemas.openxmlformats.org/drawingml/2006/main" xmlns:p="http://schemas.openxmlformats.org/presentationml/2006/main" xmlns:r="http://schemas.openxmlformats.org/officeDocument/2006/relationships">
   <p:cSld>
     <p:spTree>
       <p:nvGrpSpPr>
@@ -1355,7 +1331,7 @@
         <p:nvSpPr>
           <p:cNvPr id="2" name="Slide Image Placeholder 1"/>
           <p:cNvSpPr>
-            <a:spLocks noGrp="1" noRot="1" noChangeAspect="1"/>
+            <a:spLocks noGrp="1"/>
           </p:cNvSpPr>
           <p:nvPr>
             <p:ph type="sldImg" idx="2"/>
@@ -1370,7 +1346,7 @@
             <a:spLocks noGrp="1"/>
           </p:cNvSpPr>
           <p:nvPr>
-            <p:ph type="body" sz="quarter" idx="3"/>
+            <p:ph type="body" idx="3" sz="quarter"/>
           </p:nvPr>
         </p:nvSpPr>
         <p:spPr/>
@@ -1391,7 +1367,7 @@
             <a:spLocks noGrp="1"/>
           </p:cNvSpPr>
           <p:nvPr>
-            <p:ph type="sldNum" sz="quarter" idx="5"/>
+            <p:ph type="sldNum" idx="5" sz="quarter"/>
           </p:nvPr>
         </p:nvSpPr>
         <p:spPr/>
@@ -1405,7 +1381,7 @@
 </file>
 
 <file path=ppt/notesSlides/notesSlide17.xml><?xml version="1.0" encoding="utf-8"?>
-<p:notes xmlns:a="http://schemas.openxmlformats.org/drawingml/2006/main" xmlns:r="http://schemas.openxmlformats.org/officeDocument/2006/relationships" xmlns:p="http://schemas.openxmlformats.org/presentationml/2006/main">
+<p:notes xmlns:a="http://schemas.openxmlformats.org/drawingml/2006/main" xmlns:p="http://schemas.openxmlformats.org/presentationml/2006/main" xmlns:r="http://schemas.openxmlformats.org/officeDocument/2006/relationships">
   <p:cSld>
     <p:spTree>
       <p:nvGrpSpPr>
@@ -1425,7 +1401,7 @@
         <p:nvSpPr>
           <p:cNvPr id="2" name="Slide Image Placeholder 1"/>
           <p:cNvSpPr>
-            <a:spLocks noGrp="1" noRot="1" noChangeAspect="1"/>
+            <a:spLocks noGrp="1"/>
           </p:cNvSpPr>
           <p:nvPr>
             <p:ph type="sldImg" idx="2"/>
@@ -1440,7 +1416,7 @@
             <a:spLocks noGrp="1"/>
           </p:cNvSpPr>
           <p:nvPr>
-            <p:ph type="body" sz="quarter" idx="3"/>
+            <p:ph type="body" idx="3" sz="quarter"/>
           </p:nvPr>
         </p:nvSpPr>
         <p:spPr/>
@@ -1452,9 +1428,7 @@
               <a:t>This is everything on the wire. Each event is a few lines and a blank line. event: names the type, data: carries the content, here JSON. A line that starts with a colon is a comment; Jarvis sends one every 30 seconds (SSEHeartbeatInterval) so idle connections stay open.</a:t>
             </a:r>
           </a:p>
-          <a:p>
-            <a:endParaRPr/>
-          </a:p>
+          <a:p/>
           <a:p>
             <a:r>
               <a:t>FormatSSE builds the text for you: a namespace is converted to JSON. In Exercise 3 attendees try this in the session first.</a:t>
@@ -1469,7 +1443,7 @@
             <a:spLocks noGrp="1"/>
           </p:cNvSpPr>
           <p:nvPr>
-            <p:ph type="sldNum" sz="quarter" idx="5"/>
+            <p:ph type="sldNum" idx="5" sz="quarter"/>
           </p:nvPr>
         </p:nvSpPr>
         <p:spPr/>
@@ -1483,7 +1457,7 @@
 </file>
 
 <file path=ppt/notesSlides/notesSlide18.xml><?xml version="1.0" encoding="utf-8"?>
-<p:notes xmlns:a="http://schemas.openxmlformats.org/drawingml/2006/main" xmlns:r="http://schemas.openxmlformats.org/officeDocument/2006/relationships" xmlns:p="http://schemas.openxmlformats.org/presentationml/2006/main">
+<p:notes xmlns:a="http://schemas.openxmlformats.org/drawingml/2006/main" xmlns:p="http://schemas.openxmlformats.org/presentationml/2006/main" xmlns:r="http://schemas.openxmlformats.org/officeDocument/2006/relationships">
   <p:cSld>
     <p:spTree>
       <p:nvGrpSpPr>
@@ -1503,7 +1477,7 @@
         <p:nvSpPr>
           <p:cNvPr id="2" name="Slide Image Placeholder 1"/>
           <p:cNvSpPr>
-            <a:spLocks noGrp="1" noRot="1" noChangeAspect="1"/>
+            <a:spLocks noGrp="1"/>
           </p:cNvSpPr>
           <p:nvPr>
             <p:ph type="sldImg" idx="2"/>
@@ -1518,7 +1492,7 @@
             <a:spLocks noGrp="1"/>
           </p:cNvSpPr>
           <p:nvPr>
-            <p:ph type="body" sz="quarter" idx="3"/>
+            <p:ph type="body" idx="3" sz="quarter"/>
           </p:nvPr>
         </p:nvSpPr>
         <p:spPr/>
@@ -1539,7 +1513,7 @@
             <a:spLocks noGrp="1"/>
           </p:cNvSpPr>
           <p:nvPr>
-            <p:ph type="sldNum" sz="quarter" idx="5"/>
+            <p:ph type="sldNum" idx="5" sz="quarter"/>
           </p:nvPr>
         </p:nvSpPr>
         <p:spPr/>
@@ -1553,7 +1527,7 @@
 </file>
 
 <file path=ppt/notesSlides/notesSlide19.xml><?xml version="1.0" encoding="utf-8"?>
-<p:notes xmlns:a="http://schemas.openxmlformats.org/drawingml/2006/main" xmlns:r="http://schemas.openxmlformats.org/officeDocument/2006/relationships" xmlns:p="http://schemas.openxmlformats.org/presentationml/2006/main">
+<p:notes xmlns:a="http://schemas.openxmlformats.org/drawingml/2006/main" xmlns:p="http://schemas.openxmlformats.org/presentationml/2006/main" xmlns:r="http://schemas.openxmlformats.org/officeDocument/2006/relationships">
   <p:cSld>
     <p:spTree>
       <p:nvGrpSpPr>
@@ -1573,7 +1547,7 @@
         <p:nvSpPr>
           <p:cNvPr id="2" name="Slide Image Placeholder 1"/>
           <p:cNvSpPr>
-            <a:spLocks noGrp="1" noRot="1" noChangeAspect="1"/>
+            <a:spLocks noGrp="1"/>
           </p:cNvSpPr>
           <p:nvPr>
             <p:ph type="sldImg" idx="2"/>
@@ -1588,7 +1562,7 @@
             <a:spLocks noGrp="1"/>
           </p:cNvSpPr>
           <p:nvPr>
-            <p:ph type="body" sz="quarter" idx="3"/>
+            <p:ph type="body" idx="3" sz="quarter"/>
           </p:nvPr>
         </p:nvSpPr>
         <p:spPr/>
@@ -1600,12 +1574,10 @@
               <a:t>The four Jarvis pieces. SSEEndpoints names the stream; Ticker is called once per new client, so it's where you welcome that client. SSEConnections lists who's connected, and SendSSE sends to them.</a:t>
             </a:r>
           </a:p>
-          <a:p>
-            <a:endParaRPr/>
-          </a:p>
-          <a:p>
-            <a:r>
-              <a:t>One trap, found while building the exercise: Broadcast runs as one long call in its own thread, so editing it doesn't change the running loop. Restart stops the loop and starts it again with the current code. Don't use Run for this: it reloads the functions from the files and throws the attendee's edits away.</a:t>
+          <a:p/>
+          <a:p>
+            <a:r>
+              <a:t>One trap, found while building the exercise: Broadcast runs as one long call in its own thread, so editing it doesn't change the running loop. Restart stops the loop and starts it again with the current code. Don't use Run3 for this: it reloads the functions from the files and throws the attendee's edits away.</a:t>
             </a:r>
           </a:p>
         </p:txBody>
@@ -1617,7 +1589,7 @@
             <a:spLocks noGrp="1"/>
           </p:cNvSpPr>
           <p:nvPr>
-            <p:ph type="sldNum" sz="quarter" idx="5"/>
+            <p:ph type="sldNum" idx="5" sz="quarter"/>
           </p:nvPr>
         </p:nvSpPr>
         <p:spPr/>
@@ -1631,7 +1603,7 @@
 </file>
 
 <file path=ppt/notesSlides/notesSlide2.xml><?xml version="1.0" encoding="utf-8"?>
-<p:notes xmlns:a="http://schemas.openxmlformats.org/drawingml/2006/main" xmlns:r="http://schemas.openxmlformats.org/officeDocument/2006/relationships" xmlns:p="http://schemas.openxmlformats.org/presentationml/2006/main">
+<p:notes xmlns:a="http://schemas.openxmlformats.org/drawingml/2006/main" xmlns:p="http://schemas.openxmlformats.org/presentationml/2006/main" xmlns:r="http://schemas.openxmlformats.org/officeDocument/2006/relationships">
   <p:cSld>
     <p:spTree>
       <p:nvGrpSpPr>
@@ -1651,7 +1623,7 @@
         <p:nvSpPr>
           <p:cNvPr id="2" name="Slide Image Placeholder 1"/>
           <p:cNvSpPr>
-            <a:spLocks noGrp="1" noRot="1" noChangeAspect="1"/>
+            <a:spLocks noGrp="1"/>
           </p:cNvSpPr>
           <p:nvPr>
             <p:ph type="sldImg" idx="2"/>
@@ -1666,7 +1638,7 @@
             <a:spLocks noGrp="1"/>
           </p:cNvSpPr>
           <p:nvPr>
-            <p:ph type="body" sz="quarter" idx="3"/>
+            <p:ph type="body" idx="3" sz="quarter"/>
           </p:nvPr>
         </p:nvSpPr>
         <p:spPr/>
@@ -1678,12 +1650,10 @@
               <a:t>The schedule: 10 minutes of setup, then talk 1 (15 minutes) and Exercise 1; talk 2 on web hooks just before the first break, so people can start Exercise 2 straight after it; talks 3 and 4 each lead into their exercise. Five minutes of wrap-up at the end.</a:t>
             </a:r>
           </a:p>
-          <a:p>
-            <a:endParaRPr/>
-          </a:p>
-          <a:p>
-            <a:r>
-              <a:t>Stress that falling behind is fine: every exercise has a Solution folder, and 'Solution' Run loads it.</a:t>
+          <a:p/>
+          <a:p>
+            <a:r>
+              <a:t>Stress that falling behind is fine: every exercise has a Solution folder, and 'Solution' Run1 (Run2, ...) loads it.</a:t>
             </a:r>
           </a:p>
         </p:txBody>
@@ -1695,7 +1665,7 @@
             <a:spLocks noGrp="1"/>
           </p:cNvSpPr>
           <p:nvPr>
-            <p:ph type="sldNum" sz="quarter" idx="5"/>
+            <p:ph type="sldNum" idx="5" sz="quarter"/>
           </p:nvPr>
         </p:nvSpPr>
         <p:spPr/>
@@ -1709,7 +1679,7 @@
 </file>
 
 <file path=ppt/notesSlides/notesSlide20.xml><?xml version="1.0" encoding="utf-8"?>
-<p:notes xmlns:a="http://schemas.openxmlformats.org/drawingml/2006/main" xmlns:r="http://schemas.openxmlformats.org/officeDocument/2006/relationships" xmlns:p="http://schemas.openxmlformats.org/presentationml/2006/main">
+<p:notes xmlns:a="http://schemas.openxmlformats.org/drawingml/2006/main" xmlns:p="http://schemas.openxmlformats.org/presentationml/2006/main" xmlns:r="http://schemas.openxmlformats.org/officeDocument/2006/relationships">
   <p:cSld>
     <p:spTree>
       <p:nvGrpSpPr>
@@ -1729,7 +1699,7 @@
         <p:nvSpPr>
           <p:cNvPr id="2" name="Slide Image Placeholder 1"/>
           <p:cNvSpPr>
-            <a:spLocks noGrp="1" noRot="1" noChangeAspect="1"/>
+            <a:spLocks noGrp="1"/>
           </p:cNvSpPr>
           <p:nvPr>
             <p:ph type="sldImg" idx="2"/>
@@ -1744,7 +1714,7 @@
             <a:spLocks noGrp="1"/>
           </p:cNvSpPr>
           <p:nvPr>
-            <p:ph type="body" sz="quarter" idx="3"/>
+            <p:ph type="body" idx="3" sz="quarter"/>
           </p:nvPr>
         </p:nvSpPr>
         <p:spPr/>
@@ -1756,12 +1726,10 @@
               <a:t>Leave on screen.</a:t>
             </a:r>
           </a:p>
-          <a:p>
-            <a:endParaRPr/>
-          </a:p>
-          <a:p>
-            <a:r>
-              <a:t>Watch for: Ticker must return no result or 0 (anything else closes the connection); after editing Broadcast, Restart (Run would reload the files); the table fills within a couple of seconds of Restart.</a:t>
+          <a:p/>
+          <a:p>
+            <a:r>
+              <a:t>Watch for: Ticker must return no result or 0 (anything else closes the connection); after editing Broadcast, Restart (Run3 would reload the files); the table fills within a couple of seconds of Restart.</a:t>
             </a:r>
           </a:p>
         </p:txBody>
@@ -1773,7 +1741,7 @@
             <a:spLocks noGrp="1"/>
           </p:cNvSpPr>
           <p:nvPr>
-            <p:ph type="sldNum" sz="quarter" idx="5"/>
+            <p:ph type="sldNum" idx="5" sz="quarter"/>
           </p:nvPr>
         </p:nvSpPr>
         <p:spPr/>
@@ -1787,7 +1755,7 @@
 </file>
 
 <file path=ppt/notesSlides/notesSlide21.xml><?xml version="1.0" encoding="utf-8"?>
-<p:notes xmlns:a="http://schemas.openxmlformats.org/drawingml/2006/main" xmlns:r="http://schemas.openxmlformats.org/officeDocument/2006/relationships" xmlns:p="http://schemas.openxmlformats.org/presentationml/2006/main">
+<p:notes xmlns:a="http://schemas.openxmlformats.org/drawingml/2006/main" xmlns:p="http://schemas.openxmlformats.org/presentationml/2006/main" xmlns:r="http://schemas.openxmlformats.org/officeDocument/2006/relationships">
   <p:cSld>
     <p:spTree>
       <p:nvGrpSpPr>
@@ -1807,7 +1775,7 @@
         <p:nvSpPr>
           <p:cNvPr id="2" name="Slide Image Placeholder 1"/>
           <p:cNvSpPr>
-            <a:spLocks noGrp="1" noRot="1" noChangeAspect="1"/>
+            <a:spLocks noGrp="1"/>
           </p:cNvSpPr>
           <p:nvPr>
             <p:ph type="sldImg" idx="2"/>
@@ -1822,7 +1790,7 @@
             <a:spLocks noGrp="1"/>
           </p:cNvSpPr>
           <p:nvPr>
-            <p:ph type="body" sz="quarter" idx="3"/>
+            <p:ph type="body" idx="3" sz="quarter"/>
           </p:nvPr>
         </p:nvSpPr>
         <p:spPr/>
@@ -1843,7 +1811,7 @@
             <a:spLocks noGrp="1"/>
           </p:cNvSpPr>
           <p:nvPr>
-            <p:ph type="sldNum" sz="quarter" idx="5"/>
+            <p:ph type="sldNum" idx="5" sz="quarter"/>
           </p:nvPr>
         </p:nvSpPr>
         <p:spPr/>
@@ -1857,7 +1825,7 @@
 </file>
 
 <file path=ppt/notesSlides/notesSlide22.xml><?xml version="1.0" encoding="utf-8"?>
-<p:notes xmlns:a="http://schemas.openxmlformats.org/drawingml/2006/main" xmlns:r="http://schemas.openxmlformats.org/officeDocument/2006/relationships" xmlns:p="http://schemas.openxmlformats.org/presentationml/2006/main">
+<p:notes xmlns:a="http://schemas.openxmlformats.org/drawingml/2006/main" xmlns:p="http://schemas.openxmlformats.org/presentationml/2006/main" xmlns:r="http://schemas.openxmlformats.org/officeDocument/2006/relationships">
   <p:cSld>
     <p:spTree>
       <p:nvGrpSpPr>
@@ -1877,7 +1845,7 @@
         <p:nvSpPr>
           <p:cNvPr id="2" name="Slide Image Placeholder 1"/>
           <p:cNvSpPr>
-            <a:spLocks noGrp="1" noRot="1" noChangeAspect="1"/>
+            <a:spLocks noGrp="1"/>
           </p:cNvSpPr>
           <p:nvPr>
             <p:ph type="sldImg" idx="2"/>
@@ -1892,7 +1860,7 @@
             <a:spLocks noGrp="1"/>
           </p:cNvSpPr>
           <p:nvPr>
-            <p:ph type="body" sz="quarter" idx="3"/>
+            <p:ph type="body" idx="3" sz="quarter"/>
           </p:nvPr>
         </p:nvSpPr>
         <p:spPr/>
@@ -1904,9 +1872,7 @@
               <a:t>A WebSocket starts as an HTTP GET asking to upgrade. Once the server answers 101, the same connection carries messages both ways, whenever either side likes. That's what a chat needs.</a:t>
             </a:r>
           </a:p>
-          <a:p>
-            <a:endParaRPr/>
-          </a:p>
+          <a:p/>
           <a:p>
             <a:r>
               <a:t>Unlike EventSource, a WebSocket does not reconnect by itself: when it closes, the page shows 'not connected' and you Join again.</a:t>
@@ -1921,7 +1887,7 @@
             <a:spLocks noGrp="1"/>
           </p:cNvSpPr>
           <p:nvPr>
-            <p:ph type="sldNum" sz="quarter" idx="5"/>
+            <p:ph type="sldNum" idx="5" sz="quarter"/>
           </p:nvPr>
         </p:nvSpPr>
         <p:spPr/>
@@ -1935,7 +1901,7 @@
 </file>
 
 <file path=ppt/notesSlides/notesSlide23.xml><?xml version="1.0" encoding="utf-8"?>
-<p:notes xmlns:a="http://schemas.openxmlformats.org/drawingml/2006/main" xmlns:r="http://schemas.openxmlformats.org/officeDocument/2006/relationships" xmlns:p="http://schemas.openxmlformats.org/presentationml/2006/main">
+<p:notes xmlns:a="http://schemas.openxmlformats.org/drawingml/2006/main" xmlns:p="http://schemas.openxmlformats.org/presentationml/2006/main" xmlns:r="http://schemas.openxmlformats.org/officeDocument/2006/relationships">
   <p:cSld>
     <p:spTree>
       <p:nvGrpSpPr>
@@ -1955,7 +1921,7 @@
         <p:nvSpPr>
           <p:cNvPr id="2" name="Slide Image Placeholder 1"/>
           <p:cNvSpPr>
-            <a:spLocks noGrp="1" noRot="1" noChangeAspect="1"/>
+            <a:spLocks noGrp="1"/>
           </p:cNvSpPr>
           <p:nvPr>
             <p:ph type="sldImg" idx="2"/>
@@ -1970,7 +1936,7 @@
             <a:spLocks noGrp="1"/>
           </p:cNvSpPr>
           <p:nvPr>
-            <p:ph type="body" sz="quarter" idx="3"/>
+            <p:ph type="body" idx="3" sz="quarter"/>
           </p:nvPr>
         </p:nvSpPr>
         <p:spPr/>
@@ -1982,17 +1948,13 @@
               <a:t>The three hooks attendees write in Exercise 4: Connect, Receive, Disconnect, named by OnWsUpgradeFn, OnWsReceiveFn and OnWsCloseFn.</a:t>
             </a:r>
           </a:p>
-          <a:p>
-            <a:endParaRPr/>
-          </a:p>
+          <a:p/>
           <a:p>
             <a:r>
               <a:t>Two things found while building it. WsSend accepts one connection namespace, or a list of connection names, but not a list of namespaces, so the chat keeps names in Clients. And Jarvis 1.23.0 never called the close hook, because Conga reports only 'Closed' when a client disconnects; 1.23.1, in the workshop materials, fixes that.</a:t>
             </a:r>
           </a:p>
-          <a:p>
-            <a:endParaRPr/>
-          </a:p>
+          <a:p/>
           <a:p>
             <a:r>
               <a:t>Every hook must return a result, or Jarvis won't start.</a:t>
@@ -2007,7 +1969,7 @@
             <a:spLocks noGrp="1"/>
           </p:cNvSpPr>
           <p:nvPr>
-            <p:ph type="sldNum" sz="quarter" idx="5"/>
+            <p:ph type="sldNum" idx="5" sz="quarter"/>
           </p:nvPr>
         </p:nvSpPr>
         <p:spPr/>
@@ -2021,7 +1983,7 @@
 </file>
 
 <file path=ppt/notesSlides/notesSlide24.xml><?xml version="1.0" encoding="utf-8"?>
-<p:notes xmlns:a="http://schemas.openxmlformats.org/drawingml/2006/main" xmlns:r="http://schemas.openxmlformats.org/officeDocument/2006/relationships" xmlns:p="http://schemas.openxmlformats.org/presentationml/2006/main">
+<p:notes xmlns:a="http://schemas.openxmlformats.org/drawingml/2006/main" xmlns:p="http://schemas.openxmlformats.org/presentationml/2006/main" xmlns:r="http://schemas.openxmlformats.org/officeDocument/2006/relationships">
   <p:cSld>
     <p:spTree>
       <p:nvGrpSpPr>
@@ -2041,7 +2003,7 @@
         <p:nvSpPr>
           <p:cNvPr id="2" name="Slide Image Placeholder 1"/>
           <p:cNvSpPr>
-            <a:spLocks noGrp="1" noRot="1" noChangeAspect="1"/>
+            <a:spLocks noGrp="1"/>
           </p:cNvSpPr>
           <p:nvPr>
             <p:ph type="sldImg" idx="2"/>
@@ -2056,7 +2018,7 @@
             <a:spLocks noGrp="1"/>
           </p:cNvSpPr>
           <p:nvPr>
-            <p:ph type="body" sz="quarter" idx="3"/>
+            <p:ph type="body" idx="3" sz="quarter"/>
           </p:nvPr>
         </p:nvSpPr>
         <p:spPr/>
@@ -2068,9 +2030,7 @@
               <a:t>WebSocketClient creates its client from a namespace of settings, like HttpCommand.New. OnWSReceive names the function called for each message, and it must be dyadic. A monadic function there fails in WebSocketClient's own thread, and the connection just closes: no error in the session, which is very confusing if you don't know.</a:t>
             </a:r>
           </a:p>
-          <a:p>
-            <a:endParaRPr/>
-          </a:p>
+          <a:p/>
           <a:p>
             <a:r>
               <a:t>Like HttpCommand.New, a misspelled setting doesn't signal; New returns a result with rc ¯11. Chat.Join checks rc after New and after Connect.</a:t>
@@ -2085,7 +2045,7 @@
             <a:spLocks noGrp="1"/>
           </p:cNvSpPr>
           <p:nvPr>
-            <p:ph type="sldNum" sz="quarter" idx="5"/>
+            <p:ph type="sldNum" idx="5" sz="quarter"/>
           </p:nvPr>
         </p:nvSpPr>
         <p:spPr/>
@@ -2099,7 +2059,7 @@
 </file>
 
 <file path=ppt/notesSlides/notesSlide25.xml><?xml version="1.0" encoding="utf-8"?>
-<p:notes xmlns:a="http://schemas.openxmlformats.org/drawingml/2006/main" xmlns:r="http://schemas.openxmlformats.org/officeDocument/2006/relationships" xmlns:p="http://schemas.openxmlformats.org/presentationml/2006/main">
+<p:notes xmlns:a="http://schemas.openxmlformats.org/drawingml/2006/main" xmlns:p="http://schemas.openxmlformats.org/presentationml/2006/main" xmlns:r="http://schemas.openxmlformats.org/officeDocument/2006/relationships">
   <p:cSld>
     <p:spTree>
       <p:nvGrpSpPr>
@@ -2119,7 +2079,7 @@
         <p:nvSpPr>
           <p:cNvPr id="2" name="Slide Image Placeholder 1"/>
           <p:cNvSpPr>
-            <a:spLocks noGrp="1" noRot="1" noChangeAspect="1"/>
+            <a:spLocks noGrp="1"/>
           </p:cNvSpPr>
           <p:nvPr>
             <p:ph type="sldImg" idx="2"/>
@@ -2134,7 +2094,7 @@
             <a:spLocks noGrp="1"/>
           </p:cNvSpPr>
           <p:nvPr>
-            <p:ph type="body" sz="quarter" idx="3"/>
+            <p:ph type="body" idx="3" sz="quarter"/>
           </p:nvPr>
         </p:nvSpPr>
         <p:spPr/>
@@ -2155,7 +2115,7 @@
             <a:spLocks noGrp="1"/>
           </p:cNvSpPr>
           <p:nvPr>
-            <p:ph type="sldNum" sz="quarter" idx="5"/>
+            <p:ph type="sldNum" idx="5" sz="quarter"/>
           </p:nvPr>
         </p:nvSpPr>
         <p:spPr/>
@@ -2169,7 +2129,7 @@
 </file>
 
 <file path=ppt/notesSlides/notesSlide26.xml><?xml version="1.0" encoding="utf-8"?>
-<p:notes xmlns:a="http://schemas.openxmlformats.org/drawingml/2006/main" xmlns:r="http://schemas.openxmlformats.org/officeDocument/2006/relationships" xmlns:p="http://schemas.openxmlformats.org/presentationml/2006/main">
+<p:notes xmlns:a="http://schemas.openxmlformats.org/drawingml/2006/main" xmlns:p="http://schemas.openxmlformats.org/presentationml/2006/main" xmlns:r="http://schemas.openxmlformats.org/officeDocument/2006/relationships">
   <p:cSld>
     <p:spTree>
       <p:nvGrpSpPr>
@@ -2189,7 +2149,7 @@
         <p:nvSpPr>
           <p:cNvPr id="2" name="Slide Image Placeholder 1"/>
           <p:cNvSpPr>
-            <a:spLocks noGrp="1" noRot="1" noChangeAspect="1"/>
+            <a:spLocks noGrp="1"/>
           </p:cNvSpPr>
           <p:nvPr>
             <p:ph type="sldImg" idx="2"/>
@@ -2204,7 +2164,7 @@
             <a:spLocks noGrp="1"/>
           </p:cNvSpPr>
           <p:nvPr>
-            <p:ph type="body" sz="quarter" idx="3"/>
+            <p:ph type="body" idx="3" sz="quarter"/>
           </p:nvPr>
         </p:nvSpPr>
         <p:spPr/>
@@ -2216,9 +2176,7 @@
               <a:t>Leave on screen.</a:t>
             </a:r>
           </a:p>
-          <a:p>
-            <a:endParaRPr/>
-          </a:p>
+          <a:p/>
           <a:p>
             <a:r>
               <a:t>Watch for: hooks must return a result (r←0); WsSend needs Clients to hold connection names; after changing Connect, Leave and Join again on the page so the new code sees the connection; the S3 stretch (an /apl bot) comes with a warning never to execute text received from the network.</a:t>
@@ -2233,7 +2191,7 @@
             <a:spLocks noGrp="1"/>
           </p:cNvSpPr>
           <p:nvPr>
-            <p:ph type="sldNum" sz="quarter" idx="5"/>
+            <p:ph type="sldNum" idx="5" sz="quarter"/>
           </p:nvPr>
         </p:nvSpPr>
         <p:spPr/>
@@ -2247,7 +2205,7 @@
 </file>
 
 <file path=ppt/notesSlides/notesSlide27.xml><?xml version="1.0" encoding="utf-8"?>
-<p:notes xmlns:a="http://schemas.openxmlformats.org/drawingml/2006/main" xmlns:r="http://schemas.openxmlformats.org/officeDocument/2006/relationships" xmlns:p="http://schemas.openxmlformats.org/presentationml/2006/main">
+<p:notes xmlns:a="http://schemas.openxmlformats.org/drawingml/2006/main" xmlns:p="http://schemas.openxmlformats.org/presentationml/2006/main" xmlns:r="http://schemas.openxmlformats.org/officeDocument/2006/relationships">
   <p:cSld>
     <p:spTree>
       <p:nvGrpSpPr>
@@ -2267,7 +2225,7 @@
         <p:nvSpPr>
           <p:cNvPr id="2" name="Slide Image Placeholder 1"/>
           <p:cNvSpPr>
-            <a:spLocks noGrp="1" noRot="1" noChangeAspect="1"/>
+            <a:spLocks noGrp="1"/>
           </p:cNvSpPr>
           <p:nvPr>
             <p:ph type="sldImg" idx="2"/>
@@ -2282,7 +2240,7 @@
             <a:spLocks noGrp="1"/>
           </p:cNvSpPr>
           <p:nvPr>
-            <p:ph type="body" sz="quarter" idx="3"/>
+            <p:ph type="body" idx="3" sz="quarter"/>
           </p:nvPr>
         </p:nvSpPr>
         <p:spPr/>
@@ -2303,7 +2261,7 @@
             <a:spLocks noGrp="1"/>
           </p:cNvSpPr>
           <p:nvPr>
-            <p:ph type="sldNum" sz="quarter" idx="5"/>
+            <p:ph type="sldNum" idx="5" sz="quarter"/>
           </p:nvPr>
         </p:nvSpPr>
         <p:spPr/>
@@ -2317,7 +2275,7 @@
 </file>
 
 <file path=ppt/notesSlides/notesSlide28.xml><?xml version="1.0" encoding="utf-8"?>
-<p:notes xmlns:a="http://schemas.openxmlformats.org/drawingml/2006/main" xmlns:r="http://schemas.openxmlformats.org/officeDocument/2006/relationships" xmlns:p="http://schemas.openxmlformats.org/presentationml/2006/main">
+<p:notes xmlns:a="http://schemas.openxmlformats.org/drawingml/2006/main" xmlns:p="http://schemas.openxmlformats.org/presentationml/2006/main" xmlns:r="http://schemas.openxmlformats.org/officeDocument/2006/relationships">
   <p:cSld>
     <p:spTree>
       <p:nvGrpSpPr>
@@ -2337,7 +2295,7 @@
         <p:nvSpPr>
           <p:cNvPr id="2" name="Slide Image Placeholder 1"/>
           <p:cNvSpPr>
-            <a:spLocks noGrp="1" noRot="1" noChangeAspect="1"/>
+            <a:spLocks noGrp="1"/>
           </p:cNvSpPr>
           <p:nvPr>
             <p:ph type="sldImg" idx="2"/>
@@ -2352,7 +2310,7 @@
             <a:spLocks noGrp="1"/>
           </p:cNvSpPr>
           <p:nvPr>
-            <p:ph type="body" sz="quarter" idx="3"/>
+            <p:ph type="body" idx="3" sz="quarter"/>
           </p:nvPr>
         </p:nvSpPr>
         <p:spPr/>
@@ -2373,7 +2331,7 @@
             <a:spLocks noGrp="1"/>
           </p:cNvSpPr>
           <p:nvPr>
-            <p:ph type="sldNum" sz="quarter" idx="5"/>
+            <p:ph type="sldNum" idx="5" sz="quarter"/>
           </p:nvPr>
         </p:nvSpPr>
         <p:spPr/>
@@ -2387,7 +2345,7 @@
 </file>
 
 <file path=ppt/notesSlides/notesSlide3.xml><?xml version="1.0" encoding="utf-8"?>
-<p:notes xmlns:a="http://schemas.openxmlformats.org/drawingml/2006/main" xmlns:r="http://schemas.openxmlformats.org/officeDocument/2006/relationships" xmlns:p="http://schemas.openxmlformats.org/presentationml/2006/main">
+<p:notes xmlns:a="http://schemas.openxmlformats.org/drawingml/2006/main" xmlns:p="http://schemas.openxmlformats.org/presentationml/2006/main" xmlns:r="http://schemas.openxmlformats.org/officeDocument/2006/relationships">
   <p:cSld>
     <p:spTree>
       <p:nvGrpSpPr>
@@ -2407,7 +2365,7 @@
         <p:nvSpPr>
           <p:cNvPr id="2" name="Slide Image Placeholder 1"/>
           <p:cNvSpPr>
-            <a:spLocks noGrp="1" noRot="1" noChangeAspect="1"/>
+            <a:spLocks noGrp="1"/>
           </p:cNvSpPr>
           <p:nvPr>
             <p:ph type="sldImg" idx="2"/>
@@ -2422,7 +2380,7 @@
             <a:spLocks noGrp="1"/>
           </p:cNvSpPr>
           <p:nvPr>
-            <p:ph type="body" sz="quarter" idx="3"/>
+            <p:ph type="body" idx="3" sz="quarter"/>
           </p:nvPr>
         </p:nvSpPr>
         <p:spPr/>
@@ -2434,9 +2392,7 @@
               <a:t>This is what Exercise 1 builds: the client asks, and waits for the answer on the same connection. That's fine for quick answers. For slow work it causes three problems: connections held open, timeouts, and a client that can't get on with anything else.</a:t>
             </a:r>
           </a:p>
-          <a:p>
-            <a:endParaRPr/>
-          </a:p>
+          <a:p/>
           <a:p>
             <a:r>
               <a:t>The rest of the afternoon is three ways around this.</a:t>
@@ -2451,7 +2407,7 @@
             <a:spLocks noGrp="1"/>
           </p:cNvSpPr>
           <p:nvPr>
-            <p:ph type="sldNum" sz="quarter" idx="5"/>
+            <p:ph type="sldNum" idx="5" sz="quarter"/>
           </p:nvPr>
         </p:nvSpPr>
         <p:spPr/>
@@ -2465,7 +2421,7 @@
 </file>
 
 <file path=ppt/notesSlides/notesSlide4.xml><?xml version="1.0" encoding="utf-8"?>
-<p:notes xmlns:a="http://schemas.openxmlformats.org/drawingml/2006/main" xmlns:r="http://schemas.openxmlformats.org/officeDocument/2006/relationships" xmlns:p="http://schemas.openxmlformats.org/presentationml/2006/main">
+<p:notes xmlns:a="http://schemas.openxmlformats.org/drawingml/2006/main" xmlns:p="http://schemas.openxmlformats.org/presentationml/2006/main" xmlns:r="http://schemas.openxmlformats.org/officeDocument/2006/relationships">
   <p:cSld>
     <p:spTree>
       <p:nvGrpSpPr>
@@ -2485,7 +2441,7 @@
         <p:nvSpPr>
           <p:cNvPr id="2" name="Slide Image Placeholder 1"/>
           <p:cNvSpPr>
-            <a:spLocks noGrp="1" noRot="1" noChangeAspect="1"/>
+            <a:spLocks noGrp="1"/>
           </p:cNvSpPr>
           <p:nvPr>
             <p:ph type="sldImg" idx="2"/>
@@ -2500,7 +2456,7 @@
             <a:spLocks noGrp="1"/>
           </p:cNvSpPr>
           <p:nvPr>
-            <p:ph type="body" sz="quarter" idx="3"/>
+            <p:ph type="body" idx="3" sz="quarter"/>
           </p:nvPr>
         </p:nvSpPr>
         <p:spPr/>
@@ -2512,9 +2468,7 @@
               <a:t>Four patterns. Orange arrows go from the client, purple arrows from the server.</a:t>
             </a:r>
           </a:p>
-          <a:p>
-            <a:endParaRPr/>
-          </a:p>
+          <a:p/>
           <a:p>
             <a:r>
               <a:t>Polling: the client keeps asking. Simple, but most requests are wasted.</a:t>
@@ -2544,7 +2498,7 @@
             <a:spLocks noGrp="1"/>
           </p:cNvSpPr>
           <p:nvPr>
-            <p:ph type="sldNum" sz="quarter" idx="5"/>
+            <p:ph type="sldNum" idx="5" sz="quarter"/>
           </p:nvPr>
         </p:nvSpPr>
         <p:spPr/>
@@ -2558,7 +2512,7 @@
 </file>
 
 <file path=ppt/notesSlides/notesSlide5.xml><?xml version="1.0" encoding="utf-8"?>
-<p:notes xmlns:a="http://schemas.openxmlformats.org/drawingml/2006/main" xmlns:r="http://schemas.openxmlformats.org/officeDocument/2006/relationships" xmlns:p="http://schemas.openxmlformats.org/presentationml/2006/main">
+<p:notes xmlns:a="http://schemas.openxmlformats.org/drawingml/2006/main" xmlns:p="http://schemas.openxmlformats.org/presentationml/2006/main" xmlns:r="http://schemas.openxmlformats.org/officeDocument/2006/relationships">
   <p:cSld>
     <p:spTree>
       <p:nvGrpSpPr>
@@ -2578,7 +2532,7 @@
         <p:nvSpPr>
           <p:cNvPr id="2" name="Slide Image Placeholder 1"/>
           <p:cNvSpPr>
-            <a:spLocks noGrp="1" noRot="1" noChangeAspect="1"/>
+            <a:spLocks noGrp="1"/>
           </p:cNvSpPr>
           <p:nvPr>
             <p:ph type="sldImg" idx="2"/>
@@ -2593,7 +2547,7 @@
             <a:spLocks noGrp="1"/>
           </p:cNvSpPr>
           <p:nvPr>
-            <p:ph type="body" sz="quarter" idx="3"/>
+            <p:ph type="body" idx="3" sz="quarter"/>
           </p:nvPr>
         </p:nvSpPr>
         <p:spPr/>
@@ -2605,12 +2559,10 @@
               <a:t>The three tools, all open source from Dyalog, all in the Source folder of the workshop materials (Jarvis 1.23.1, HttpCommand 5.11.2, WebSocketClient 1.0.1).</a:t>
             </a:r>
           </a:p>
-          <a:p>
-            <a:endParaRPr/>
-          </a:p>
-          <a:p>
-            <a:r>
-              <a:t>HttpCommand is the client side: Exercises 1 and 2, and the worker in Exercise 2 uses it to call the web hook.</a:t>
+          <a:p/>
+          <a:p>
+            <a:r>
+              <a:t>HttpCommand is the client side: Exercises 1 and 2, and the worker in Exercise 2 uses it to call the web hook. r.IsOK is 1 only when the request worked (rc 0) and the server said yes (HttpStatus 200 to 299); when it's 0, rc, msg and HttpStatus say why.</a:t>
             </a:r>
           </a:p>
           <a:p>
@@ -2623,9 +2575,7 @@
               <a:t>WebSocketClient joins the Exercise 4 chat from APL.</a:t>
             </a:r>
           </a:p>
-          <a:p>
-            <a:endParaRPr/>
-          </a:p>
+          <a:p/>
           <a:p>
             <a:r>
               <a:t>All three sit on Conga. Setup copies Conga into # before loading them, which is why there's nothing to configure.</a:t>
@@ -2640,7 +2590,7 @@
             <a:spLocks noGrp="1"/>
           </p:cNvSpPr>
           <p:nvPr>
-            <p:ph type="sldNum" sz="quarter" idx="5"/>
+            <p:ph type="sldNum" idx="5" sz="quarter"/>
           </p:nvPr>
         </p:nvSpPr>
         <p:spPr/>
@@ -2654,7 +2604,7 @@
 </file>
 
 <file path=ppt/notesSlides/notesSlide6.xml><?xml version="1.0" encoding="utf-8"?>
-<p:notes xmlns:a="http://schemas.openxmlformats.org/drawingml/2006/main" xmlns:r="http://schemas.openxmlformats.org/officeDocument/2006/relationships" xmlns:p="http://schemas.openxmlformats.org/presentationml/2006/main">
+<p:notes xmlns:a="http://schemas.openxmlformats.org/drawingml/2006/main" xmlns:p="http://schemas.openxmlformats.org/presentationml/2006/main" xmlns:r="http://schemas.openxmlformats.org/officeDocument/2006/relationships">
   <p:cSld>
     <p:spTree>
       <p:nvGrpSpPr>
@@ -2674,7 +2624,7 @@
         <p:nvSpPr>
           <p:cNvPr id="2" name="Slide Image Placeholder 1"/>
           <p:cNvSpPr>
-            <a:spLocks noGrp="1" noRot="1" noChangeAspect="1"/>
+            <a:spLocks noGrp="1"/>
           </p:cNvSpPr>
           <p:nvPr>
             <p:ph type="sldImg" idx="2"/>
@@ -2689,7 +2639,7 @@
             <a:spLocks noGrp="1"/>
           </p:cNvSpPr>
           <p:nvPr>
-            <p:ph type="body" sz="quarter" idx="3"/>
+            <p:ph type="body" idx="3" sz="quarter"/>
           </p:nvPr>
         </p:nvSpPr>
         <p:spPr/>
@@ -2698,23 +2648,19 @@
           <a:lstStyle/>
           <a:p>
             <a:r>
-              <a:t>Every exercise works the same way. Setup once per session. Each exercise has a Run function that starts its servers from the Start folder, where a few short functions are left for you to write.</a:t>
-            </a:r>
-          </a:p>
-          <a:p>
-            <a:endParaRPr/>
-          </a:p>
+              <a:t>Every exercise works the same way. Setup once per session, then Load 1 (and so on) for each exercise. Each exercise has a Run function, Run1 to Run4, that starts its servers from the Start folder, where a few short functions are left for you to write.</a:t>
+            </a:r>
+          </a:p>
+          <a:p/>
           <a:p>
             <a:r>
               <a:t>You edit with )ED, and Jarvis uses the new definition on the next request, so there's no restart. Exercise 3 has one exception: its broadcast loop, which the README explains (Restart).</a:t>
             </a:r>
           </a:p>
-          <a:p>
-            <a:endParaRPr/>
-          </a:p>
-          <a:p>
-            <a:r>
-              <a:t>If you fall behind, 'Solution' Run loads the finished version. Run stops any server it started before, so running it twice can't leave an old server answering.</a:t>
+          <a:p/>
+          <a:p>
+            <a:r>
+              <a:t>If you fall behind, 'Solution' Run1 (and so on) loads the finished version. Each Run function stops any server it started before, so running it twice can't leave an old server answering.</a:t>
             </a:r>
           </a:p>
         </p:txBody>
@@ -2726,7 +2672,7 @@
             <a:spLocks noGrp="1"/>
           </p:cNvSpPr>
           <p:nvPr>
-            <p:ph type="sldNum" sz="quarter" idx="5"/>
+            <p:ph type="sldNum" idx="5" sz="quarter"/>
           </p:nvPr>
         </p:nvSpPr>
         <p:spPr/>
@@ -2740,7 +2686,7 @@
 </file>
 
 <file path=ppt/notesSlides/notesSlide7.xml><?xml version="1.0" encoding="utf-8"?>
-<p:notes xmlns:a="http://schemas.openxmlformats.org/drawingml/2006/main" xmlns:r="http://schemas.openxmlformats.org/officeDocument/2006/relationships" xmlns:p="http://schemas.openxmlformats.org/presentationml/2006/main">
+<p:notes xmlns:a="http://schemas.openxmlformats.org/drawingml/2006/main" xmlns:p="http://schemas.openxmlformats.org/presentationml/2006/main" xmlns:r="http://schemas.openxmlformats.org/officeDocument/2006/relationships">
   <p:cSld>
     <p:spTree>
       <p:nvGrpSpPr>
@@ -2760,7 +2706,7 @@
         <p:nvSpPr>
           <p:cNvPr id="2" name="Slide Image Placeholder 1"/>
           <p:cNvSpPr>
-            <a:spLocks noGrp="1" noRot="1" noChangeAspect="1"/>
+            <a:spLocks noGrp="1"/>
           </p:cNvSpPr>
           <p:nvPr>
             <p:ph type="sldImg" idx="2"/>
@@ -2775,7 +2721,7 @@
             <a:spLocks noGrp="1"/>
           </p:cNvSpPr>
           <p:nvPr>
-            <p:ph type="body" sz="quarter" idx="3"/>
+            <p:ph type="body" idx="3" sz="quarter"/>
           </p:nvPr>
         </p:nvSpPr>
         <p:spPr/>
@@ -2787,9 +2733,7 @@
               <a:t>Attendees may be on Dyalog 19 or 20. All the supplied code is Dyalog 19 style, so it runs everywhere. Where 20 is clearly neater, the READMEs show the 20 version too, and the solutions carry it as a ⍝ v20: comment.</a:t>
             </a:r>
           </a:p>
-          <a:p>
-            <a:endParaRPr/>
-          </a:p>
+          <a:p/>
           <a:p>
             <a:r>
               <a:t>Only three 20 features are used: array notation (shown here), ⎕VGET with a fallback value, and ⎕VSET.</a:t>
@@ -2804,7 +2748,7 @@
             <a:spLocks noGrp="1"/>
           </p:cNvSpPr>
           <p:nvPr>
-            <p:ph type="sldNum" sz="quarter" idx="5"/>
+            <p:ph type="sldNum" idx="5" sz="quarter"/>
           </p:nvPr>
         </p:nvSpPr>
         <p:spPr/>
@@ -2818,7 +2762,7 @@
 </file>
 
 <file path=ppt/notesSlides/notesSlide8.xml><?xml version="1.0" encoding="utf-8"?>
-<p:notes xmlns:a="http://schemas.openxmlformats.org/drawingml/2006/main" xmlns:r="http://schemas.openxmlformats.org/officeDocument/2006/relationships" xmlns:p="http://schemas.openxmlformats.org/presentationml/2006/main">
+<p:notes xmlns:a="http://schemas.openxmlformats.org/drawingml/2006/main" xmlns:p="http://schemas.openxmlformats.org/presentationml/2006/main" xmlns:r="http://schemas.openxmlformats.org/officeDocument/2006/relationships">
   <p:cSld>
     <p:spTree>
       <p:nvGrpSpPr>
@@ -2838,7 +2782,7 @@
         <p:nvSpPr>
           <p:cNvPr id="2" name="Slide Image Placeholder 1"/>
           <p:cNvSpPr>
-            <a:spLocks noGrp="1" noRot="1" noChangeAspect="1"/>
+            <a:spLocks noGrp="1"/>
           </p:cNvSpPr>
           <p:nvPr>
             <p:ph type="sldImg" idx="2"/>
@@ -2853,7 +2797,7 @@
             <a:spLocks noGrp="1"/>
           </p:cNvSpPr>
           <p:nvPr>
-            <p:ph type="body" sz="quarter" idx="3"/>
+            <p:ph type="body" idx="3" sz="quarter"/>
           </p:nvPr>
         </p:nvSpPr>
         <p:spPr/>
@@ -2865,17 +2809,13 @@
               <a:t>Leave this on screen for the 30 minutes.</a:t>
             </a:r>
           </a:p>
-          <a:p>
-            <a:endParaRPr/>
-          </a:p>
+          <a:p/>
           <a:p>
             <a:r>
               <a:t>Key points to watch for: rc is 0 when the request worked even if HttpStatus says 404; Jarvis passes '' rather than a namespace when a request has no body; GET with a query string needs AllowGETs←1.</a:t>
             </a:r>
           </a:p>
-          <a:p>
-            <a:endParaRPr/>
-          </a:p>
+          <a:p/>
           <a:p>
             <a:r>
               <a:t>If the venue network is down, Part A has an offline fallback against the attendee's own Part B server.</a:t>
@@ -2890,7 +2830,7 @@
             <a:spLocks noGrp="1"/>
           </p:cNvSpPr>
           <p:nvPr>
-            <p:ph type="sldNum" sz="quarter" idx="5"/>
+            <p:ph type="sldNum" idx="5" sz="quarter"/>
           </p:nvPr>
         </p:nvSpPr>
         <p:spPr/>
@@ -2904,7 +2844,7 @@
 </file>
 
 <file path=ppt/notesSlides/notesSlide9.xml><?xml version="1.0" encoding="utf-8"?>
-<p:notes xmlns:a="http://schemas.openxmlformats.org/drawingml/2006/main" xmlns:r="http://schemas.openxmlformats.org/officeDocument/2006/relationships" xmlns:p="http://schemas.openxmlformats.org/presentationml/2006/main">
+<p:notes xmlns:a="http://schemas.openxmlformats.org/drawingml/2006/main" xmlns:p="http://schemas.openxmlformats.org/presentationml/2006/main" xmlns:r="http://schemas.openxmlformats.org/officeDocument/2006/relationships">
   <p:cSld>
     <p:spTree>
       <p:nvGrpSpPr>
@@ -2924,7 +2864,7 @@
         <p:nvSpPr>
           <p:cNvPr id="2" name="Slide Image Placeholder 1"/>
           <p:cNvSpPr>
-            <a:spLocks noGrp="1" noRot="1" noChangeAspect="1"/>
+            <a:spLocks noGrp="1"/>
           </p:cNvSpPr>
           <p:nvPr>
             <p:ph type="sldImg" idx="2"/>
@@ -2939,7 +2879,7 @@
             <a:spLocks noGrp="1"/>
           </p:cNvSpPr>
           <p:nvPr>
-            <p:ph type="body" sz="quarter" idx="3"/>
+            <p:ph type="body" idx="3" sz="quarter"/>
           </p:nvPr>
         </p:nvSpPr>
         <p:spPr/>
@@ -2960,7 +2900,7 @@
             <a:spLocks noGrp="1"/>
           </p:cNvSpPr>
           <p:nvPr>
-            <p:ph type="sldNum" sz="quarter" idx="5"/>
+            <p:ph type="sldNum" idx="5" sz="quarter"/>
           </p:nvPr>
         </p:nvSpPr>
         <p:spPr/>
@@ -5061,7 +5001,7 @@
 </file>
 
 <file path=ppt/slides/slide1.xml><?xml version="1.0" encoding="utf-8"?>
-<p:sld xmlns:a="http://schemas.openxmlformats.org/drawingml/2006/main" xmlns:r="http://schemas.openxmlformats.org/officeDocument/2006/relationships" xmlns:p="http://schemas.openxmlformats.org/presentationml/2006/main">
+<p:sld xmlns:a="http://schemas.openxmlformats.org/drawingml/2006/main" xmlns:p="http://schemas.openxmlformats.org/presentationml/2006/main" xmlns:r="http://schemas.openxmlformats.org/officeDocument/2006/relationships">
   <p:cSld>
     <p:spTree>
       <p:nvGrpSpPr>
@@ -5069,14 +5009,7 @@
         <p:cNvGrpSpPr/>
         <p:nvPr/>
       </p:nvGrpSpPr>
-      <p:grpSpPr>
-        <a:xfrm>
-          <a:off x="0" y="0"/>
-          <a:ext cx="0" cy="0"/>
-          <a:chOff x="0" y="0"/>
-          <a:chExt cx="0" cy="0"/>
-        </a:xfrm>
-      </p:grpSpPr>
+      <p:grpSpPr/>
       <p:sp>
         <p:nvSpPr>
           <p:cNvPr id="2" name="Title 1"/>
@@ -5115,7 +5048,6 @@
               <a:t>and WebSockets in Dyalog APL</a:t>
             </a:r>
             <a:br/>
-            <a:endParaRPr/>
           </a:p>
         </p:txBody>
       </p:sp>
@@ -5126,7 +5058,7 @@
             <a:spLocks noGrp="1"/>
           </p:cNvSpPr>
           <p:nvPr>
-            <p:ph type="body" sz="quarter" idx="10"/>
+            <p:ph type="body" idx="10" sz="quarter"/>
           </p:nvPr>
         </p:nvSpPr>
         <p:spPr/>
@@ -5140,7 +5072,7 @@
                   <a:schemeClr val="tx1"/>
                 </a:solidFill>
               </a:rPr>
-              <a:t>Brian Becker</a:t>
+              <a:t>Brian Becker, Holden Hoover</a:t>
             </a:r>
           </a:p>
           <a:p>
@@ -5164,7 +5096,7 @@
 </file>
 
 <file path=ppt/slides/slide10.xml><?xml version="1.0" encoding="utf-8"?>
-<p:sld xmlns:a="http://schemas.openxmlformats.org/drawingml/2006/main" xmlns:r="http://schemas.openxmlformats.org/officeDocument/2006/relationships" xmlns:p="http://schemas.openxmlformats.org/presentationml/2006/main">
+<p:sld xmlns:a="http://schemas.openxmlformats.org/drawingml/2006/main" xmlns:p="http://schemas.openxmlformats.org/presentationml/2006/main" xmlns:r="http://schemas.openxmlformats.org/officeDocument/2006/relationships">
   <p:cSld>
     <p:spTree>
       <p:nvGrpSpPr>
@@ -5172,14 +5104,7 @@
         <p:cNvGrpSpPr/>
         <p:nvPr/>
       </p:nvGrpSpPr>
-      <p:grpSpPr>
-        <a:xfrm>
-          <a:off x="0" y="0"/>
-          <a:ext cx="0" cy="0"/>
-          <a:chOff x="0" y="0"/>
-          <a:chExt cx="0" cy="0"/>
-        </a:xfrm>
-      </p:grpSpPr>
+      <p:grpSpPr/>
       <p:sp>
         <p:nvSpPr>
           <p:cNvPr id="2" name="Title 1"/>
@@ -5279,9 +5204,7 @@
         <p:txBody>
           <a:bodyPr rtlCol="0" anchor="ctr"/>
           <a:lstStyle/>
-          <a:p>
-            <a:endParaRPr/>
-          </a:p>
+          <a:p/>
         </p:txBody>
       </p:sp>
       <p:sp>
@@ -5301,7 +5224,7 @@
           <a:noFill/>
         </p:spPr>
         <p:txBody>
-          <a:bodyPr wrap="square" lIns="0" tIns="0" rIns="0" bIns="0" anchor="ctr">
+          <a:bodyPr wrap="square" anchor="ctr" lIns="0" rIns="0" tIns="0" bIns="0">
             <a:spAutoFit/>
           </a:bodyPr>
           <a:lstStyle/>
@@ -5395,9 +5318,7 @@
         <p:txBody>
           <a:bodyPr rtlCol="0" anchor="ctr"/>
           <a:lstStyle/>
-          <a:p>
-            <a:endParaRPr/>
-          </a:p>
+          <a:p/>
         </p:txBody>
       </p:sp>
       <p:sp>
@@ -5417,7 +5338,7 @@
           <a:noFill/>
         </p:spPr>
         <p:txBody>
-          <a:bodyPr wrap="square" lIns="0" tIns="0" rIns="0" bIns="0" anchor="ctr">
+          <a:bodyPr wrap="square" anchor="ctr" lIns="0" rIns="0" tIns="0" bIns="0">
             <a:spAutoFit/>
           </a:bodyPr>
           <a:lstStyle/>
@@ -5511,9 +5432,7 @@
         <p:txBody>
           <a:bodyPr rtlCol="0" anchor="ctr"/>
           <a:lstStyle/>
-          <a:p>
-            <a:endParaRPr/>
-          </a:p>
+          <a:p/>
         </p:txBody>
       </p:sp>
       <p:sp>
@@ -5533,7 +5452,7 @@
           <a:noFill/>
         </p:spPr>
         <p:txBody>
-          <a:bodyPr wrap="square" lIns="0" tIns="0" rIns="0" bIns="0" anchor="ctr">
+          <a:bodyPr wrap="square" anchor="ctr" lIns="0" rIns="0" tIns="0" bIns="0">
             <a:spAutoFit/>
           </a:bodyPr>
           <a:lstStyle/>
@@ -5603,7 +5522,7 @@
           <a:noFill/>
         </p:spPr>
         <p:txBody>
-          <a:bodyPr wrap="square" lIns="0" tIns="0" rIns="0" bIns="0" anchor="b">
+          <a:bodyPr wrap="square" anchor="b" lIns="0" rIns="0" tIns="0" bIns="0">
             <a:spAutoFit/>
           </a:bodyPr>
           <a:lstStyle/>
@@ -5698,7 +5617,7 @@
           <a:noFill/>
         </p:spPr>
         <p:txBody>
-          <a:bodyPr wrap="square" lIns="0" tIns="0" rIns="0" bIns="0" anchor="b">
+          <a:bodyPr wrap="square" anchor="b" lIns="0" rIns="0" tIns="0" bIns="0">
             <a:spAutoFit/>
           </a:bodyPr>
           <a:lstStyle/>
@@ -5760,9 +5679,7 @@
         <p:txBody>
           <a:bodyPr rtlCol="0" anchor="ctr"/>
           <a:lstStyle/>
-          <a:p>
-            <a:endParaRPr/>
-          </a:p>
+          <a:p/>
         </p:txBody>
       </p:sp>
       <p:sp>
@@ -5782,7 +5699,7 @@
           <a:noFill/>
         </p:spPr>
         <p:txBody>
-          <a:bodyPr wrap="square" lIns="0" tIns="0" rIns="0" bIns="0" anchor="ctr">
+          <a:bodyPr wrap="square" anchor="ctr" lIns="0" rIns="0" tIns="0" bIns="0">
             <a:spAutoFit/>
           </a:bodyPr>
           <a:lstStyle/>
@@ -5863,7 +5780,7 @@
           <a:noFill/>
         </p:spPr>
         <p:txBody>
-          <a:bodyPr wrap="square" lIns="0" tIns="0" rIns="0" bIns="0" anchor="b">
+          <a:bodyPr wrap="square" anchor="b" lIns="0" rIns="0" tIns="0" bIns="0">
             <a:spAutoFit/>
           </a:bodyPr>
           <a:lstStyle/>
@@ -5914,7 +5831,7 @@
 </file>
 
 <file path=ppt/slides/slide11.xml><?xml version="1.0" encoding="utf-8"?>
-<p:sld xmlns:a="http://schemas.openxmlformats.org/drawingml/2006/main" xmlns:r="http://schemas.openxmlformats.org/officeDocument/2006/relationships" xmlns:p="http://schemas.openxmlformats.org/presentationml/2006/main">
+<p:sld xmlns:a="http://schemas.openxmlformats.org/drawingml/2006/main" xmlns:p="http://schemas.openxmlformats.org/presentationml/2006/main" xmlns:r="http://schemas.openxmlformats.org/officeDocument/2006/relationships">
   <p:cSld>
     <p:spTree>
       <p:nvGrpSpPr>
@@ -5922,14 +5839,7 @@
         <p:cNvGrpSpPr/>
         <p:nvPr/>
       </p:nvGrpSpPr>
-      <p:grpSpPr>
-        <a:xfrm>
-          <a:off x="0" y="0"/>
-          <a:ext cx="0" cy="0"/>
-          <a:chOff x="0" y="0"/>
-          <a:chExt cx="0" cy="0"/>
-        </a:xfrm>
-      </p:grpSpPr>
+      <p:grpSpPr/>
       <p:sp>
         <p:nvSpPr>
           <p:cNvPr id="2" name="Title 1"/>
@@ -5993,9 +5903,7 @@
         <p:txBody>
           <a:bodyPr rtlCol="0" anchor="ctr"/>
           <a:lstStyle/>
-          <a:p>
-            <a:endParaRPr/>
-          </a:p>
+          <a:p/>
         </p:txBody>
       </p:sp>
       <p:sp>
@@ -6015,7 +5923,7 @@
           <a:noFill/>
         </p:spPr>
         <p:txBody>
-          <a:bodyPr wrap="square" lIns="0" tIns="0" rIns="0" bIns="0" anchor="t">
+          <a:bodyPr wrap="square" anchor="t" lIns="0" rIns="0" tIns="0" bIns="0">
             <a:spAutoFit/>
           </a:bodyPr>
           <a:lstStyle/>
@@ -6104,7 +6012,7 @@
           <a:noFill/>
         </p:spPr>
         <p:txBody>
-          <a:bodyPr wrap="square" lIns="0" tIns="0" rIns="0" bIns="0" anchor="t">
+          <a:bodyPr wrap="square" anchor="t" lIns="0" rIns="0" tIns="0" bIns="0">
             <a:spAutoFit/>
           </a:bodyPr>
           <a:lstStyle/>
@@ -6161,9 +6069,7 @@
         <p:txBody>
           <a:bodyPr rtlCol="0" anchor="ctr"/>
           <a:lstStyle/>
-          <a:p>
-            <a:endParaRPr/>
-          </a:p>
+          <a:p/>
         </p:txBody>
       </p:sp>
       <p:sp>
@@ -6183,7 +6089,7 @@
           <a:noFill/>
         </p:spPr>
         <p:txBody>
-          <a:bodyPr wrap="square" lIns="0" tIns="0" rIns="0" bIns="0" anchor="t">
+          <a:bodyPr wrap="square" anchor="t" lIns="0" rIns="0" tIns="0" bIns="0">
             <a:spAutoFit/>
           </a:bodyPr>
           <a:lstStyle/>
@@ -6216,7 +6122,7 @@
           <a:noFill/>
         </p:spPr>
         <p:txBody>
-          <a:bodyPr wrap="square" lIns="0" tIns="0" rIns="0" bIns="0" anchor="t">
+          <a:bodyPr wrap="square" anchor="t" lIns="0" rIns="0" tIns="0" bIns="0">
             <a:spAutoFit/>
           </a:bodyPr>
           <a:lstStyle/>
@@ -6273,9 +6179,7 @@
         <p:txBody>
           <a:bodyPr rtlCol="0" anchor="ctr"/>
           <a:lstStyle/>
-          <a:p>
-            <a:endParaRPr/>
-          </a:p>
+          <a:p/>
         </p:txBody>
       </p:sp>
       <p:sp>
@@ -6295,7 +6199,7 @@
           <a:noFill/>
         </p:spPr>
         <p:txBody>
-          <a:bodyPr wrap="square" lIns="0" tIns="0" rIns="0" bIns="0" anchor="t">
+          <a:bodyPr wrap="square" anchor="t" lIns="0" rIns="0" tIns="0" bIns="0">
             <a:spAutoFit/>
           </a:bodyPr>
           <a:lstStyle/>
@@ -6328,7 +6232,7 @@
           <a:noFill/>
         </p:spPr>
         <p:txBody>
-          <a:bodyPr wrap="square" lIns="0" tIns="0" rIns="0" bIns="0" anchor="t">
+          <a:bodyPr wrap="square" anchor="t" lIns="0" rIns="0" tIns="0" bIns="0">
             <a:spAutoFit/>
           </a:bodyPr>
           <a:lstStyle/>
@@ -6385,9 +6289,7 @@
         <p:txBody>
           <a:bodyPr rtlCol="0" anchor="ctr"/>
           <a:lstStyle/>
-          <a:p>
-            <a:endParaRPr/>
-          </a:p>
+          <a:p/>
         </p:txBody>
       </p:sp>
       <p:sp>
@@ -6407,7 +6309,7 @@
           <a:noFill/>
         </p:spPr>
         <p:txBody>
-          <a:bodyPr wrap="square" lIns="0" tIns="0" rIns="0" bIns="0" anchor="t">
+          <a:bodyPr wrap="square" anchor="t" lIns="0" rIns="0" tIns="0" bIns="0">
             <a:spAutoFit/>
           </a:bodyPr>
           <a:lstStyle/>
@@ -6440,7 +6342,7 @@
           <a:noFill/>
         </p:spPr>
         <p:txBody>
-          <a:bodyPr wrap="square" lIns="0" tIns="0" rIns="0" bIns="0" anchor="t">
+          <a:bodyPr wrap="square" anchor="t" lIns="0" rIns="0" tIns="0" bIns="0">
             <a:spAutoFit/>
           </a:bodyPr>
           <a:lstStyle/>
@@ -6465,7 +6367,7 @@
 </file>
 
 <file path=ppt/slides/slide12.xml><?xml version="1.0" encoding="utf-8"?>
-<p:sld xmlns:a="http://schemas.openxmlformats.org/drawingml/2006/main" xmlns:r="http://schemas.openxmlformats.org/officeDocument/2006/relationships" xmlns:p="http://schemas.openxmlformats.org/presentationml/2006/main">
+<p:sld xmlns:a="http://schemas.openxmlformats.org/drawingml/2006/main" xmlns:p="http://schemas.openxmlformats.org/presentationml/2006/main" xmlns:r="http://schemas.openxmlformats.org/officeDocument/2006/relationships">
   <p:cSld>
     <p:spTree>
       <p:nvGrpSpPr>
@@ -6473,14 +6375,7 @@
         <p:cNvGrpSpPr/>
         <p:nvPr/>
       </p:nvGrpSpPr>
-      <p:grpSpPr>
-        <a:xfrm>
-          <a:off x="0" y="0"/>
-          <a:ext cx="0" cy="0"/>
-          <a:chOff x="0" y="0"/>
-          <a:chExt cx="0" cy="0"/>
-        </a:xfrm>
-      </p:grpSpPr>
+      <p:grpSpPr/>
       <p:sp>
         <p:nvSpPr>
           <p:cNvPr id="2" name="Title 1"/>
@@ -6544,9 +6439,7 @@
         <p:txBody>
           <a:bodyPr rtlCol="0" anchor="ctr"/>
           <a:lstStyle/>
-          <a:p>
-            <a:endParaRPr/>
-          </a:p>
+          <a:p/>
         </p:txBody>
       </p:sp>
       <p:sp>
@@ -6566,7 +6459,7 @@
           <a:noFill/>
         </p:spPr>
         <p:txBody>
-          <a:bodyPr wrap="square" lIns="0" tIns="0" rIns="0" bIns="0" anchor="t">
+          <a:bodyPr wrap="square" anchor="t" lIns="0" rIns="0" tIns="0" bIns="0">
             <a:spAutoFit/>
           </a:bodyPr>
           <a:lstStyle/>
@@ -6657,9 +6550,7 @@
         <p:txBody>
           <a:bodyPr rtlCol="0" anchor="ctr"/>
           <a:lstStyle/>
-          <a:p>
-            <a:endParaRPr/>
-          </a:p>
+          <a:p/>
         </p:txBody>
       </p:sp>
       <p:sp>
@@ -6679,7 +6570,7 @@
           <a:noFill/>
         </p:spPr>
         <p:txBody>
-          <a:bodyPr wrap="square" lIns="0" tIns="0" rIns="0" bIns="0" anchor="t">
+          <a:bodyPr wrap="square" anchor="t" lIns="0" rIns="0" tIns="0" bIns="0">
             <a:spAutoFit/>
           </a:bodyPr>
           <a:lstStyle/>
@@ -6712,7 +6603,7 @@
           <a:noFill/>
         </p:spPr>
         <p:txBody>
-          <a:bodyPr wrap="square" lIns="0" tIns="0" rIns="0" bIns="0" anchor="t">
+          <a:bodyPr wrap="square" anchor="t" lIns="0" rIns="0" tIns="0" bIns="0">
             <a:spAutoFit/>
           </a:bodyPr>
           <a:lstStyle/>
@@ -6816,9 +6707,7 @@
         <p:txBody>
           <a:bodyPr rtlCol="0" anchor="ctr"/>
           <a:lstStyle/>
-          <a:p>
-            <a:endParaRPr/>
-          </a:p>
+          <a:p/>
         </p:txBody>
       </p:sp>
       <p:sp>
@@ -6838,7 +6727,7 @@
           <a:noFill/>
         </p:spPr>
         <p:txBody>
-          <a:bodyPr wrap="square" lIns="0" tIns="0" rIns="0" bIns="0" anchor="t">
+          <a:bodyPr wrap="square" anchor="t" lIns="0" rIns="0" tIns="0" bIns="0">
             <a:spAutoFit/>
           </a:bodyPr>
           <a:lstStyle/>
@@ -6871,7 +6760,7 @@
           <a:noFill/>
         </p:spPr>
         <p:txBody>
-          <a:bodyPr wrap="square" lIns="0" tIns="0" rIns="0" bIns="0" anchor="t">
+          <a:bodyPr wrap="square" anchor="t" lIns="0" rIns="0" tIns="0" bIns="0">
             <a:spAutoFit/>
           </a:bodyPr>
           <a:lstStyle/>
@@ -6896,7 +6785,7 @@
 </file>
 
 <file path=ppt/slides/slide13.xml><?xml version="1.0" encoding="utf-8"?>
-<p:sld xmlns:a="http://schemas.openxmlformats.org/drawingml/2006/main" xmlns:r="http://schemas.openxmlformats.org/officeDocument/2006/relationships" xmlns:p="http://schemas.openxmlformats.org/presentationml/2006/main">
+<p:sld xmlns:a="http://schemas.openxmlformats.org/drawingml/2006/main" xmlns:p="http://schemas.openxmlformats.org/presentationml/2006/main" xmlns:r="http://schemas.openxmlformats.org/officeDocument/2006/relationships">
   <p:cSld>
     <p:spTree>
       <p:nvGrpSpPr>
@@ -6904,14 +6793,7 @@
         <p:cNvGrpSpPr/>
         <p:nvPr/>
       </p:nvGrpSpPr>
-      <p:grpSpPr>
-        <a:xfrm>
-          <a:off x="0" y="0"/>
-          <a:ext cx="0" cy="0"/>
-          <a:chOff x="0" y="0"/>
-          <a:chExt cx="0" cy="0"/>
-        </a:xfrm>
-      </p:grpSpPr>
+      <p:grpSpPr/>
       <p:sp>
         <p:nvSpPr>
           <p:cNvPr id="2" name="Title 1"/>
@@ -6953,36 +6835,16 @@
                 <a:tableStyleId>{5C22544A-7EE6-4342-B048-85BDC9FD1C3A}</a:tableStyleId>
               </a:tblPr>
               <a:tblGrid>
-                <a:gridCol w="1822318">
-                  <a:extLst>
-                    <a:ext uri="{9D8B030D-6E8A-4147-A177-3AD203B41FA5}">
-                      <a16:colId xmlns:a16="http://schemas.microsoft.com/office/drawing/2014/main" val="20000"/>
-                    </a:ext>
-                  </a:extLst>
-                </a:gridCol>
-                <a:gridCol w="3329235">
-                  <a:extLst>
-                    <a:ext uri="{9D8B030D-6E8A-4147-A177-3AD203B41FA5}">
-                      <a16:colId xmlns:a16="http://schemas.microsoft.com/office/drawing/2014/main" val="20001"/>
-                    </a:ext>
-                  </a:extLst>
-                </a:gridCol>
-                <a:gridCol w="3350262">
-                  <a:extLst>
-                    <a:ext uri="{9D8B030D-6E8A-4147-A177-3AD203B41FA5}">
-                      <a16:colId xmlns:a16="http://schemas.microsoft.com/office/drawing/2014/main" val="20002"/>
-                    </a:ext>
-                  </a:extLst>
-                </a:gridCol>
+                <a:gridCol w="1822318"/>
+                <a:gridCol w="3329235"/>
+                <a:gridCol w="3350262"/>
               </a:tblGrid>
               <a:tr h="328473">
                 <a:tc>
                   <a:txBody>
                     <a:bodyPr/>
                     <a:lstStyle/>
-                    <a:p>
-                      <a:endParaRPr/>
-                    </a:p>
+                    <a:p/>
                   </a:txBody>
                   <a:tcPr marL="73152" marR="73152" marT="65694" marB="65694" anchor="ctr">
                     <a:solidFill>
@@ -7032,11 +6894,6 @@
                     </a:solidFill>
                   </a:tcPr>
                 </a:tc>
-                <a:extLst>
-                  <a:ext uri="{0D108BD9-81ED-4DB2-BD59-A6C34878D82A}">
-                    <a16:rowId xmlns:a16="http://schemas.microsoft.com/office/drawing/2014/main" val="10000"/>
-                  </a:ext>
-                </a:extLst>
               </a:tr>
               <a:tr h="328473">
                 <a:tc>
@@ -7102,11 +6959,6 @@
                     </a:solidFill>
                   </a:tcPr>
                 </a:tc>
-                <a:extLst>
-                  <a:ext uri="{0D108BD9-81ED-4DB2-BD59-A6C34878D82A}">
-                    <a16:rowId xmlns:a16="http://schemas.microsoft.com/office/drawing/2014/main" val="10001"/>
-                  </a:ext>
-                </a:extLst>
               </a:tr>
               <a:tr h="328473">
                 <a:tc>
@@ -7172,11 +7024,6 @@
                     </a:solidFill>
                   </a:tcPr>
                 </a:tc>
-                <a:extLst>
-                  <a:ext uri="{0D108BD9-81ED-4DB2-BD59-A6C34878D82A}">
-                    <a16:rowId xmlns:a16="http://schemas.microsoft.com/office/drawing/2014/main" val="10002"/>
-                  </a:ext>
-                </a:extLst>
               </a:tr>
               <a:tr h="328473">
                 <a:tc>
@@ -7242,11 +7089,6 @@
                     </a:solidFill>
                   </a:tcPr>
                 </a:tc>
-                <a:extLst>
-                  <a:ext uri="{0D108BD9-81ED-4DB2-BD59-A6C34878D82A}">
-                    <a16:rowId xmlns:a16="http://schemas.microsoft.com/office/drawing/2014/main" val="10003"/>
-                  </a:ext>
-                </a:extLst>
               </a:tr>
               <a:tr h="328473">
                 <a:tc>
@@ -7312,11 +7154,6 @@
                     </a:solidFill>
                   </a:tcPr>
                 </a:tc>
-                <a:extLst>
-                  <a:ext uri="{0D108BD9-81ED-4DB2-BD59-A6C34878D82A}">
-                    <a16:rowId xmlns:a16="http://schemas.microsoft.com/office/drawing/2014/main" val="10004"/>
-                  </a:ext>
-                </a:extLst>
               </a:tr>
               <a:tr h="328477">
                 <a:tc>
@@ -7382,11 +7219,6 @@
                     </a:solidFill>
                   </a:tcPr>
                 </a:tc>
-                <a:extLst>
-                  <a:ext uri="{0D108BD9-81ED-4DB2-BD59-A6C34878D82A}">
-                    <a16:rowId xmlns:a16="http://schemas.microsoft.com/office/drawing/2014/main" val="10005"/>
-                  </a:ext>
-                </a:extLst>
               </a:tr>
             </a:tbl>
           </a:graphicData>
@@ -7401,7 +7233,7 @@
 </file>
 
 <file path=ppt/slides/slide14.xml><?xml version="1.0" encoding="utf-8"?>
-<p:sld xmlns:a="http://schemas.openxmlformats.org/drawingml/2006/main" xmlns:r="http://schemas.openxmlformats.org/officeDocument/2006/relationships" xmlns:p="http://schemas.openxmlformats.org/presentationml/2006/main">
+<p:sld xmlns:a="http://schemas.openxmlformats.org/drawingml/2006/main" xmlns:p="http://schemas.openxmlformats.org/presentationml/2006/main" xmlns:r="http://schemas.openxmlformats.org/officeDocument/2006/relationships">
   <p:cSld>
     <p:spTree>
       <p:nvGrpSpPr>
@@ -7409,14 +7241,7 @@
         <p:cNvGrpSpPr/>
         <p:nvPr/>
       </p:nvGrpSpPr>
-      <p:grpSpPr>
-        <a:xfrm>
-          <a:off x="0" y="0"/>
-          <a:ext cx="0" cy="0"/>
-          <a:chOff x="0" y="0"/>
-          <a:chExt cx="0" cy="0"/>
-        </a:xfrm>
-      </p:grpSpPr>
+      <p:grpSpPr/>
       <p:sp>
         <p:nvSpPr>
           <p:cNvPr id="2" name="Title 1"/>
@@ -7456,7 +7281,7 @@
           <a:noFill/>
         </p:spPr>
         <p:txBody>
-          <a:bodyPr wrap="square" lIns="0" tIns="0" rIns="0" bIns="0" anchor="t">
+          <a:bodyPr wrap="square" anchor="t" lIns="0" rIns="0" tIns="0" bIns="0">
             <a:spAutoFit/>
           </a:bodyPr>
           <a:lstStyle/>
@@ -7489,7 +7314,7 @@
           <a:noFill/>
         </p:spPr>
         <p:txBody>
-          <a:bodyPr wrap="square" lIns="0" tIns="0" rIns="0" bIns="0" anchor="t">
+          <a:bodyPr wrap="square" anchor="t" lIns="0" rIns="0" tIns="0" bIns="0">
             <a:spAutoFit/>
           </a:bodyPr>
           <a:lstStyle/>
@@ -7522,7 +7347,7 @@
           <a:noFill/>
         </p:spPr>
         <p:txBody>
-          <a:bodyPr wrap="square" lIns="0" tIns="0" rIns="0" bIns="0" anchor="t">
+          <a:bodyPr wrap="square" anchor="t" lIns="0" rIns="0" tIns="0" bIns="0">
             <a:spAutoFit/>
           </a:bodyPr>
           <a:lstStyle/>
@@ -7555,7 +7380,7 @@
           <a:noFill/>
         </p:spPr>
         <p:txBody>
-          <a:bodyPr wrap="square" lIns="0" tIns="0" rIns="0" bIns="0" anchor="t">
+          <a:bodyPr wrap="square" anchor="t" lIns="0" rIns="0" tIns="0" bIns="0">
             <a:spAutoFit/>
           </a:bodyPr>
           <a:lstStyle/>
@@ -7668,7 +7493,7 @@
           <a:noFill/>
         </p:spPr>
         <p:txBody>
-          <a:bodyPr wrap="square" lIns="0" tIns="0" rIns="0" bIns="0" anchor="t">
+          <a:bodyPr wrap="square" anchor="t" lIns="0" rIns="0" tIns="0" bIns="0">
             <a:spAutoFit/>
           </a:bodyPr>
           <a:lstStyle/>
@@ -7693,7 +7518,7 @@
         <p:spPr>
           <a:xfrm>
             <a:off x="320040" y="3584448"/>
-            <a:ext cx="8503920" cy="676656"/>
+            <a:ext cx="8503920" cy="475488"/>
           </a:xfrm>
           <a:prstGeom prst="roundRect">
             <a:avLst>
@@ -7725,9 +7550,7 @@
         <p:txBody>
           <a:bodyPr rtlCol="0" anchor="ctr"/>
           <a:lstStyle/>
-          <a:p>
-            <a:endParaRPr/>
-          </a:p>
+          <a:p/>
         </p:txBody>
       </p:sp>
       <p:sp>
@@ -7739,7 +7562,7 @@
         <p:spPr>
           <a:xfrm>
             <a:off x="457200" y="3694176"/>
-            <a:ext cx="8229600" cy="493776"/>
+            <a:ext cx="8229600" cy="292608"/>
           </a:xfrm>
           <a:prstGeom prst="rect">
             <a:avLst/>
@@ -7747,7 +7570,7 @@
           <a:noFill/>
         </p:spPr>
         <p:txBody>
-          <a:bodyPr wrap="square" lIns="0" tIns="0" rIns="0" bIns="0" anchor="t">
+          <a:bodyPr wrap="square" anchor="t" lIns="0" rIns="0" tIns="0" bIns="0">
             <a:spAutoFit/>
           </a:bodyPr>
           <a:lstStyle/>
@@ -7759,18 +7582,7 @@
                 </a:solidFill>
                 <a:latin typeface="APL385 Unicode"/>
               </a:rPr>
-              <a:t>2 ⎕FIX 'file://',#.WorkshopRoot,'/Exercises/Ex2-WebHook/Run.aplf'</a:t>
-            </a:r>
-          </a:p>
-          <a:p>
-            <a:r>
-              <a:rPr sz="1100" b="0">
-                <a:solidFill>
-                  <a:schemeClr val="bg1"/>
-                </a:solidFill>
-                <a:latin typeface="APL385 Unicode"/>
-              </a:rPr>
-              <a:t>2 ⎕FIX 'file://',#.WorkshopRoot,'/Exercises/Ex2-WebHook/Client.aplf'</a:t>
+              <a:t>Load 2</a:t>
             </a:r>
           </a:p>
         </p:txBody>
@@ -7783,7 +7595,7 @@
         </p:nvSpPr>
         <p:spPr>
           <a:xfrm>
-            <a:off x="320040" y="4325112"/>
+            <a:off x="320040" y="4123944"/>
             <a:ext cx="8503920" cy="228600"/>
           </a:xfrm>
           <a:prstGeom prst="rect">
@@ -7792,7 +7604,7 @@
           <a:noFill/>
         </p:spPr>
         <p:txBody>
-          <a:bodyPr wrap="square" lIns="0" tIns="0" rIns="0" bIns="0" anchor="t">
+          <a:bodyPr wrap="square" anchor="t" lIns="0" rIns="0" tIns="0" bIns="0">
             <a:spAutoFit/>
           </a:bodyPr>
           <a:lstStyle/>
@@ -7817,7 +7629,7 @@
 </file>
 
 <file path=ppt/slides/slide15.xml><?xml version="1.0" encoding="utf-8"?>
-<p:sld xmlns:a="http://schemas.openxmlformats.org/drawingml/2006/main" xmlns:r="http://schemas.openxmlformats.org/officeDocument/2006/relationships" xmlns:p="http://schemas.openxmlformats.org/presentationml/2006/main">
+<p:sld xmlns:a="http://schemas.openxmlformats.org/drawingml/2006/main" xmlns:p="http://schemas.openxmlformats.org/presentationml/2006/main" xmlns:r="http://schemas.openxmlformats.org/officeDocument/2006/relationships">
   <p:cSld>
     <p:spTree>
       <p:nvGrpSpPr>
@@ -7825,14 +7637,7 @@
         <p:cNvGrpSpPr/>
         <p:nvPr/>
       </p:nvGrpSpPr>
-      <p:grpSpPr>
-        <a:xfrm>
-          <a:off x="0" y="0"/>
-          <a:ext cx="0" cy="0"/>
-          <a:chOff x="0" y="0"/>
-          <a:chExt cx="0" cy="0"/>
-        </a:xfrm>
-      </p:grpSpPr>
+      <p:grpSpPr/>
       <p:sp>
         <p:nvSpPr>
           <p:cNvPr id="2" name="Title 1"/>
@@ -7861,7 +7666,7 @@
             <a:spLocks noGrp="1"/>
           </p:cNvSpPr>
           <p:nvPr>
-            <p:ph type="body" sz="quarter" idx="10"/>
+            <p:ph type="body" idx="10" sz="quarter"/>
           </p:nvPr>
         </p:nvSpPr>
         <p:spPr/>
@@ -7899,7 +7704,7 @@
 </file>
 
 <file path=ppt/slides/slide16.xml><?xml version="1.0" encoding="utf-8"?>
-<p:sld xmlns:a="http://schemas.openxmlformats.org/drawingml/2006/main" xmlns:r="http://schemas.openxmlformats.org/officeDocument/2006/relationships" xmlns:p="http://schemas.openxmlformats.org/presentationml/2006/main">
+<p:sld xmlns:a="http://schemas.openxmlformats.org/drawingml/2006/main" xmlns:p="http://schemas.openxmlformats.org/presentationml/2006/main" xmlns:r="http://schemas.openxmlformats.org/officeDocument/2006/relationships">
   <p:cSld>
     <p:spTree>
       <p:nvGrpSpPr>
@@ -7907,14 +7712,7 @@
         <p:cNvGrpSpPr/>
         <p:nvPr/>
       </p:nvGrpSpPr>
-      <p:grpSpPr>
-        <a:xfrm>
-          <a:off x="0" y="0"/>
-          <a:ext cx="0" cy="0"/>
-          <a:chOff x="0" y="0"/>
-          <a:chExt cx="0" cy="0"/>
-        </a:xfrm>
-      </p:grpSpPr>
+      <p:grpSpPr/>
       <p:sp>
         <p:nvSpPr>
           <p:cNvPr id="2" name="Title 1"/>
@@ -8014,9 +7812,7 @@
         <p:txBody>
           <a:bodyPr rtlCol="0" anchor="ctr"/>
           <a:lstStyle/>
-          <a:p>
-            <a:endParaRPr/>
-          </a:p>
+          <a:p/>
         </p:txBody>
       </p:sp>
       <p:sp>
@@ -8036,7 +7832,7 @@
           <a:noFill/>
         </p:spPr>
         <p:txBody>
-          <a:bodyPr wrap="square" lIns="0" tIns="0" rIns="0" bIns="0" anchor="ctr">
+          <a:bodyPr wrap="square" anchor="ctr" lIns="0" rIns="0" tIns="0" bIns="0">
             <a:spAutoFit/>
           </a:bodyPr>
           <a:lstStyle/>
@@ -8130,9 +7926,7 @@
         <p:txBody>
           <a:bodyPr rtlCol="0" anchor="ctr"/>
           <a:lstStyle/>
-          <a:p>
-            <a:endParaRPr/>
-          </a:p>
+          <a:p/>
         </p:txBody>
       </p:sp>
       <p:sp>
@@ -8152,7 +7946,7 @@
           <a:noFill/>
         </p:spPr>
         <p:txBody>
-          <a:bodyPr wrap="square" lIns="0" tIns="0" rIns="0" bIns="0" anchor="ctr">
+          <a:bodyPr wrap="square" anchor="ctr" lIns="0" rIns="0" tIns="0" bIns="0">
             <a:spAutoFit/>
           </a:bodyPr>
           <a:lstStyle/>
@@ -8222,7 +8016,7 @@
           <a:noFill/>
         </p:spPr>
         <p:txBody>
-          <a:bodyPr wrap="square" lIns="0" tIns="0" rIns="0" bIns="0" anchor="b">
+          <a:bodyPr wrap="square" anchor="b" lIns="0" rIns="0" tIns="0" bIns="0">
             <a:spAutoFit/>
           </a:bodyPr>
           <a:lstStyle/>
@@ -8293,7 +8087,7 @@
           <a:noFill/>
         </p:spPr>
         <p:txBody>
-          <a:bodyPr wrap="square" lIns="0" tIns="0" rIns="0" bIns="0" anchor="b">
+          <a:bodyPr wrap="square" anchor="b" lIns="0" rIns="0" tIns="0" bIns="0">
             <a:spAutoFit/>
           </a:bodyPr>
           <a:lstStyle/>
@@ -8364,7 +8158,7 @@
           <a:noFill/>
         </p:spPr>
         <p:txBody>
-          <a:bodyPr wrap="square" lIns="0" tIns="0" rIns="0" bIns="0" anchor="b">
+          <a:bodyPr wrap="square" anchor="b" lIns="0" rIns="0" tIns="0" bIns="0">
             <a:spAutoFit/>
           </a:bodyPr>
           <a:lstStyle/>
@@ -8435,7 +8229,7 @@
           <a:noFill/>
         </p:spPr>
         <p:txBody>
-          <a:bodyPr wrap="square" lIns="0" tIns="0" rIns="0" bIns="0" anchor="b">
+          <a:bodyPr wrap="square" anchor="b" lIns="0" rIns="0" tIns="0" bIns="0">
             <a:spAutoFit/>
           </a:bodyPr>
           <a:lstStyle/>
@@ -8506,7 +8300,7 @@
           <a:noFill/>
         </p:spPr>
         <p:txBody>
-          <a:bodyPr wrap="square" lIns="0" tIns="0" rIns="0" bIns="0" anchor="b">
+          <a:bodyPr wrap="square" anchor="b" lIns="0" rIns="0" tIns="0" bIns="0">
             <a:spAutoFit/>
           </a:bodyPr>
           <a:lstStyle/>
@@ -8577,7 +8371,7 @@
           <a:noFill/>
         </p:spPr>
         <p:txBody>
-          <a:bodyPr wrap="square" lIns="0" tIns="0" rIns="0" bIns="0" anchor="b">
+          <a:bodyPr wrap="square" anchor="b" lIns="0" rIns="0" tIns="0" bIns="0">
             <a:spAutoFit/>
           </a:bodyPr>
           <a:lstStyle/>
@@ -8636,9 +8430,7 @@
         <p:txBody>
           <a:bodyPr rtlCol="0" anchor="ctr"/>
           <a:lstStyle/>
-          <a:p>
-            <a:endParaRPr/>
-          </a:p>
+          <a:p/>
         </p:txBody>
       </p:sp>
       <p:sp>
@@ -8658,7 +8450,7 @@
           <a:noFill/>
         </p:spPr>
         <p:txBody>
-          <a:bodyPr wrap="square" lIns="0" tIns="0" rIns="0" bIns="0" anchor="t">
+          <a:bodyPr wrap="square" anchor="t" lIns="0" rIns="0" tIns="0" bIns="0">
             <a:spAutoFit/>
           </a:bodyPr>
           <a:lstStyle/>
@@ -8691,7 +8483,7 @@
           <a:noFill/>
         </p:spPr>
         <p:txBody>
-          <a:bodyPr wrap="square" lIns="0" tIns="0" rIns="0" bIns="0" anchor="t">
+          <a:bodyPr wrap="square" anchor="t" lIns="0" rIns="0" tIns="0" bIns="0">
             <a:spAutoFit/>
           </a:bodyPr>
           <a:lstStyle/>
@@ -8748,9 +8540,7 @@
         <p:txBody>
           <a:bodyPr rtlCol="0" anchor="ctr"/>
           <a:lstStyle/>
-          <a:p>
-            <a:endParaRPr/>
-          </a:p>
+          <a:p/>
         </p:txBody>
       </p:sp>
       <p:sp>
@@ -8770,7 +8560,7 @@
           <a:noFill/>
         </p:spPr>
         <p:txBody>
-          <a:bodyPr wrap="square" lIns="0" tIns="0" rIns="0" bIns="0" anchor="t">
+          <a:bodyPr wrap="square" anchor="t" lIns="0" rIns="0" tIns="0" bIns="0">
             <a:spAutoFit/>
           </a:bodyPr>
           <a:lstStyle/>
@@ -8803,7 +8593,7 @@
           <a:noFill/>
         </p:spPr>
         <p:txBody>
-          <a:bodyPr wrap="square" lIns="0" tIns="0" rIns="0" bIns="0" anchor="t">
+          <a:bodyPr wrap="square" anchor="t" lIns="0" rIns="0" tIns="0" bIns="0">
             <a:spAutoFit/>
           </a:bodyPr>
           <a:lstStyle/>
@@ -8860,9 +8650,7 @@
         <p:txBody>
           <a:bodyPr rtlCol="0" anchor="ctr"/>
           <a:lstStyle/>
-          <a:p>
-            <a:endParaRPr/>
-          </a:p>
+          <a:p/>
         </p:txBody>
       </p:sp>
       <p:sp>
@@ -8882,7 +8670,7 @@
           <a:noFill/>
         </p:spPr>
         <p:txBody>
-          <a:bodyPr wrap="square" lIns="0" tIns="0" rIns="0" bIns="0" anchor="t">
+          <a:bodyPr wrap="square" anchor="t" lIns="0" rIns="0" tIns="0" bIns="0">
             <a:spAutoFit/>
           </a:bodyPr>
           <a:lstStyle/>
@@ -8915,7 +8703,7 @@
           <a:noFill/>
         </p:spPr>
         <p:txBody>
-          <a:bodyPr wrap="square" lIns="0" tIns="0" rIns="0" bIns="0" anchor="t">
+          <a:bodyPr wrap="square" anchor="t" lIns="0" rIns="0" tIns="0" bIns="0">
             <a:spAutoFit/>
           </a:bodyPr>
           <a:lstStyle/>
@@ -8940,7 +8728,7 @@
 </file>
 
 <file path=ppt/slides/slide17.xml><?xml version="1.0" encoding="utf-8"?>
-<p:sld xmlns:a="http://schemas.openxmlformats.org/drawingml/2006/main" xmlns:r="http://schemas.openxmlformats.org/officeDocument/2006/relationships" xmlns:p="http://schemas.openxmlformats.org/presentationml/2006/main">
+<p:sld xmlns:a="http://schemas.openxmlformats.org/drawingml/2006/main" xmlns:p="http://schemas.openxmlformats.org/presentationml/2006/main" xmlns:r="http://schemas.openxmlformats.org/officeDocument/2006/relationships">
   <p:cSld>
     <p:spTree>
       <p:nvGrpSpPr>
@@ -8948,14 +8736,7 @@
         <p:cNvGrpSpPr/>
         <p:nvPr/>
       </p:nvGrpSpPr>
-      <p:grpSpPr>
-        <a:xfrm>
-          <a:off x="0" y="0"/>
-          <a:ext cx="0" cy="0"/>
-          <a:chOff x="0" y="0"/>
-          <a:chExt cx="0" cy="0"/>
-        </a:xfrm>
-      </p:grpSpPr>
+      <p:grpSpPr/>
       <p:sp>
         <p:nvSpPr>
           <p:cNvPr id="2" name="Title 1"/>
@@ -9019,9 +8800,7 @@
         <p:txBody>
           <a:bodyPr rtlCol="0" anchor="ctr"/>
           <a:lstStyle/>
-          <a:p>
-            <a:endParaRPr/>
-          </a:p>
+          <a:p/>
         </p:txBody>
       </p:sp>
       <p:sp>
@@ -9041,7 +8820,7 @@
           <a:noFill/>
         </p:spPr>
         <p:txBody>
-          <a:bodyPr wrap="square" lIns="0" tIns="0" rIns="0" bIns="0" anchor="t">
+          <a:bodyPr wrap="square" anchor="t" lIns="0" rIns="0" tIns="0" bIns="0">
             <a:spAutoFit/>
           </a:bodyPr>
           <a:lstStyle/>
@@ -9068,12 +8847,15 @@
             </a:r>
           </a:p>
           <a:p>
-            <a:endParaRPr sz="1200" b="0">
-              <a:solidFill>
-                <a:schemeClr val="tx1"/>
-              </a:solidFill>
-              <a:latin typeface="APL385 Unicode"/>
-            </a:endParaRPr>
+            <a:r>
+              <a:rPr sz="1200" b="0">
+                <a:solidFill>
+                  <a:schemeClr val="tx1"/>
+                </a:solidFill>
+                <a:latin typeface="APL385 Unicode"/>
+              </a:rPr>
+              <a:t/>
+            </a:r>
           </a:p>
           <a:p>
             <a:r>
@@ -9105,7 +8887,7 @@
           <a:noFill/>
         </p:spPr>
         <p:txBody>
-          <a:bodyPr wrap="square" lIns="0" tIns="0" rIns="0" bIns="0" anchor="t">
+          <a:bodyPr wrap="square" anchor="t" lIns="0" rIns="0" tIns="0" bIns="0">
             <a:spAutoFit/>
           </a:bodyPr>
           <a:lstStyle/>
@@ -9139,7 +8921,7 @@
           <a:noFill/>
         </p:spPr>
         <p:txBody>
-          <a:bodyPr wrap="square" lIns="0" tIns="0" rIns="0" bIns="0" anchor="t">
+          <a:bodyPr wrap="square" anchor="t" lIns="0" rIns="0" tIns="0" bIns="0">
             <a:spAutoFit/>
           </a:bodyPr>
           <a:lstStyle/>
@@ -9172,7 +8954,7 @@
           <a:noFill/>
         </p:spPr>
         <p:txBody>
-          <a:bodyPr wrap="square" lIns="0" tIns="0" rIns="0" bIns="0" anchor="t">
+          <a:bodyPr wrap="square" anchor="t" lIns="0" rIns="0" tIns="0" bIns="0">
             <a:spAutoFit/>
           </a:bodyPr>
           <a:lstStyle/>
@@ -9206,7 +8988,7 @@
           <a:noFill/>
         </p:spPr>
         <p:txBody>
-          <a:bodyPr wrap="square" lIns="0" tIns="0" rIns="0" bIns="0" anchor="t">
+          <a:bodyPr wrap="square" anchor="t" lIns="0" rIns="0" tIns="0" bIns="0">
             <a:spAutoFit/>
           </a:bodyPr>
           <a:lstStyle/>
@@ -9239,7 +9021,7 @@
           <a:noFill/>
         </p:spPr>
         <p:txBody>
-          <a:bodyPr wrap="square" lIns="0" tIns="0" rIns="0" bIns="0" anchor="t">
+          <a:bodyPr wrap="square" anchor="t" lIns="0" rIns="0" tIns="0" bIns="0">
             <a:spAutoFit/>
           </a:bodyPr>
           <a:lstStyle/>
@@ -9273,7 +9055,7 @@
           <a:noFill/>
         </p:spPr>
         <p:txBody>
-          <a:bodyPr wrap="square" lIns="0" tIns="0" rIns="0" bIns="0" anchor="t">
+          <a:bodyPr wrap="square" anchor="t" lIns="0" rIns="0" tIns="0" bIns="0">
             <a:spAutoFit/>
           </a:bodyPr>
           <a:lstStyle/>
@@ -9306,7 +9088,7 @@
           <a:noFill/>
         </p:spPr>
         <p:txBody>
-          <a:bodyPr wrap="square" lIns="0" tIns="0" rIns="0" bIns="0" anchor="t">
+          <a:bodyPr wrap="square" anchor="t" lIns="0" rIns="0" tIns="0" bIns="0">
             <a:spAutoFit/>
           </a:bodyPr>
           <a:lstStyle/>
@@ -9340,7 +9122,7 @@
           <a:noFill/>
         </p:spPr>
         <p:txBody>
-          <a:bodyPr wrap="square" lIns="0" tIns="0" rIns="0" bIns="0" anchor="t">
+          <a:bodyPr wrap="square" anchor="t" lIns="0" rIns="0" tIns="0" bIns="0">
             <a:spAutoFit/>
           </a:bodyPr>
           <a:lstStyle/>
@@ -9373,7 +9155,7 @@
           <a:noFill/>
         </p:spPr>
         <p:txBody>
-          <a:bodyPr wrap="square" lIns="0" tIns="0" rIns="0" bIns="0" anchor="t">
+          <a:bodyPr wrap="square" anchor="t" lIns="0" rIns="0" tIns="0" bIns="0">
             <a:spAutoFit/>
           </a:bodyPr>
           <a:lstStyle/>
@@ -9430,9 +9212,7 @@
         <p:txBody>
           <a:bodyPr rtlCol="0" anchor="ctr"/>
           <a:lstStyle/>
-          <a:p>
-            <a:endParaRPr/>
-          </a:p>
+          <a:p/>
         </p:txBody>
       </p:sp>
       <p:sp>
@@ -9452,7 +9232,7 @@
           <a:noFill/>
         </p:spPr>
         <p:txBody>
-          <a:bodyPr wrap="square" lIns="0" tIns="0" rIns="0" bIns="0" anchor="t">
+          <a:bodyPr wrap="square" anchor="t" lIns="0" rIns="0" tIns="0" bIns="0">
             <a:spAutoFit/>
           </a:bodyPr>
           <a:lstStyle/>
@@ -9489,7 +9269,7 @@
 </file>
 
 <file path=ppt/slides/slide18.xml><?xml version="1.0" encoding="utf-8"?>
-<p:sld xmlns:a="http://schemas.openxmlformats.org/drawingml/2006/main" xmlns:r="http://schemas.openxmlformats.org/officeDocument/2006/relationships" xmlns:p="http://schemas.openxmlformats.org/presentationml/2006/main">
+<p:sld xmlns:a="http://schemas.openxmlformats.org/drawingml/2006/main" xmlns:p="http://schemas.openxmlformats.org/presentationml/2006/main" xmlns:r="http://schemas.openxmlformats.org/officeDocument/2006/relationships">
   <p:cSld>
     <p:spTree>
       <p:nvGrpSpPr>
@@ -9497,14 +9277,7 @@
         <p:cNvGrpSpPr/>
         <p:nvPr/>
       </p:nvGrpSpPr>
-      <p:grpSpPr>
-        <a:xfrm>
-          <a:off x="0" y="0"/>
-          <a:ext cx="0" cy="0"/>
-          <a:chOff x="0" y="0"/>
-          <a:chExt cx="0" cy="0"/>
-        </a:xfrm>
-      </p:grpSpPr>
+      <p:grpSpPr/>
       <p:sp>
         <p:nvSpPr>
           <p:cNvPr id="2" name="Title 1"/>
@@ -9568,9 +9341,7 @@
         <p:txBody>
           <a:bodyPr rtlCol="0" anchor="ctr"/>
           <a:lstStyle/>
-          <a:p>
-            <a:endParaRPr/>
-          </a:p>
+          <a:p/>
         </p:txBody>
       </p:sp>
       <p:sp>
@@ -9590,7 +9361,7 @@
           <a:noFill/>
         </p:spPr>
         <p:txBody>
-          <a:bodyPr wrap="square" lIns="0" tIns="0" rIns="0" bIns="0" anchor="t">
+          <a:bodyPr wrap="square" anchor="t" lIns="0" rIns="0" tIns="0" bIns="0">
             <a:spAutoFit/>
           </a:bodyPr>
           <a:lstStyle/>
@@ -9668,7 +9439,7 @@
           <a:noFill/>
         </p:spPr>
         <p:txBody>
-          <a:bodyPr wrap="square" lIns="0" tIns="0" rIns="0" bIns="0" anchor="t">
+          <a:bodyPr wrap="square" anchor="t" lIns="0" rIns="0" tIns="0" bIns="0">
             <a:spAutoFit/>
           </a:bodyPr>
           <a:lstStyle/>
@@ -9701,7 +9472,7 @@
           <a:noFill/>
         </p:spPr>
         <p:txBody>
-          <a:bodyPr wrap="square" lIns="0" tIns="0" rIns="0" bIns="0" anchor="t">
+          <a:bodyPr wrap="square" anchor="t" lIns="0" rIns="0" tIns="0" bIns="0">
             <a:spAutoFit/>
           </a:bodyPr>
           <a:lstStyle/>
@@ -9764,7 +9535,7 @@
 </file>
 
 <file path=ppt/slides/slide19.xml><?xml version="1.0" encoding="utf-8"?>
-<p:sld xmlns:a="http://schemas.openxmlformats.org/drawingml/2006/main" xmlns:r="http://schemas.openxmlformats.org/officeDocument/2006/relationships" xmlns:p="http://schemas.openxmlformats.org/presentationml/2006/main">
+<p:sld xmlns:a="http://schemas.openxmlformats.org/drawingml/2006/main" xmlns:p="http://schemas.openxmlformats.org/presentationml/2006/main" xmlns:r="http://schemas.openxmlformats.org/officeDocument/2006/relationships">
   <p:cSld>
     <p:spTree>
       <p:nvGrpSpPr>
@@ -9772,14 +9543,7 @@
         <p:cNvGrpSpPr/>
         <p:nvPr/>
       </p:nvGrpSpPr>
-      <p:grpSpPr>
-        <a:xfrm>
-          <a:off x="0" y="0"/>
-          <a:ext cx="0" cy="0"/>
-          <a:chOff x="0" y="0"/>
-          <a:chExt cx="0" cy="0"/>
-        </a:xfrm>
-      </p:grpSpPr>
+      <p:grpSpPr/>
       <p:sp>
         <p:nvSpPr>
           <p:cNvPr id="2" name="Title 1"/>
@@ -9821,20 +9585,8 @@
                 <a:tableStyleId>{5C22544A-7EE6-4342-B048-85BDC9FD1C3A}</a:tableStyleId>
               </a:tblPr>
               <a:tblGrid>
-                <a:gridCol w="2943745">
-                  <a:extLst>
-                    <a:ext uri="{9D8B030D-6E8A-4147-A177-3AD203B41FA5}">
-                      <a16:colId xmlns:a16="http://schemas.microsoft.com/office/drawing/2014/main" val="20000"/>
-                    </a:ext>
-                  </a:extLst>
-                </a:gridCol>
-                <a:gridCol w="5558071">
-                  <a:extLst>
-                    <a:ext uri="{9D8B030D-6E8A-4147-A177-3AD203B41FA5}">
-                      <a16:colId xmlns:a16="http://schemas.microsoft.com/office/drawing/2014/main" val="20001"/>
-                    </a:ext>
-                  </a:extLst>
-                </a:gridCol>
+                <a:gridCol w="2943745"/>
+                <a:gridCol w="5558071"/>
               </a:tblGrid>
               <a:tr h="328473">
                 <a:tc>
@@ -9879,11 +9631,6 @@
                     </a:solidFill>
                   </a:tcPr>
                 </a:tc>
-                <a:extLst>
-                  <a:ext uri="{0D108BD9-81ED-4DB2-BD59-A6C34878D82A}">
-                    <a16:rowId xmlns:a16="http://schemas.microsoft.com/office/drawing/2014/main" val="10000"/>
-                  </a:ext>
-                </a:extLst>
               </a:tr>
               <a:tr h="328473">
                 <a:tc>
@@ -9945,11 +9692,6 @@
                     </a:solidFill>
                   </a:tcPr>
                 </a:tc>
-                <a:extLst>
-                  <a:ext uri="{0D108BD9-81ED-4DB2-BD59-A6C34878D82A}">
-                    <a16:rowId xmlns:a16="http://schemas.microsoft.com/office/drawing/2014/main" val="10001"/>
-                  </a:ext>
-                </a:extLst>
               </a:tr>
               <a:tr h="328473">
                 <a:tc>
@@ -9994,11 +9736,6 @@
                     </a:solidFill>
                   </a:tcPr>
                 </a:tc>
-                <a:extLst>
-                  <a:ext uri="{0D108BD9-81ED-4DB2-BD59-A6C34878D82A}">
-                    <a16:rowId xmlns:a16="http://schemas.microsoft.com/office/drawing/2014/main" val="10002"/>
-                  </a:ext>
-                </a:extLst>
               </a:tr>
               <a:tr h="328473">
                 <a:tc>
@@ -10043,11 +9780,6 @@
                     </a:solidFill>
                   </a:tcPr>
                 </a:tc>
-                <a:extLst>
-                  <a:ext uri="{0D108BD9-81ED-4DB2-BD59-A6C34878D82A}">
-                    <a16:rowId xmlns:a16="http://schemas.microsoft.com/office/drawing/2014/main" val="10003"/>
-                  </a:ext>
-                </a:extLst>
               </a:tr>
               <a:tr h="328476">
                 <a:tc>
@@ -10092,11 +9824,6 @@
                     </a:solidFill>
                   </a:tcPr>
                 </a:tc>
-                <a:extLst>
-                  <a:ext uri="{0D108BD9-81ED-4DB2-BD59-A6C34878D82A}">
-                    <a16:rowId xmlns:a16="http://schemas.microsoft.com/office/drawing/2014/main" val="10004"/>
-                  </a:ext>
-                </a:extLst>
               </a:tr>
             </a:tbl>
           </a:graphicData>
@@ -10143,9 +9870,7 @@
         <p:txBody>
           <a:bodyPr rtlCol="0" anchor="ctr"/>
           <a:lstStyle/>
-          <a:p>
-            <a:endParaRPr/>
-          </a:p>
+          <a:p/>
         </p:txBody>
       </p:sp>
       <p:sp>
@@ -10165,7 +9890,7 @@
           <a:noFill/>
         </p:spPr>
         <p:txBody>
-          <a:bodyPr wrap="square" lIns="0" tIns="0" rIns="0" bIns="0" anchor="t">
+          <a:bodyPr wrap="square" anchor="t" lIns="0" rIns="0" tIns="0" bIns="0">
             <a:spAutoFit/>
           </a:bodyPr>
           <a:lstStyle/>
@@ -10210,7 +9935,7 @@
           <a:noFill/>
         </p:spPr>
         <p:txBody>
-          <a:bodyPr wrap="square" lIns="0" tIns="0" rIns="0" bIns="0" anchor="t">
+          <a:bodyPr wrap="square" anchor="t" lIns="0" rIns="0" tIns="0" bIns="0">
             <a:spAutoFit/>
           </a:bodyPr>
           <a:lstStyle/>
@@ -10221,7 +9946,7 @@
                   <a:schemeClr val="tx1"/>
                 </a:solidFill>
               </a:rPr>
-              <a:t>In Exercise 3, Broadcast loops in its own thread and sends prices every second. After editing it, run Restart, not Run: Run reloads the files and loses your edits.</a:t>
+              <a:t>In Exercise 3, Broadcast loops in its own thread and sends prices every second. After editing it, run Restart, not Run3: Run3 reloads the files and loses your edits.</a:t>
             </a:r>
           </a:p>
         </p:txBody>
@@ -10235,7 +9960,7 @@
 </file>
 
 <file path=ppt/slides/slide2.xml><?xml version="1.0" encoding="utf-8"?>
-<p:sld xmlns:a="http://schemas.openxmlformats.org/drawingml/2006/main" xmlns:r="http://schemas.openxmlformats.org/officeDocument/2006/relationships" xmlns:p="http://schemas.openxmlformats.org/presentationml/2006/main">
+<p:sld xmlns:a="http://schemas.openxmlformats.org/drawingml/2006/main" xmlns:p="http://schemas.openxmlformats.org/presentationml/2006/main" xmlns:r="http://schemas.openxmlformats.org/officeDocument/2006/relationships">
   <p:cSld>
     <p:spTree>
       <p:nvGrpSpPr>
@@ -10243,14 +9968,7 @@
         <p:cNvGrpSpPr/>
         <p:nvPr/>
       </p:nvGrpSpPr>
-      <p:grpSpPr>
-        <a:xfrm>
-          <a:off x="0" y="0"/>
-          <a:ext cx="0" cy="0"/>
-          <a:chOff x="0" y="0"/>
-          <a:chExt cx="0" cy="0"/>
-        </a:xfrm>
-      </p:grpSpPr>
+      <p:grpSpPr/>
       <p:sp>
         <p:nvSpPr>
           <p:cNvPr id="2" name="Title 1"/>
@@ -10314,7 +10032,6 @@
           <a:lstStyle/>
           <a:p>
             <a:pPr algn="ctr"/>
-            <a:endParaRPr/>
           </a:p>
         </p:txBody>
       </p:sp>
@@ -10359,7 +10076,6 @@
           <a:lstStyle/>
           <a:p>
             <a:pPr algn="ctr"/>
-            <a:endParaRPr/>
           </a:p>
         </p:txBody>
       </p:sp>
@@ -10404,7 +10120,6 @@
           <a:lstStyle/>
           <a:p>
             <a:pPr algn="ctr"/>
-            <a:endParaRPr/>
           </a:p>
         </p:txBody>
       </p:sp>
@@ -10425,7 +10140,7 @@
           <a:noFill/>
         </p:spPr>
         <p:txBody>
-          <a:bodyPr wrap="square" lIns="0" tIns="0" rIns="0" bIns="0" anchor="ctr">
+          <a:bodyPr wrap="square" anchor="ctr" lIns="0" rIns="0" tIns="0" bIns="0">
             <a:spAutoFit/>
           </a:bodyPr>
           <a:lstStyle/>
@@ -10483,7 +10198,6 @@
           <a:lstStyle/>
           <a:p>
             <a:pPr algn="ctr"/>
-            <a:endParaRPr/>
           </a:p>
         </p:txBody>
       </p:sp>
@@ -10528,7 +10242,6 @@
           <a:lstStyle/>
           <a:p>
             <a:pPr algn="ctr"/>
-            <a:endParaRPr/>
           </a:p>
         </p:txBody>
       </p:sp>
@@ -10573,7 +10286,6 @@
           <a:lstStyle/>
           <a:p>
             <a:pPr algn="ctr"/>
-            <a:endParaRPr/>
           </a:p>
         </p:txBody>
       </p:sp>
@@ -10594,7 +10306,7 @@
           <a:noFill/>
         </p:spPr>
         <p:txBody>
-          <a:bodyPr wrap="square" lIns="0" tIns="0" rIns="0" bIns="0" anchor="ctr">
+          <a:bodyPr wrap="square" anchor="ctr" lIns="0" rIns="0" tIns="0" bIns="0">
             <a:spAutoFit/>
           </a:bodyPr>
           <a:lstStyle/>
@@ -10652,7 +10364,6 @@
           <a:lstStyle/>
           <a:p>
             <a:pPr algn="ctr"/>
-            <a:endParaRPr/>
           </a:p>
         </p:txBody>
       </p:sp>
@@ -10697,7 +10408,6 @@
           <a:lstStyle/>
           <a:p>
             <a:pPr algn="ctr"/>
-            <a:endParaRPr/>
           </a:p>
         </p:txBody>
       </p:sp>
@@ -10718,7 +10428,7 @@
           <a:noFill/>
         </p:spPr>
         <p:txBody>
-          <a:bodyPr wrap="square" lIns="0" tIns="0" rIns="0" bIns="0" anchor="ctr">
+          <a:bodyPr wrap="square" anchor="ctr" lIns="0" rIns="0" tIns="0" bIns="0">
             <a:spAutoFit/>
           </a:bodyPr>
           <a:lstStyle/>
@@ -10776,7 +10486,6 @@
           <a:lstStyle/>
           <a:p>
             <a:pPr algn="ctr"/>
-            <a:endParaRPr/>
           </a:p>
         </p:txBody>
       </p:sp>
@@ -10821,7 +10530,6 @@
           <a:lstStyle/>
           <a:p>
             <a:pPr algn="ctr"/>
-            <a:endParaRPr/>
           </a:p>
         </p:txBody>
       </p:sp>
@@ -10866,7 +10574,6 @@
           <a:lstStyle/>
           <a:p>
             <a:pPr algn="ctr"/>
-            <a:endParaRPr/>
           </a:p>
         </p:txBody>
       </p:sp>
@@ -10887,7 +10594,7 @@
           <a:noFill/>
         </p:spPr>
         <p:txBody>
-          <a:bodyPr wrap="square" lIns="0" tIns="0" rIns="0" bIns="0" anchor="ctr">
+          <a:bodyPr wrap="square" anchor="ctr" lIns="0" rIns="0" tIns="0" bIns="0">
             <a:spAutoFit/>
           </a:bodyPr>
           <a:lstStyle/>
@@ -10945,7 +10652,6 @@
           <a:lstStyle/>
           <a:p>
             <a:pPr algn="ctr"/>
-            <a:endParaRPr/>
           </a:p>
         </p:txBody>
       </p:sp>
@@ -10992,7 +10698,6 @@
           <a:lstStyle/>
           <a:p>
             <a:pPr algn="ctr"/>
-            <a:endParaRPr/>
           </a:p>
         </p:txBody>
       </p:sp>
@@ -11013,7 +10718,7 @@
           <a:noFill/>
         </p:spPr>
         <p:txBody>
-          <a:bodyPr wrap="square" lIns="0" tIns="0" rIns="0" bIns="0" anchor="ctr">
+          <a:bodyPr wrap="square" anchor="ctr" lIns="0" rIns="0" tIns="0" bIns="0">
             <a:spAutoFit/>
           </a:bodyPr>
           <a:lstStyle/>
@@ -11072,7 +10777,6 @@
           <a:lstStyle/>
           <a:p>
             <a:pPr algn="ctr"/>
-            <a:endParaRPr/>
           </a:p>
         </p:txBody>
       </p:sp>
@@ -11093,7 +10797,7 @@
           <a:noFill/>
         </p:spPr>
         <p:txBody>
-          <a:bodyPr wrap="square" lIns="0" tIns="0" rIns="0" bIns="0" anchor="ctr">
+          <a:bodyPr wrap="square" anchor="ctr" lIns="0" rIns="0" tIns="0" bIns="0">
             <a:spAutoFit/>
           </a:bodyPr>
           <a:lstStyle/>
@@ -11152,7 +10856,6 @@
           <a:lstStyle/>
           <a:p>
             <a:pPr algn="ctr"/>
-            <a:endParaRPr/>
           </a:p>
         </p:txBody>
       </p:sp>
@@ -11173,7 +10876,7 @@
           <a:noFill/>
         </p:spPr>
         <p:txBody>
-          <a:bodyPr wrap="square" lIns="0" tIns="0" rIns="0" bIns="0" anchor="ctr">
+          <a:bodyPr wrap="square" anchor="ctr" lIns="0" rIns="0" tIns="0" bIns="0">
             <a:spAutoFit/>
           </a:bodyPr>
           <a:lstStyle/>
@@ -11206,7 +10909,7 @@
           <a:noFill/>
         </p:spPr>
         <p:txBody>
-          <a:bodyPr wrap="square" lIns="0" tIns="0" rIns="0" bIns="0" anchor="t">
+          <a:bodyPr wrap="square" anchor="t" lIns="0" rIns="0" tIns="0" bIns="0">
             <a:spAutoFit/>
           </a:bodyPr>
           <a:lstStyle/>
@@ -11263,9 +10966,7 @@
         <p:txBody>
           <a:bodyPr rtlCol="0" anchor="ctr"/>
           <a:lstStyle/>
-          <a:p>
-            <a:endParaRPr/>
-          </a:p>
+          <a:p/>
         </p:txBody>
       </p:sp>
       <p:sp>
@@ -11285,7 +10986,7 @@
           <a:noFill/>
         </p:spPr>
         <p:txBody>
-          <a:bodyPr wrap="square" lIns="0" tIns="0" rIns="0" bIns="0" anchor="t">
+          <a:bodyPr wrap="square" anchor="t" lIns="0" rIns="0" tIns="0" bIns="0">
             <a:spAutoFit/>
           </a:bodyPr>
           <a:lstStyle/>
@@ -11318,7 +11019,7 @@
           <a:noFill/>
         </p:spPr>
         <p:txBody>
-          <a:bodyPr wrap="square" lIns="0" tIns="0" rIns="0" bIns="0" anchor="t">
+          <a:bodyPr wrap="square" anchor="t" lIns="0" rIns="0" tIns="0" bIns="0">
             <a:spAutoFit/>
           </a:bodyPr>
           <a:lstStyle/>
@@ -11375,9 +11076,7 @@
         <p:txBody>
           <a:bodyPr rtlCol="0" anchor="ctr"/>
           <a:lstStyle/>
-          <a:p>
-            <a:endParaRPr/>
-          </a:p>
+          <a:p/>
         </p:txBody>
       </p:sp>
       <p:sp>
@@ -11397,7 +11096,7 @@
           <a:noFill/>
         </p:spPr>
         <p:txBody>
-          <a:bodyPr wrap="square" lIns="0" tIns="0" rIns="0" bIns="0" anchor="t">
+          <a:bodyPr wrap="square" anchor="t" lIns="0" rIns="0" tIns="0" bIns="0">
             <a:spAutoFit/>
           </a:bodyPr>
           <a:lstStyle/>
@@ -11430,7 +11129,7 @@
           <a:noFill/>
         </p:spPr>
         <p:txBody>
-          <a:bodyPr wrap="square" lIns="0" tIns="0" rIns="0" bIns="0" anchor="t">
+          <a:bodyPr wrap="square" anchor="t" lIns="0" rIns="0" tIns="0" bIns="0">
             <a:spAutoFit/>
           </a:bodyPr>
           <a:lstStyle/>
@@ -11487,9 +11186,7 @@
         <p:txBody>
           <a:bodyPr rtlCol="0" anchor="ctr"/>
           <a:lstStyle/>
-          <a:p>
-            <a:endParaRPr/>
-          </a:p>
+          <a:p/>
         </p:txBody>
       </p:sp>
       <p:sp>
@@ -11509,7 +11206,7 @@
           <a:noFill/>
         </p:spPr>
         <p:txBody>
-          <a:bodyPr wrap="square" lIns="0" tIns="0" rIns="0" bIns="0" anchor="t">
+          <a:bodyPr wrap="square" anchor="t" lIns="0" rIns="0" tIns="0" bIns="0">
             <a:spAutoFit/>
           </a:bodyPr>
           <a:lstStyle/>
@@ -11542,7 +11239,7 @@
           <a:noFill/>
         </p:spPr>
         <p:txBody>
-          <a:bodyPr wrap="square" lIns="0" tIns="0" rIns="0" bIns="0" anchor="t">
+          <a:bodyPr wrap="square" anchor="t" lIns="0" rIns="0" tIns="0" bIns="0">
             <a:spAutoFit/>
           </a:bodyPr>
           <a:lstStyle/>
@@ -11567,7 +11264,7 @@
 </file>
 
 <file path=ppt/slides/slide20.xml><?xml version="1.0" encoding="utf-8"?>
-<p:sld xmlns:a="http://schemas.openxmlformats.org/drawingml/2006/main" xmlns:r="http://schemas.openxmlformats.org/officeDocument/2006/relationships" xmlns:p="http://schemas.openxmlformats.org/presentationml/2006/main">
+<p:sld xmlns:a="http://schemas.openxmlformats.org/drawingml/2006/main" xmlns:p="http://schemas.openxmlformats.org/presentationml/2006/main" xmlns:r="http://schemas.openxmlformats.org/officeDocument/2006/relationships">
   <p:cSld>
     <p:spTree>
       <p:nvGrpSpPr>
@@ -11575,14 +11272,7 @@
         <p:cNvGrpSpPr/>
         <p:nvPr/>
       </p:nvGrpSpPr>
-      <p:grpSpPr>
-        <a:xfrm>
-          <a:off x="0" y="0"/>
-          <a:ext cx="0" cy="0"/>
-          <a:chOff x="0" y="0"/>
-          <a:chExt cx="0" cy="0"/>
-        </a:xfrm>
-      </p:grpSpPr>
+      <p:grpSpPr/>
       <p:sp>
         <p:nvSpPr>
           <p:cNvPr id="2" name="Title 1"/>
@@ -11622,7 +11312,7 @@
           <a:noFill/>
         </p:spPr>
         <p:txBody>
-          <a:bodyPr wrap="square" lIns="0" tIns="0" rIns="0" bIns="0" anchor="t">
+          <a:bodyPr wrap="square" anchor="t" lIns="0" rIns="0" tIns="0" bIns="0">
             <a:spAutoFit/>
           </a:bodyPr>
           <a:lstStyle/>
@@ -11655,7 +11345,7 @@
           <a:noFill/>
         </p:spPr>
         <p:txBody>
-          <a:bodyPr wrap="square" lIns="0" tIns="0" rIns="0" bIns="0" anchor="t">
+          <a:bodyPr wrap="square" anchor="t" lIns="0" rIns="0" tIns="0" bIns="0">
             <a:spAutoFit/>
           </a:bodyPr>
           <a:lstStyle/>
@@ -11688,7 +11378,7 @@
           <a:noFill/>
         </p:spPr>
         <p:txBody>
-          <a:bodyPr wrap="square" lIns="0" tIns="0" rIns="0" bIns="0" anchor="t">
+          <a:bodyPr wrap="square" anchor="t" lIns="0" rIns="0" tIns="0" bIns="0">
             <a:spAutoFit/>
           </a:bodyPr>
           <a:lstStyle/>
@@ -11721,7 +11411,7 @@
           <a:noFill/>
         </p:spPr>
         <p:txBody>
-          <a:bodyPr wrap="square" lIns="0" tIns="0" rIns="0" bIns="0" anchor="t">
+          <a:bodyPr wrap="square" anchor="t" lIns="0" rIns="0" tIns="0" bIns="0">
             <a:spAutoFit/>
           </a:bodyPr>
           <a:lstStyle/>
@@ -11819,7 +11509,7 @@
           <a:noFill/>
         </p:spPr>
         <p:txBody>
-          <a:bodyPr wrap="square" lIns="0" tIns="0" rIns="0" bIns="0" anchor="t">
+          <a:bodyPr wrap="square" anchor="t" lIns="0" rIns="0" tIns="0" bIns="0">
             <a:spAutoFit/>
           </a:bodyPr>
           <a:lstStyle/>
@@ -11876,9 +11566,7 @@
         <p:txBody>
           <a:bodyPr rtlCol="0" anchor="ctr"/>
           <a:lstStyle/>
-          <a:p>
-            <a:endParaRPr/>
-          </a:p>
+          <a:p/>
         </p:txBody>
       </p:sp>
       <p:sp>
@@ -11898,7 +11586,7 @@
           <a:noFill/>
         </p:spPr>
         <p:txBody>
-          <a:bodyPr wrap="square" lIns="0" tIns="0" rIns="0" bIns="0" anchor="t">
+          <a:bodyPr wrap="square" anchor="t" lIns="0" rIns="0" tIns="0" bIns="0">
             <a:spAutoFit/>
           </a:bodyPr>
           <a:lstStyle/>
@@ -11910,7 +11598,7 @@
                 </a:solidFill>
                 <a:latin typeface="APL385 Unicode"/>
               </a:rPr>
-              <a:t>2 ⎕FIX 'file://',#.WorkshopRoot,'/Exercises/Ex3-SSE/Run.aplf'</a:t>
+              <a:t>Load 3</a:t>
             </a:r>
           </a:p>
         </p:txBody>
@@ -11932,7 +11620,7 @@
           <a:noFill/>
         </p:spPr>
         <p:txBody>
-          <a:bodyPr wrap="square" lIns="0" tIns="0" rIns="0" bIns="0" anchor="t">
+          <a:bodyPr wrap="square" anchor="t" lIns="0" rIns="0" tIns="0" bIns="0">
             <a:spAutoFit/>
           </a:bodyPr>
           <a:lstStyle/>
@@ -11943,7 +11631,7 @@
                   <a:schemeClr val="tx2"/>
                 </a:solidFill>
               </a:rPr>
-              <a:t>Exercises/Ex3-SSE/README.md    After editing Broadcast: Restart, not Run.</a:t>
+              <a:t>Exercises/Ex3-SSE/README.md    After editing Broadcast: Restart, not Run3.</a:t>
             </a:r>
           </a:p>
         </p:txBody>
@@ -11957,7 +11645,7 @@
 </file>
 
 <file path=ppt/slides/slide21.xml><?xml version="1.0" encoding="utf-8"?>
-<p:sld xmlns:a="http://schemas.openxmlformats.org/drawingml/2006/main" xmlns:r="http://schemas.openxmlformats.org/officeDocument/2006/relationships" xmlns:p="http://schemas.openxmlformats.org/presentationml/2006/main">
+<p:sld xmlns:a="http://schemas.openxmlformats.org/drawingml/2006/main" xmlns:p="http://schemas.openxmlformats.org/presentationml/2006/main" xmlns:r="http://schemas.openxmlformats.org/officeDocument/2006/relationships">
   <p:cSld>
     <p:spTree>
       <p:nvGrpSpPr>
@@ -11965,14 +11653,7 @@
         <p:cNvGrpSpPr/>
         <p:nvPr/>
       </p:nvGrpSpPr>
-      <p:grpSpPr>
-        <a:xfrm>
-          <a:off x="0" y="0"/>
-          <a:ext cx="0" cy="0"/>
-          <a:chOff x="0" y="0"/>
-          <a:chExt cx="0" cy="0"/>
-        </a:xfrm>
-      </p:grpSpPr>
+      <p:grpSpPr/>
       <p:sp>
         <p:nvSpPr>
           <p:cNvPr id="2" name="Title 1"/>
@@ -12001,7 +11682,7 @@
             <a:spLocks noGrp="1"/>
           </p:cNvSpPr>
           <p:nvPr>
-            <p:ph type="body" sz="quarter" idx="10"/>
+            <p:ph type="body" idx="10" sz="quarter"/>
           </p:nvPr>
         </p:nvSpPr>
         <p:spPr/>
@@ -12039,7 +11720,7 @@
 </file>
 
 <file path=ppt/slides/slide22.xml><?xml version="1.0" encoding="utf-8"?>
-<p:sld xmlns:a="http://schemas.openxmlformats.org/drawingml/2006/main" xmlns:r="http://schemas.openxmlformats.org/officeDocument/2006/relationships" xmlns:p="http://schemas.openxmlformats.org/presentationml/2006/main">
+<p:sld xmlns:a="http://schemas.openxmlformats.org/drawingml/2006/main" xmlns:p="http://schemas.openxmlformats.org/presentationml/2006/main" xmlns:r="http://schemas.openxmlformats.org/officeDocument/2006/relationships">
   <p:cSld>
     <p:spTree>
       <p:nvGrpSpPr>
@@ -12047,14 +11728,7 @@
         <p:cNvGrpSpPr/>
         <p:nvPr/>
       </p:nvGrpSpPr>
-      <p:grpSpPr>
-        <a:xfrm>
-          <a:off x="0" y="0"/>
-          <a:ext cx="0" cy="0"/>
-          <a:chOff x="0" y="0"/>
-          <a:chExt cx="0" cy="0"/>
-        </a:xfrm>
-      </p:grpSpPr>
+      <p:grpSpPr/>
       <p:sp>
         <p:nvSpPr>
           <p:cNvPr id="2" name="Title 1"/>
@@ -12154,9 +11828,7 @@
         <p:txBody>
           <a:bodyPr rtlCol="0" anchor="ctr"/>
           <a:lstStyle/>
-          <a:p>
-            <a:endParaRPr/>
-          </a:p>
+          <a:p/>
         </p:txBody>
       </p:sp>
       <p:sp>
@@ -12176,7 +11848,7 @@
           <a:noFill/>
         </p:spPr>
         <p:txBody>
-          <a:bodyPr wrap="square" lIns="0" tIns="0" rIns="0" bIns="0" anchor="ctr">
+          <a:bodyPr wrap="square" anchor="ctr" lIns="0" rIns="0" tIns="0" bIns="0">
             <a:spAutoFit/>
           </a:bodyPr>
           <a:lstStyle/>
@@ -12270,9 +11942,7 @@
         <p:txBody>
           <a:bodyPr rtlCol="0" anchor="ctr"/>
           <a:lstStyle/>
-          <a:p>
-            <a:endParaRPr/>
-          </a:p>
+          <a:p/>
         </p:txBody>
       </p:sp>
       <p:sp>
@@ -12292,7 +11962,7 @@
           <a:noFill/>
         </p:spPr>
         <p:txBody>
-          <a:bodyPr wrap="square" lIns="0" tIns="0" rIns="0" bIns="0" anchor="ctr">
+          <a:bodyPr wrap="square" anchor="ctr" lIns="0" rIns="0" tIns="0" bIns="0">
             <a:spAutoFit/>
           </a:bodyPr>
           <a:lstStyle/>
@@ -12362,7 +12032,7 @@
           <a:noFill/>
         </p:spPr>
         <p:txBody>
-          <a:bodyPr wrap="square" lIns="0" tIns="0" rIns="0" bIns="0" anchor="b">
+          <a:bodyPr wrap="square" anchor="b" lIns="0" rIns="0" tIns="0" bIns="0">
             <a:spAutoFit/>
           </a:bodyPr>
           <a:lstStyle/>
@@ -12433,7 +12103,7 @@
           <a:noFill/>
         </p:spPr>
         <p:txBody>
-          <a:bodyPr wrap="square" lIns="0" tIns="0" rIns="0" bIns="0" anchor="b">
+          <a:bodyPr wrap="square" anchor="b" lIns="0" rIns="0" tIns="0" bIns="0">
             <a:spAutoFit/>
           </a:bodyPr>
           <a:lstStyle/>
@@ -12504,7 +12174,7 @@
           <a:noFill/>
         </p:spPr>
         <p:txBody>
-          <a:bodyPr wrap="square" lIns="0" tIns="0" rIns="0" bIns="0" anchor="b">
+          <a:bodyPr wrap="square" anchor="b" lIns="0" rIns="0" tIns="0" bIns="0">
             <a:spAutoFit/>
           </a:bodyPr>
           <a:lstStyle/>
@@ -12575,7 +12245,7 @@
           <a:noFill/>
         </p:spPr>
         <p:txBody>
-          <a:bodyPr wrap="square" lIns="0" tIns="0" rIns="0" bIns="0" anchor="b">
+          <a:bodyPr wrap="square" anchor="b" lIns="0" rIns="0" tIns="0" bIns="0">
             <a:spAutoFit/>
           </a:bodyPr>
           <a:lstStyle/>
@@ -12646,7 +12316,7 @@
           <a:noFill/>
         </p:spPr>
         <p:txBody>
-          <a:bodyPr wrap="square" lIns="0" tIns="0" rIns="0" bIns="0" anchor="b">
+          <a:bodyPr wrap="square" anchor="b" lIns="0" rIns="0" tIns="0" bIns="0">
             <a:spAutoFit/>
           </a:bodyPr>
           <a:lstStyle/>
@@ -12717,7 +12387,7 @@
           <a:noFill/>
         </p:spPr>
         <p:txBody>
-          <a:bodyPr wrap="square" lIns="0" tIns="0" rIns="0" bIns="0" anchor="b">
+          <a:bodyPr wrap="square" anchor="b" lIns="0" rIns="0" tIns="0" bIns="0">
             <a:spAutoFit/>
           </a:bodyPr>
           <a:lstStyle/>
@@ -12776,9 +12446,7 @@
         <p:txBody>
           <a:bodyPr rtlCol="0" anchor="ctr"/>
           <a:lstStyle/>
-          <a:p>
-            <a:endParaRPr/>
-          </a:p>
+          <a:p/>
         </p:txBody>
       </p:sp>
       <p:sp>
@@ -12798,7 +12466,7 @@
           <a:noFill/>
         </p:spPr>
         <p:txBody>
-          <a:bodyPr wrap="square" lIns="0" tIns="0" rIns="0" bIns="0" anchor="t">
+          <a:bodyPr wrap="square" anchor="t" lIns="0" rIns="0" tIns="0" bIns="0">
             <a:spAutoFit/>
           </a:bodyPr>
           <a:lstStyle/>
@@ -12831,7 +12499,7 @@
           <a:noFill/>
         </p:spPr>
         <p:txBody>
-          <a:bodyPr wrap="square" lIns="0" tIns="0" rIns="0" bIns="0" anchor="t">
+          <a:bodyPr wrap="square" anchor="t" lIns="0" rIns="0" tIns="0" bIns="0">
             <a:spAutoFit/>
           </a:bodyPr>
           <a:lstStyle/>
@@ -12888,9 +12556,7 @@
         <p:txBody>
           <a:bodyPr rtlCol="0" anchor="ctr"/>
           <a:lstStyle/>
-          <a:p>
-            <a:endParaRPr/>
-          </a:p>
+          <a:p/>
         </p:txBody>
       </p:sp>
       <p:sp>
@@ -12910,7 +12576,7 @@
           <a:noFill/>
         </p:spPr>
         <p:txBody>
-          <a:bodyPr wrap="square" lIns="0" tIns="0" rIns="0" bIns="0" anchor="t">
+          <a:bodyPr wrap="square" anchor="t" lIns="0" rIns="0" tIns="0" bIns="0">
             <a:spAutoFit/>
           </a:bodyPr>
           <a:lstStyle/>
@@ -12943,7 +12609,7 @@
           <a:noFill/>
         </p:spPr>
         <p:txBody>
-          <a:bodyPr wrap="square" lIns="0" tIns="0" rIns="0" bIns="0" anchor="t">
+          <a:bodyPr wrap="square" anchor="t" lIns="0" rIns="0" tIns="0" bIns="0">
             <a:spAutoFit/>
           </a:bodyPr>
           <a:lstStyle/>
@@ -13000,9 +12666,7 @@
         <p:txBody>
           <a:bodyPr rtlCol="0" anchor="ctr"/>
           <a:lstStyle/>
-          <a:p>
-            <a:endParaRPr/>
-          </a:p>
+          <a:p/>
         </p:txBody>
       </p:sp>
       <p:sp>
@@ -13022,7 +12686,7 @@
           <a:noFill/>
         </p:spPr>
         <p:txBody>
-          <a:bodyPr wrap="square" lIns="0" tIns="0" rIns="0" bIns="0" anchor="t">
+          <a:bodyPr wrap="square" anchor="t" lIns="0" rIns="0" tIns="0" bIns="0">
             <a:spAutoFit/>
           </a:bodyPr>
           <a:lstStyle/>
@@ -13055,7 +12719,7 @@
           <a:noFill/>
         </p:spPr>
         <p:txBody>
-          <a:bodyPr wrap="square" lIns="0" tIns="0" rIns="0" bIns="0" anchor="t">
+          <a:bodyPr wrap="square" anchor="t" lIns="0" rIns="0" tIns="0" bIns="0">
             <a:spAutoFit/>
           </a:bodyPr>
           <a:lstStyle/>
@@ -13080,7 +12744,7 @@
 </file>
 
 <file path=ppt/slides/slide23.xml><?xml version="1.0" encoding="utf-8"?>
-<p:sld xmlns:a="http://schemas.openxmlformats.org/drawingml/2006/main" xmlns:r="http://schemas.openxmlformats.org/officeDocument/2006/relationships" xmlns:p="http://schemas.openxmlformats.org/presentationml/2006/main">
+<p:sld xmlns:a="http://schemas.openxmlformats.org/drawingml/2006/main" xmlns:p="http://schemas.openxmlformats.org/presentationml/2006/main" xmlns:r="http://schemas.openxmlformats.org/officeDocument/2006/relationships">
   <p:cSld>
     <p:spTree>
       <p:nvGrpSpPr>
@@ -13088,14 +12752,7 @@
         <p:cNvGrpSpPr/>
         <p:nvPr/>
       </p:nvGrpSpPr>
-      <p:grpSpPr>
-        <a:xfrm>
-          <a:off x="0" y="0"/>
-          <a:ext cx="0" cy="0"/>
-          <a:chOff x="0" y="0"/>
-          <a:chExt cx="0" cy="0"/>
-        </a:xfrm>
-      </p:grpSpPr>
+      <p:grpSpPr/>
       <p:sp>
         <p:nvSpPr>
           <p:cNvPr id="2" name="Title 1"/>
@@ -13137,27 +12794,9 @@
                 <a:tableStyleId>{5C22544A-7EE6-4342-B048-85BDC9FD1C3A}</a:tableStyleId>
               </a:tblPr>
               <a:tblGrid>
-                <a:gridCol w="2312942">
-                  <a:extLst>
-                    <a:ext uri="{9D8B030D-6E8A-4147-A177-3AD203B41FA5}">
-                      <a16:colId xmlns:a16="http://schemas.microsoft.com/office/drawing/2014/main" val="20000"/>
-                    </a:ext>
-                  </a:extLst>
-                </a:gridCol>
-                <a:gridCol w="2242853">
-                  <a:extLst>
-                    <a:ext uri="{9D8B030D-6E8A-4147-A177-3AD203B41FA5}">
-                      <a16:colId xmlns:a16="http://schemas.microsoft.com/office/drawing/2014/main" val="20001"/>
-                    </a:ext>
-                  </a:extLst>
-                </a:gridCol>
-                <a:gridCol w="3946020">
-                  <a:extLst>
-                    <a:ext uri="{9D8B030D-6E8A-4147-A177-3AD203B41FA5}">
-                      <a16:colId xmlns:a16="http://schemas.microsoft.com/office/drawing/2014/main" val="20002"/>
-                    </a:ext>
-                  </a:extLst>
-                </a:gridCol>
+                <a:gridCol w="2312942"/>
+                <a:gridCol w="2242853"/>
+                <a:gridCol w="3946020"/>
               </a:tblGrid>
               <a:tr h="328473">
                 <a:tc>
@@ -13223,11 +12862,6 @@
                     </a:solidFill>
                   </a:tcPr>
                 </a:tc>
-                <a:extLst>
-                  <a:ext uri="{0D108BD9-81ED-4DB2-BD59-A6C34878D82A}">
-                    <a16:rowId xmlns:a16="http://schemas.microsoft.com/office/drawing/2014/main" val="10000"/>
-                  </a:ext>
-                </a:extLst>
               </a:tr>
               <a:tr h="328473">
                 <a:tc>
@@ -13310,11 +12944,6 @@
                     </a:solidFill>
                   </a:tcPr>
                 </a:tc>
-                <a:extLst>
-                  <a:ext uri="{0D108BD9-81ED-4DB2-BD59-A6C34878D82A}">
-                    <a16:rowId xmlns:a16="http://schemas.microsoft.com/office/drawing/2014/main" val="10001"/>
-                  </a:ext>
-                </a:extLst>
               </a:tr>
               <a:tr h="328473">
                 <a:tc>
@@ -13380,11 +13009,6 @@
                     </a:solidFill>
                   </a:tcPr>
                 </a:tc>
-                <a:extLst>
-                  <a:ext uri="{0D108BD9-81ED-4DB2-BD59-A6C34878D82A}">
-                    <a16:rowId xmlns:a16="http://schemas.microsoft.com/office/drawing/2014/main" val="10002"/>
-                  </a:ext>
-                </a:extLst>
               </a:tr>
               <a:tr h="328476">
                 <a:tc>
@@ -13450,11 +13074,6 @@
                     </a:solidFill>
                   </a:tcPr>
                 </a:tc>
-                <a:extLst>
-                  <a:ext uri="{0D108BD9-81ED-4DB2-BD59-A6C34878D82A}">
-                    <a16:rowId xmlns:a16="http://schemas.microsoft.com/office/drawing/2014/main" val="10003"/>
-                  </a:ext>
-                </a:extLst>
               </a:tr>
             </a:tbl>
           </a:graphicData>
@@ -13501,9 +13120,7 @@
         <p:txBody>
           <a:bodyPr rtlCol="0" anchor="ctr"/>
           <a:lstStyle/>
-          <a:p>
-            <a:endParaRPr/>
-          </a:p>
+          <a:p/>
         </p:txBody>
       </p:sp>
       <p:sp>
@@ -13523,7 +13140,7 @@
           <a:noFill/>
         </p:spPr>
         <p:txBody>
-          <a:bodyPr wrap="square" lIns="0" tIns="0" rIns="0" bIns="0" anchor="t">
+          <a:bodyPr wrap="square" anchor="t" lIns="0" rIns="0" tIns="0" bIns="0">
             <a:spAutoFit/>
           </a:bodyPr>
           <a:lstStyle/>
@@ -13581,9 +13198,7 @@
         <p:txBody>
           <a:bodyPr rtlCol="0" anchor="ctr"/>
           <a:lstStyle/>
-          <a:p>
-            <a:endParaRPr/>
-          </a:p>
+          <a:p/>
         </p:txBody>
       </p:sp>
       <p:sp>
@@ -13603,7 +13218,7 @@
           <a:noFill/>
         </p:spPr>
         <p:txBody>
-          <a:bodyPr wrap="square" lIns="0" tIns="0" rIns="0" bIns="0" anchor="t">
+          <a:bodyPr wrap="square" anchor="t" lIns="0" rIns="0" tIns="0" bIns="0">
             <a:spAutoFit/>
           </a:bodyPr>
           <a:lstStyle/>
@@ -13636,7 +13251,7 @@
           <a:noFill/>
         </p:spPr>
         <p:txBody>
-          <a:bodyPr wrap="square" lIns="0" tIns="0" rIns="0" bIns="0" anchor="t">
+          <a:bodyPr wrap="square" anchor="t" lIns="0" rIns="0" tIns="0" bIns="0">
             <a:spAutoFit/>
           </a:bodyPr>
           <a:lstStyle/>
@@ -13696,9 +13311,7 @@
         <p:txBody>
           <a:bodyPr rtlCol="0" anchor="ctr"/>
           <a:lstStyle/>
-          <a:p>
-            <a:endParaRPr/>
-          </a:p>
+          <a:p/>
         </p:txBody>
       </p:sp>
       <p:sp>
@@ -13718,7 +13331,7 @@
           <a:noFill/>
         </p:spPr>
         <p:txBody>
-          <a:bodyPr wrap="square" lIns="0" tIns="0" rIns="0" bIns="0" anchor="t">
+          <a:bodyPr wrap="square" anchor="t" lIns="0" rIns="0" tIns="0" bIns="0">
             <a:spAutoFit/>
           </a:bodyPr>
           <a:lstStyle/>
@@ -13751,7 +13364,7 @@
           <a:noFill/>
         </p:spPr>
         <p:txBody>
-          <a:bodyPr wrap="square" lIns="0" tIns="0" rIns="0" bIns="0" anchor="t">
+          <a:bodyPr wrap="square" anchor="t" lIns="0" rIns="0" tIns="0" bIns="0">
             <a:spAutoFit/>
           </a:bodyPr>
           <a:lstStyle/>
@@ -13776,7 +13389,7 @@
 </file>
 
 <file path=ppt/slides/slide24.xml><?xml version="1.0" encoding="utf-8"?>
-<p:sld xmlns:a="http://schemas.openxmlformats.org/drawingml/2006/main" xmlns:r="http://schemas.openxmlformats.org/officeDocument/2006/relationships" xmlns:p="http://schemas.openxmlformats.org/presentationml/2006/main">
+<p:sld xmlns:a="http://schemas.openxmlformats.org/drawingml/2006/main" xmlns:p="http://schemas.openxmlformats.org/presentationml/2006/main" xmlns:r="http://schemas.openxmlformats.org/officeDocument/2006/relationships">
   <p:cSld>
     <p:spTree>
       <p:nvGrpSpPr>
@@ -13784,14 +13397,7 @@
         <p:cNvGrpSpPr/>
         <p:nvPr/>
       </p:nvGrpSpPr>
-      <p:grpSpPr>
-        <a:xfrm>
-          <a:off x="0" y="0"/>
-          <a:ext cx="0" cy="0"/>
-          <a:chOff x="0" y="0"/>
-          <a:chExt cx="0" cy="0"/>
-        </a:xfrm>
-      </p:grpSpPr>
+      <p:grpSpPr/>
       <p:sp>
         <p:nvSpPr>
           <p:cNvPr id="2" name="Title 1"/>
@@ -13855,9 +13461,7 @@
         <p:txBody>
           <a:bodyPr rtlCol="0" anchor="ctr"/>
           <a:lstStyle/>
-          <a:p>
-            <a:endParaRPr/>
-          </a:p>
+          <a:p/>
         </p:txBody>
       </p:sp>
       <p:sp>
@@ -13877,7 +13481,7 @@
           <a:noFill/>
         </p:spPr>
         <p:txBody>
-          <a:bodyPr wrap="square" lIns="0" tIns="0" rIns="0" bIns="0" anchor="t">
+          <a:bodyPr wrap="square" anchor="t" lIns="0" rIns="0" tIns="0" bIns="0">
             <a:spAutoFit/>
           </a:bodyPr>
           <a:lstStyle/>
@@ -13926,12 +13530,15 @@
             </a:r>
           </a:p>
           <a:p>
-            <a:endParaRPr sz="1200" b="0">
-              <a:solidFill>
-                <a:schemeClr val="tx1"/>
-              </a:solidFill>
-              <a:latin typeface="APL385 Unicode"/>
-            </a:endParaRPr>
+            <a:r>
+              <a:rPr sz="1200" b="0">
+                <a:solidFill>
+                  <a:schemeClr val="tx1"/>
+                </a:solidFill>
+                <a:latin typeface="APL385 Unicode"/>
+              </a:rPr>
+              <a:t/>
+            </a:r>
           </a:p>
           <a:p>
             <a:r>
@@ -13990,9 +13597,7 @@
         <p:txBody>
           <a:bodyPr rtlCol="0" anchor="ctr"/>
           <a:lstStyle/>
-          <a:p>
-            <a:endParaRPr/>
-          </a:p>
+          <a:p/>
         </p:txBody>
       </p:sp>
       <p:sp>
@@ -14012,7 +13617,7 @@
           <a:noFill/>
         </p:spPr>
         <p:txBody>
-          <a:bodyPr wrap="square" lIns="0" tIns="0" rIns="0" bIns="0" anchor="t">
+          <a:bodyPr wrap="square" anchor="t" lIns="0" rIns="0" tIns="0" bIns="0">
             <a:spAutoFit/>
           </a:bodyPr>
           <a:lstStyle/>
@@ -14045,7 +13650,7 @@
           <a:noFill/>
         </p:spPr>
         <p:txBody>
-          <a:bodyPr wrap="square" lIns="0" tIns="0" rIns="0" bIns="0" anchor="t">
+          <a:bodyPr wrap="square" anchor="t" lIns="0" rIns="0" tIns="0" bIns="0">
             <a:spAutoFit/>
           </a:bodyPr>
           <a:lstStyle/>
@@ -14078,7 +13683,7 @@
           <a:noFill/>
         </p:spPr>
         <p:txBody>
-          <a:bodyPr wrap="square" lIns="0" tIns="0" rIns="0" bIns="0" anchor="t">
+          <a:bodyPr wrap="square" anchor="t" lIns="0" rIns="0" tIns="0" bIns="0">
             <a:spAutoFit/>
           </a:bodyPr>
           <a:lstStyle/>
@@ -14135,9 +13740,7 @@
         <p:txBody>
           <a:bodyPr rtlCol="0" anchor="ctr"/>
           <a:lstStyle/>
-          <a:p>
-            <a:endParaRPr/>
-          </a:p>
+          <a:p/>
         </p:txBody>
       </p:sp>
       <p:sp>
@@ -14157,7 +13760,7 @@
           <a:noFill/>
         </p:spPr>
         <p:txBody>
-          <a:bodyPr wrap="square" lIns="0" tIns="0" rIns="0" bIns="0" anchor="t">
+          <a:bodyPr wrap="square" anchor="t" lIns="0" rIns="0" tIns="0" bIns="0">
             <a:spAutoFit/>
           </a:bodyPr>
           <a:lstStyle/>
@@ -14205,7 +13808,7 @@
 </file>
 
 <file path=ppt/slides/slide25.xml><?xml version="1.0" encoding="utf-8"?>
-<p:sld xmlns:a="http://schemas.openxmlformats.org/drawingml/2006/main" xmlns:r="http://schemas.openxmlformats.org/officeDocument/2006/relationships" xmlns:p="http://schemas.openxmlformats.org/presentationml/2006/main">
+<p:sld xmlns:a="http://schemas.openxmlformats.org/drawingml/2006/main" xmlns:p="http://schemas.openxmlformats.org/presentationml/2006/main" xmlns:r="http://schemas.openxmlformats.org/officeDocument/2006/relationships">
   <p:cSld>
     <p:spTree>
       <p:nvGrpSpPr>
@@ -14213,14 +13816,7 @@
         <p:cNvGrpSpPr/>
         <p:nvPr/>
       </p:nvGrpSpPr>
-      <p:grpSpPr>
-        <a:xfrm>
-          <a:off x="0" y="0"/>
-          <a:ext cx="0" cy="0"/>
-          <a:chOff x="0" y="0"/>
-          <a:chExt cx="0" cy="0"/>
-        </a:xfrm>
-      </p:grpSpPr>
+      <p:grpSpPr/>
       <p:sp>
         <p:nvSpPr>
           <p:cNvPr id="2" name="Title 1"/>
@@ -14262,36 +13858,16 @@
                 <a:tableStyleId>{5C22544A-7EE6-4342-B048-85BDC9FD1C3A}</a:tableStyleId>
               </a:tblPr>
               <a:tblGrid>
-                <a:gridCol w="2102675">
-                  <a:extLst>
-                    <a:ext uri="{9D8B030D-6E8A-4147-A177-3AD203B41FA5}">
-                      <a16:colId xmlns:a16="http://schemas.microsoft.com/office/drawing/2014/main" val="20000"/>
-                    </a:ext>
-                  </a:extLst>
-                </a:gridCol>
-                <a:gridCol w="3196066">
-                  <a:extLst>
-                    <a:ext uri="{9D8B030D-6E8A-4147-A177-3AD203B41FA5}">
-                      <a16:colId xmlns:a16="http://schemas.microsoft.com/office/drawing/2014/main" val="20001"/>
-                    </a:ext>
-                  </a:extLst>
-                </a:gridCol>
-                <a:gridCol w="3203075">
-                  <a:extLst>
-                    <a:ext uri="{9D8B030D-6E8A-4147-A177-3AD203B41FA5}">
-                      <a16:colId xmlns:a16="http://schemas.microsoft.com/office/drawing/2014/main" val="20002"/>
-                    </a:ext>
-                  </a:extLst>
-                </a:gridCol>
+                <a:gridCol w="2102675"/>
+                <a:gridCol w="3196066"/>
+                <a:gridCol w="3203075"/>
               </a:tblGrid>
               <a:tr h="328473">
                 <a:tc>
                   <a:txBody>
                     <a:bodyPr/>
                     <a:lstStyle/>
-                    <a:p>
-                      <a:endParaRPr/>
-                    </a:p>
+                    <a:p/>
                   </a:txBody>
                   <a:tcPr marL="73152" marR="73152" marT="65694" marB="65694" anchor="ctr">
                     <a:solidFill>
@@ -14341,11 +13917,6 @@
                     </a:solidFill>
                   </a:tcPr>
                 </a:tc>
-                <a:extLst>
-                  <a:ext uri="{0D108BD9-81ED-4DB2-BD59-A6C34878D82A}">
-                    <a16:rowId xmlns:a16="http://schemas.microsoft.com/office/drawing/2014/main" val="10000"/>
-                  </a:ext>
-                </a:extLst>
               </a:tr>
               <a:tr h="328473">
                 <a:tc>
@@ -14411,11 +13982,6 @@
                     </a:solidFill>
                   </a:tcPr>
                 </a:tc>
-                <a:extLst>
-                  <a:ext uri="{0D108BD9-81ED-4DB2-BD59-A6C34878D82A}">
-                    <a16:rowId xmlns:a16="http://schemas.microsoft.com/office/drawing/2014/main" val="10001"/>
-                  </a:ext>
-                </a:extLst>
               </a:tr>
               <a:tr h="328473">
                 <a:tc>
@@ -14481,11 +14047,6 @@
                     </a:solidFill>
                   </a:tcPr>
                 </a:tc>
-                <a:extLst>
-                  <a:ext uri="{0D108BD9-81ED-4DB2-BD59-A6C34878D82A}">
-                    <a16:rowId xmlns:a16="http://schemas.microsoft.com/office/drawing/2014/main" val="10002"/>
-                  </a:ext>
-                </a:extLst>
               </a:tr>
               <a:tr h="328473">
                 <a:tc>
@@ -14551,11 +14112,6 @@
                     </a:solidFill>
                   </a:tcPr>
                 </a:tc>
-                <a:extLst>
-                  <a:ext uri="{0D108BD9-81ED-4DB2-BD59-A6C34878D82A}">
-                    <a16:rowId xmlns:a16="http://schemas.microsoft.com/office/drawing/2014/main" val="10003"/>
-                  </a:ext>
-                </a:extLst>
               </a:tr>
               <a:tr h="328473">
                 <a:tc>
@@ -14621,11 +14177,6 @@
                     </a:solidFill>
                   </a:tcPr>
                 </a:tc>
-                <a:extLst>
-                  <a:ext uri="{0D108BD9-81ED-4DB2-BD59-A6C34878D82A}">
-                    <a16:rowId xmlns:a16="http://schemas.microsoft.com/office/drawing/2014/main" val="10004"/>
-                  </a:ext>
-                </a:extLst>
               </a:tr>
               <a:tr h="328477">
                 <a:tc>
@@ -14691,11 +14242,6 @@
                     </a:solidFill>
                   </a:tcPr>
                 </a:tc>
-                <a:extLst>
-                  <a:ext uri="{0D108BD9-81ED-4DB2-BD59-A6C34878D82A}">
-                    <a16:rowId xmlns:a16="http://schemas.microsoft.com/office/drawing/2014/main" val="10005"/>
-                  </a:ext>
-                </a:extLst>
               </a:tr>
             </a:tbl>
           </a:graphicData>
@@ -14710,7 +14256,7 @@
 </file>
 
 <file path=ppt/slides/slide26.xml><?xml version="1.0" encoding="utf-8"?>
-<p:sld xmlns:a="http://schemas.openxmlformats.org/drawingml/2006/main" xmlns:r="http://schemas.openxmlformats.org/officeDocument/2006/relationships" xmlns:p="http://schemas.openxmlformats.org/presentationml/2006/main">
+<p:sld xmlns:a="http://schemas.openxmlformats.org/drawingml/2006/main" xmlns:p="http://schemas.openxmlformats.org/presentationml/2006/main" xmlns:r="http://schemas.openxmlformats.org/officeDocument/2006/relationships">
   <p:cSld>
     <p:spTree>
       <p:nvGrpSpPr>
@@ -14718,14 +14264,7 @@
         <p:cNvGrpSpPr/>
         <p:nvPr/>
       </p:nvGrpSpPr>
-      <p:grpSpPr>
-        <a:xfrm>
-          <a:off x="0" y="0"/>
-          <a:ext cx="0" cy="0"/>
-          <a:chOff x="0" y="0"/>
-          <a:chExt cx="0" cy="0"/>
-        </a:xfrm>
-      </p:grpSpPr>
+      <p:grpSpPr/>
       <p:sp>
         <p:nvSpPr>
           <p:cNvPr id="2" name="Title 1"/>
@@ -14765,7 +14304,7 @@
           <a:noFill/>
         </p:spPr>
         <p:txBody>
-          <a:bodyPr wrap="square" lIns="0" tIns="0" rIns="0" bIns="0" anchor="t">
+          <a:bodyPr wrap="square" anchor="t" lIns="0" rIns="0" tIns="0" bIns="0">
             <a:spAutoFit/>
           </a:bodyPr>
           <a:lstStyle/>
@@ -14798,7 +14337,7 @@
           <a:noFill/>
         </p:spPr>
         <p:txBody>
-          <a:bodyPr wrap="square" lIns="0" tIns="0" rIns="0" bIns="0" anchor="t">
+          <a:bodyPr wrap="square" anchor="t" lIns="0" rIns="0" tIns="0" bIns="0">
             <a:spAutoFit/>
           </a:bodyPr>
           <a:lstStyle/>
@@ -14831,7 +14370,7 @@
           <a:noFill/>
         </p:spPr>
         <p:txBody>
-          <a:bodyPr wrap="square" lIns="0" tIns="0" rIns="0" bIns="0" anchor="t">
+          <a:bodyPr wrap="square" anchor="t" lIns="0" rIns="0" tIns="0" bIns="0">
             <a:spAutoFit/>
           </a:bodyPr>
           <a:lstStyle/>
@@ -14864,7 +14403,7 @@
           <a:noFill/>
         </p:spPr>
         <p:txBody>
-          <a:bodyPr wrap="square" lIns="0" tIns="0" rIns="0" bIns="0" anchor="t">
+          <a:bodyPr wrap="square" anchor="t" lIns="0" rIns="0" tIns="0" bIns="0">
             <a:spAutoFit/>
           </a:bodyPr>
           <a:lstStyle/>
@@ -14977,7 +14516,7 @@
           <a:noFill/>
         </p:spPr>
         <p:txBody>
-          <a:bodyPr wrap="square" lIns="0" tIns="0" rIns="0" bIns="0" anchor="t">
+          <a:bodyPr wrap="square" anchor="t" lIns="0" rIns="0" tIns="0" bIns="0">
             <a:spAutoFit/>
           </a:bodyPr>
           <a:lstStyle/>
@@ -15034,9 +14573,7 @@
         <p:txBody>
           <a:bodyPr rtlCol="0" anchor="ctr"/>
           <a:lstStyle/>
-          <a:p>
-            <a:endParaRPr/>
-          </a:p>
+          <a:p/>
         </p:txBody>
       </p:sp>
       <p:sp>
@@ -15056,7 +14593,7 @@
           <a:noFill/>
         </p:spPr>
         <p:txBody>
-          <a:bodyPr wrap="square" lIns="0" tIns="0" rIns="0" bIns="0" anchor="t">
+          <a:bodyPr wrap="square" anchor="t" lIns="0" rIns="0" tIns="0" bIns="0">
             <a:spAutoFit/>
           </a:bodyPr>
           <a:lstStyle/>
@@ -15068,7 +14605,7 @@
                 </a:solidFill>
                 <a:latin typeface="APL385 Unicode"/>
               </a:rPr>
-              <a:t>2 ⎕FIX 'file://',#.WorkshopRoot,'/Exercises/Ex4-WebSockets/Run.aplf'</a:t>
+              <a:t>Load 4</a:t>
             </a:r>
           </a:p>
         </p:txBody>
@@ -15090,7 +14627,7 @@
           <a:noFill/>
         </p:spPr>
         <p:txBody>
-          <a:bodyPr wrap="square" lIns="0" tIns="0" rIns="0" bIns="0" anchor="t">
+          <a:bodyPr wrap="square" anchor="t" lIns="0" rIns="0" tIns="0" bIns="0">
             <a:spAutoFit/>
           </a:bodyPr>
           <a:lstStyle/>
@@ -15115,7 +14652,7 @@
 </file>
 
 <file path=ppt/slides/slide27.xml><?xml version="1.0" encoding="utf-8"?>
-<p:sld xmlns:a="http://schemas.openxmlformats.org/drawingml/2006/main" xmlns:r="http://schemas.openxmlformats.org/officeDocument/2006/relationships" xmlns:p="http://schemas.openxmlformats.org/presentationml/2006/main">
+<p:sld xmlns:a="http://schemas.openxmlformats.org/drawingml/2006/main" xmlns:p="http://schemas.openxmlformats.org/presentationml/2006/main" xmlns:r="http://schemas.openxmlformats.org/officeDocument/2006/relationships">
   <p:cSld>
     <p:spTree>
       <p:nvGrpSpPr>
@@ -15123,14 +14660,7 @@
         <p:cNvGrpSpPr/>
         <p:nvPr/>
       </p:nvGrpSpPr>
-      <p:grpSpPr>
-        <a:xfrm>
-          <a:off x="0" y="0"/>
-          <a:ext cx="0" cy="0"/>
-          <a:chOff x="0" y="0"/>
-          <a:chExt cx="0" cy="0"/>
-        </a:xfrm>
-      </p:grpSpPr>
+      <p:grpSpPr/>
       <p:sp>
         <p:nvSpPr>
           <p:cNvPr id="2" name="Title 1"/>
@@ -15172,43 +14702,17 @@
                 <a:tableStyleId>{5C22544A-7EE6-4342-B048-85BDC9FD1C3A}</a:tableStyleId>
               </a:tblPr>
               <a:tblGrid>
-                <a:gridCol w="1822318">
-                  <a:extLst>
-                    <a:ext uri="{9D8B030D-6E8A-4147-A177-3AD203B41FA5}">
-                      <a16:colId xmlns:a16="http://schemas.microsoft.com/office/drawing/2014/main" val="20000"/>
-                    </a:ext>
-                  </a:extLst>
-                </a:gridCol>
-                <a:gridCol w="1682140">
-                  <a:extLst>
-                    <a:ext uri="{9D8B030D-6E8A-4147-A177-3AD203B41FA5}">
-                      <a16:colId xmlns:a16="http://schemas.microsoft.com/office/drawing/2014/main" val="20001"/>
-                    </a:ext>
-                  </a:extLst>
-                </a:gridCol>
-                <a:gridCol w="1822318">
-                  <a:extLst>
-                    <a:ext uri="{9D8B030D-6E8A-4147-A177-3AD203B41FA5}">
-                      <a16:colId xmlns:a16="http://schemas.microsoft.com/office/drawing/2014/main" val="20002"/>
-                    </a:ext>
-                  </a:extLst>
-                </a:gridCol>
-                <a:gridCol w="3175039">
-                  <a:extLst>
-                    <a:ext uri="{9D8B030D-6E8A-4147-A177-3AD203B41FA5}">
-                      <a16:colId xmlns:a16="http://schemas.microsoft.com/office/drawing/2014/main" val="20003"/>
-                    </a:ext>
-                  </a:extLst>
-                </a:gridCol>
+                <a:gridCol w="1822318"/>
+                <a:gridCol w="1682140"/>
+                <a:gridCol w="1822318"/>
+                <a:gridCol w="3175039"/>
               </a:tblGrid>
               <a:tr h="328473">
                 <a:tc>
                   <a:txBody>
                     <a:bodyPr/>
                     <a:lstStyle/>
-                    <a:p>
-                      <a:endParaRPr/>
-                    </a:p>
+                    <a:p/>
                   </a:txBody>
                   <a:tcPr marL="73152" marR="73152" marT="65694" marB="65694" anchor="ctr">
                     <a:solidFill>
@@ -15279,11 +14783,6 @@
                     </a:solidFill>
                   </a:tcPr>
                 </a:tc>
-                <a:extLst>
-                  <a:ext uri="{0D108BD9-81ED-4DB2-BD59-A6C34878D82A}">
-                    <a16:rowId xmlns:a16="http://schemas.microsoft.com/office/drawing/2014/main" val="10000"/>
-                  </a:ext>
-                </a:extLst>
               </a:tr>
               <a:tr h="328473">
                 <a:tc>
@@ -15370,11 +14869,6 @@
                     </a:solidFill>
                   </a:tcPr>
                 </a:tc>
-                <a:extLst>
-                  <a:ext uri="{0D108BD9-81ED-4DB2-BD59-A6C34878D82A}">
-                    <a16:rowId xmlns:a16="http://schemas.microsoft.com/office/drawing/2014/main" val="10001"/>
-                  </a:ext>
-                </a:extLst>
               </a:tr>
               <a:tr h="328473">
                 <a:tc>
@@ -15461,11 +14955,6 @@
                     </a:solidFill>
                   </a:tcPr>
                 </a:tc>
-                <a:extLst>
-                  <a:ext uri="{0D108BD9-81ED-4DB2-BD59-A6C34878D82A}">
-                    <a16:rowId xmlns:a16="http://schemas.microsoft.com/office/drawing/2014/main" val="10002"/>
-                  </a:ext>
-                </a:extLst>
               </a:tr>
               <a:tr h="328473">
                 <a:tc>
@@ -15552,11 +15041,6 @@
                     </a:solidFill>
                   </a:tcPr>
                 </a:tc>
-                <a:extLst>
-                  <a:ext uri="{0D108BD9-81ED-4DB2-BD59-A6C34878D82A}">
-                    <a16:rowId xmlns:a16="http://schemas.microsoft.com/office/drawing/2014/main" val="10003"/>
-                  </a:ext>
-                </a:extLst>
               </a:tr>
               <a:tr h="328473">
                 <a:tc>
@@ -15643,11 +15127,6 @@
                     </a:solidFill>
                   </a:tcPr>
                 </a:tc>
-                <a:extLst>
-                  <a:ext uri="{0D108BD9-81ED-4DB2-BD59-A6C34878D82A}">
-                    <a16:rowId xmlns:a16="http://schemas.microsoft.com/office/drawing/2014/main" val="10004"/>
-                  </a:ext>
-                </a:extLst>
               </a:tr>
               <a:tr h="328477">
                 <a:tc>
@@ -15734,11 +15213,6 @@
                     </a:solidFill>
                   </a:tcPr>
                 </a:tc>
-                <a:extLst>
-                  <a:ext uri="{0D108BD9-81ED-4DB2-BD59-A6C34878D82A}">
-                    <a16:rowId xmlns:a16="http://schemas.microsoft.com/office/drawing/2014/main" val="10005"/>
-                  </a:ext>
-                </a:extLst>
               </a:tr>
             </a:tbl>
           </a:graphicData>
@@ -15761,7 +15235,7 @@
           <a:noFill/>
         </p:spPr>
         <p:txBody>
-          <a:bodyPr wrap="square" lIns="0" tIns="0" rIns="0" bIns="0" anchor="t">
+          <a:bodyPr wrap="square" anchor="t" lIns="0" rIns="0" tIns="0" bIns="0">
             <a:spAutoFit/>
           </a:bodyPr>
           <a:lstStyle/>
@@ -15786,7 +15260,7 @@
 </file>
 
 <file path=ppt/slides/slide28.xml><?xml version="1.0" encoding="utf-8"?>
-<p:sld xmlns:a="http://schemas.openxmlformats.org/drawingml/2006/main" xmlns:r="http://schemas.openxmlformats.org/officeDocument/2006/relationships" xmlns:p="http://schemas.openxmlformats.org/presentationml/2006/main">
+<p:sld xmlns:a="http://schemas.openxmlformats.org/drawingml/2006/main" xmlns:p="http://schemas.openxmlformats.org/presentationml/2006/main" xmlns:r="http://schemas.openxmlformats.org/officeDocument/2006/relationships">
   <p:cSld>
     <p:spTree>
       <p:nvGrpSpPr>
@@ -15794,14 +15268,7 @@
         <p:cNvGrpSpPr/>
         <p:nvPr/>
       </p:nvGrpSpPr>
-      <p:grpSpPr>
-        <a:xfrm>
-          <a:off x="0" y="0"/>
-          <a:ext cx="0" cy="0"/>
-          <a:chOff x="0" y="0"/>
-          <a:chExt cx="0" cy="0"/>
-        </a:xfrm>
-      </p:grpSpPr>
+      <p:grpSpPr/>
       <p:sp>
         <p:nvSpPr>
           <p:cNvPr id="2" name="Title 1"/>
@@ -15830,7 +15297,7 @@
             <a:spLocks noGrp="1"/>
           </p:cNvSpPr>
           <p:nvPr>
-            <p:ph type="body" sz="quarter" idx="10"/>
+            <p:ph type="body" idx="10" sz="quarter"/>
           </p:nvPr>
         </p:nvSpPr>
         <p:spPr/>
@@ -15853,28 +15320,45 @@
                 <a:solidFill>
                   <a:schemeClr val="accent1"/>
                 </a:solidFill>
+                <a:hlinkClick r:id="rId2"/>
+              </a:rPr>
+              <a:t>Workshop materials: github.com/dyalog-training/2026-MP2</a:t>
+            </a:r>
+          </a:p>
+          <a:p>
+            <a:r>
+              <a:rPr sz="1200" b="0">
+                <a:solidFill>
+                  <a:schemeClr val="tx1"/>
+                </a:solidFill>
+              </a:rPr>
+              <a:t>Documentation: </a:t>
+            </a:r>
+            <a:r>
+              <a:rPr sz="1200">
+                <a:solidFill>
+                  <a:schemeClr val="accent1"/>
+                </a:solidFill>
                 <a:hlinkClick r:id="rId3"/>
               </a:rPr>
-              <a:t>Workshop materials: github.com/dyalog-training/2026-MP2</a:t>
-            </a:r>
-          </a:p>
-          <a:p>
-            <a:r>
-              <a:rPr sz="1200" b="0">
-                <a:solidFill>
-                  <a:schemeClr val="tx1"/>
-                </a:solidFill>
-              </a:rPr>
-              <a:t>Documentation: </a:t>
+              <a:t>HttpCommand</a:t>
             </a:r>
             <a:r>
               <a:rPr sz="1200">
                 <a:solidFill>
+                  <a:schemeClr val="tx1"/>
+                </a:solidFill>
+              </a:rPr>
+              <a:t>, </a:t>
+            </a:r>
+            <a:r>
+              <a:rPr sz="1200">
+                <a:solidFill>
                   <a:schemeClr val="accent1"/>
                 </a:solidFill>
                 <a:hlinkClick r:id="rId4"/>
               </a:rPr>
-              <a:t>HttpCommand</a:t>
+              <a:t>Jarvis</a:t>
             </a:r>
             <a:r>
               <a:rPr sz="1200">
@@ -15890,23 +15374,6 @@
                   <a:schemeClr val="accent1"/>
                 </a:solidFill>
                 <a:hlinkClick r:id="rId5"/>
-              </a:rPr>
-              <a:t>Jarvis</a:t>
-            </a:r>
-            <a:r>
-              <a:rPr sz="1200">
-                <a:solidFill>
-                  <a:schemeClr val="tx1"/>
-                </a:solidFill>
-              </a:rPr>
-              <a:t>, </a:t>
-            </a:r>
-            <a:r>
-              <a:rPr sz="1200">
-                <a:solidFill>
-                  <a:schemeClr val="accent1"/>
-                </a:solidFill>
-                <a:hlinkClick r:id="rId6"/>
               </a:rPr>
               <a:t>WebSocketClient</a:t>
             </a:r>
@@ -15922,7 +15389,7 @@
 </file>
 
 <file path=ppt/slides/slide3.xml><?xml version="1.0" encoding="utf-8"?>
-<p:sld xmlns:a="http://schemas.openxmlformats.org/drawingml/2006/main" xmlns:r="http://schemas.openxmlformats.org/officeDocument/2006/relationships" xmlns:p="http://schemas.openxmlformats.org/presentationml/2006/main">
+<p:sld xmlns:a="http://schemas.openxmlformats.org/drawingml/2006/main" xmlns:p="http://schemas.openxmlformats.org/presentationml/2006/main" xmlns:r="http://schemas.openxmlformats.org/officeDocument/2006/relationships">
   <p:cSld>
     <p:spTree>
       <p:nvGrpSpPr>
@@ -15930,14 +15397,7 @@
         <p:cNvGrpSpPr/>
         <p:nvPr/>
       </p:nvGrpSpPr>
-      <p:grpSpPr>
-        <a:xfrm>
-          <a:off x="0" y="0"/>
-          <a:ext cx="0" cy="0"/>
-          <a:chOff x="0" y="0"/>
-          <a:chExt cx="0" cy="0"/>
-        </a:xfrm>
-      </p:grpSpPr>
+      <p:grpSpPr/>
       <p:sp>
         <p:nvSpPr>
           <p:cNvPr id="2" name="Title 1"/>
@@ -16037,9 +15497,7 @@
         <p:txBody>
           <a:bodyPr rtlCol="0" anchor="ctr"/>
           <a:lstStyle/>
-          <a:p>
-            <a:endParaRPr/>
-          </a:p>
+          <a:p/>
         </p:txBody>
       </p:sp>
       <p:sp>
@@ -16059,7 +15517,7 @@
           <a:noFill/>
         </p:spPr>
         <p:txBody>
-          <a:bodyPr wrap="square" lIns="0" tIns="0" rIns="0" bIns="0" anchor="ctr">
+          <a:bodyPr wrap="square" anchor="ctr" lIns="0" rIns="0" tIns="0" bIns="0">
             <a:spAutoFit/>
           </a:bodyPr>
           <a:lstStyle/>
@@ -16153,9 +15611,7 @@
         <p:txBody>
           <a:bodyPr rtlCol="0" anchor="ctr"/>
           <a:lstStyle/>
-          <a:p>
-            <a:endParaRPr/>
-          </a:p>
+          <a:p/>
         </p:txBody>
       </p:sp>
       <p:sp>
@@ -16175,7 +15631,7 @@
           <a:noFill/>
         </p:spPr>
         <p:txBody>
-          <a:bodyPr wrap="square" lIns="0" tIns="0" rIns="0" bIns="0" anchor="ctr">
+          <a:bodyPr wrap="square" anchor="ctr" lIns="0" rIns="0" tIns="0" bIns="0">
             <a:spAutoFit/>
           </a:bodyPr>
           <a:lstStyle/>
@@ -16245,7 +15701,7 @@
           <a:noFill/>
         </p:spPr>
         <p:txBody>
-          <a:bodyPr wrap="square" lIns="0" tIns="0" rIns="0" bIns="0" anchor="b">
+          <a:bodyPr wrap="square" anchor="b" lIns="0" rIns="0" tIns="0" bIns="0">
             <a:spAutoFit/>
           </a:bodyPr>
           <a:lstStyle/>
@@ -16307,9 +15763,7 @@
         <p:txBody>
           <a:bodyPr rtlCol="0" anchor="ctr"/>
           <a:lstStyle/>
-          <a:p>
-            <a:endParaRPr/>
-          </a:p>
+          <a:p/>
         </p:txBody>
       </p:sp>
       <p:sp>
@@ -16329,7 +15783,7 @@
           <a:noFill/>
         </p:spPr>
         <p:txBody>
-          <a:bodyPr wrap="square" lIns="0" tIns="0" rIns="0" bIns="0" anchor="ctr">
+          <a:bodyPr wrap="square" anchor="ctr" lIns="0" rIns="0" tIns="0" bIns="0">
             <a:spAutoFit/>
           </a:bodyPr>
           <a:lstStyle/>
@@ -16398,9 +15852,7 @@
         <p:txBody>
           <a:bodyPr rtlCol="0" anchor="ctr"/>
           <a:lstStyle/>
-          <a:p>
-            <a:endParaRPr/>
-          </a:p>
+          <a:p/>
         </p:txBody>
       </p:sp>
       <p:sp>
@@ -16420,7 +15872,7 @@
           <a:noFill/>
         </p:spPr>
         <p:txBody>
-          <a:bodyPr wrap="square" lIns="0" tIns="0" rIns="0" bIns="0" anchor="ctr">
+          <a:bodyPr wrap="square" anchor="ctr" lIns="0" rIns="0" tIns="0" bIns="0">
             <a:spAutoFit/>
           </a:bodyPr>
           <a:lstStyle/>
@@ -16501,7 +15953,7 @@
           <a:noFill/>
         </p:spPr>
         <p:txBody>
-          <a:bodyPr wrap="square" lIns="0" tIns="0" rIns="0" bIns="0" anchor="b">
+          <a:bodyPr wrap="square" anchor="b" lIns="0" rIns="0" tIns="0" bIns="0">
             <a:spAutoFit/>
           </a:bodyPr>
           <a:lstStyle/>
@@ -16560,9 +16012,7 @@
         <p:txBody>
           <a:bodyPr rtlCol="0" anchor="ctr"/>
           <a:lstStyle/>
-          <a:p>
-            <a:endParaRPr/>
-          </a:p>
+          <a:p/>
         </p:txBody>
       </p:sp>
       <p:sp>
@@ -16582,7 +16032,7 @@
           <a:noFill/>
         </p:spPr>
         <p:txBody>
-          <a:bodyPr wrap="square" lIns="0" tIns="0" rIns="0" bIns="0" anchor="t">
+          <a:bodyPr wrap="square" anchor="t" lIns="0" rIns="0" tIns="0" bIns="0">
             <a:spAutoFit/>
           </a:bodyPr>
           <a:lstStyle/>
@@ -16615,7 +16065,7 @@
           <a:noFill/>
         </p:spPr>
         <p:txBody>
-          <a:bodyPr wrap="square" lIns="0" tIns="0" rIns="0" bIns="0" anchor="t">
+          <a:bodyPr wrap="square" anchor="t" lIns="0" rIns="0" tIns="0" bIns="0">
             <a:spAutoFit/>
           </a:bodyPr>
           <a:lstStyle/>
@@ -16672,9 +16122,7 @@
         <p:txBody>
           <a:bodyPr rtlCol="0" anchor="ctr"/>
           <a:lstStyle/>
-          <a:p>
-            <a:endParaRPr/>
-          </a:p>
+          <a:p/>
         </p:txBody>
       </p:sp>
       <p:sp>
@@ -16694,7 +16142,7 @@
           <a:noFill/>
         </p:spPr>
         <p:txBody>
-          <a:bodyPr wrap="square" lIns="0" tIns="0" rIns="0" bIns="0" anchor="t">
+          <a:bodyPr wrap="square" anchor="t" lIns="0" rIns="0" tIns="0" bIns="0">
             <a:spAutoFit/>
           </a:bodyPr>
           <a:lstStyle/>
@@ -16727,7 +16175,7 @@
           <a:noFill/>
         </p:spPr>
         <p:txBody>
-          <a:bodyPr wrap="square" lIns="0" tIns="0" rIns="0" bIns="0" anchor="t">
+          <a:bodyPr wrap="square" anchor="t" lIns="0" rIns="0" tIns="0" bIns="0">
             <a:spAutoFit/>
           </a:bodyPr>
           <a:lstStyle/>
@@ -16784,9 +16232,7 @@
         <p:txBody>
           <a:bodyPr rtlCol="0" anchor="ctr"/>
           <a:lstStyle/>
-          <a:p>
-            <a:endParaRPr/>
-          </a:p>
+          <a:p/>
         </p:txBody>
       </p:sp>
       <p:sp>
@@ -16806,7 +16252,7 @@
           <a:noFill/>
         </p:spPr>
         <p:txBody>
-          <a:bodyPr wrap="square" lIns="0" tIns="0" rIns="0" bIns="0" anchor="t">
+          <a:bodyPr wrap="square" anchor="t" lIns="0" rIns="0" tIns="0" bIns="0">
             <a:spAutoFit/>
           </a:bodyPr>
           <a:lstStyle/>
@@ -16839,7 +16285,7 @@
           <a:noFill/>
         </p:spPr>
         <p:txBody>
-          <a:bodyPr wrap="square" lIns="0" tIns="0" rIns="0" bIns="0" anchor="t">
+          <a:bodyPr wrap="square" anchor="t" lIns="0" rIns="0" tIns="0" bIns="0">
             <a:spAutoFit/>
           </a:bodyPr>
           <a:lstStyle/>
@@ -16864,7 +16310,7 @@
 </file>
 
 <file path=ppt/slides/slide4.xml><?xml version="1.0" encoding="utf-8"?>
-<p:sld xmlns:a="http://schemas.openxmlformats.org/drawingml/2006/main" xmlns:r="http://schemas.openxmlformats.org/officeDocument/2006/relationships" xmlns:p="http://schemas.openxmlformats.org/presentationml/2006/main">
+<p:sld xmlns:a="http://schemas.openxmlformats.org/drawingml/2006/main" xmlns:p="http://schemas.openxmlformats.org/presentationml/2006/main" xmlns:r="http://schemas.openxmlformats.org/officeDocument/2006/relationships">
   <p:cSld>
     <p:spTree>
       <p:nvGrpSpPr>
@@ -16872,14 +16318,7 @@
         <p:cNvGrpSpPr/>
         <p:nvPr/>
       </p:nvGrpSpPr>
-      <p:grpSpPr>
-        <a:xfrm>
-          <a:off x="0" y="0"/>
-          <a:ext cx="0" cy="0"/>
-          <a:chOff x="0" y="0"/>
-          <a:chExt cx="0" cy="0"/>
-        </a:xfrm>
-      </p:grpSpPr>
+      <p:grpSpPr/>
       <p:sp>
         <p:nvSpPr>
           <p:cNvPr id="2" name="Title 1"/>
@@ -16919,7 +16358,7 @@
           <a:noFill/>
         </p:spPr>
         <p:txBody>
-          <a:bodyPr wrap="square" lIns="0" tIns="0" rIns="0" bIns="0" anchor="t">
+          <a:bodyPr wrap="square" anchor="t" lIns="0" rIns="0" tIns="0" bIns="0">
             <a:spAutoFit/>
           </a:bodyPr>
           <a:lstStyle/>
@@ -16952,7 +16391,7 @@
           <a:noFill/>
         </p:spPr>
         <p:txBody>
-          <a:bodyPr wrap="square" lIns="0" tIns="0" rIns="0" bIns="0" anchor="t">
+          <a:bodyPr wrap="square" anchor="t" lIns="0" rIns="0" tIns="0" bIns="0">
             <a:spAutoFit/>
           </a:bodyPr>
           <a:lstStyle/>
@@ -17045,9 +16484,7 @@
         <p:txBody>
           <a:bodyPr rtlCol="0" anchor="ctr"/>
           <a:lstStyle/>
-          <a:p>
-            <a:endParaRPr/>
-          </a:p>
+          <a:p/>
         </p:txBody>
       </p:sp>
       <p:sp>
@@ -17067,7 +16504,7 @@
           <a:noFill/>
         </p:spPr>
         <p:txBody>
-          <a:bodyPr wrap="square" lIns="0" tIns="0" rIns="0" bIns="0" anchor="ctr">
+          <a:bodyPr wrap="square" anchor="ctr" lIns="0" rIns="0" tIns="0" bIns="0">
             <a:spAutoFit/>
           </a:bodyPr>
           <a:lstStyle/>
@@ -17161,9 +16598,7 @@
         <p:txBody>
           <a:bodyPr rtlCol="0" anchor="ctr"/>
           <a:lstStyle/>
-          <a:p>
-            <a:endParaRPr/>
-          </a:p>
+          <a:p/>
         </p:txBody>
       </p:sp>
       <p:sp>
@@ -17183,7 +16618,7 @@
           <a:noFill/>
         </p:spPr>
         <p:txBody>
-          <a:bodyPr wrap="square" lIns="0" tIns="0" rIns="0" bIns="0" anchor="ctr">
+          <a:bodyPr wrap="square" anchor="ctr" lIns="0" rIns="0" tIns="0" bIns="0">
             <a:spAutoFit/>
           </a:bodyPr>
           <a:lstStyle/>
@@ -17253,7 +16688,7 @@
           <a:noFill/>
         </p:spPr>
         <p:txBody>
-          <a:bodyPr wrap="square" lIns="0" tIns="0" rIns="0" bIns="0" anchor="b">
+          <a:bodyPr wrap="square" anchor="b" lIns="0" rIns="0" tIns="0" bIns="0">
             <a:spAutoFit/>
           </a:bodyPr>
           <a:lstStyle/>
@@ -17323,7 +16758,7 @@
           <a:noFill/>
         </p:spPr>
         <p:txBody>
-          <a:bodyPr wrap="square" lIns="0" tIns="0" rIns="0" bIns="0" anchor="b">
+          <a:bodyPr wrap="square" anchor="b" lIns="0" rIns="0" tIns="0" bIns="0">
             <a:spAutoFit/>
           </a:bodyPr>
           <a:lstStyle/>
@@ -17393,7 +16828,7 @@
           <a:noFill/>
         </p:spPr>
         <p:txBody>
-          <a:bodyPr wrap="square" lIns="0" tIns="0" rIns="0" bIns="0" anchor="b">
+          <a:bodyPr wrap="square" anchor="b" lIns="0" rIns="0" tIns="0" bIns="0">
             <a:spAutoFit/>
           </a:bodyPr>
           <a:lstStyle/>
@@ -17463,7 +16898,7 @@
           <a:noFill/>
         </p:spPr>
         <p:txBody>
-          <a:bodyPr wrap="square" lIns="0" tIns="0" rIns="0" bIns="0" anchor="b">
+          <a:bodyPr wrap="square" anchor="b" lIns="0" rIns="0" tIns="0" bIns="0">
             <a:spAutoFit/>
           </a:bodyPr>
           <a:lstStyle/>
@@ -17533,7 +16968,7 @@
           <a:noFill/>
         </p:spPr>
         <p:txBody>
-          <a:bodyPr wrap="square" lIns="0" tIns="0" rIns="0" bIns="0" anchor="b">
+          <a:bodyPr wrap="square" anchor="b" lIns="0" rIns="0" tIns="0" bIns="0">
             <a:spAutoFit/>
           </a:bodyPr>
           <a:lstStyle/>
@@ -17603,7 +17038,7 @@
           <a:noFill/>
         </p:spPr>
         <p:txBody>
-          <a:bodyPr wrap="square" lIns="0" tIns="0" rIns="0" bIns="0" anchor="b">
+          <a:bodyPr wrap="square" anchor="b" lIns="0" rIns="0" tIns="0" bIns="0">
             <a:spAutoFit/>
           </a:bodyPr>
           <a:lstStyle/>
@@ -17629,7 +17064,7 @@
         <p:spPr>
           <a:xfrm>
             <a:off x="320040" y="4453483"/>
-            <a:ext cx="1997541" cy="169277"/>
+            <a:ext cx="1997541" cy="229931"/>
           </a:xfrm>
           <a:prstGeom prst="rect">
             <a:avLst/>
@@ -17637,14 +17072,13 @@
           <a:noFill/>
         </p:spPr>
         <p:txBody>
-          <a:bodyPr wrap="square" lIns="0" tIns="0" rIns="0" bIns="0" anchor="t">
+          <a:bodyPr wrap="square" anchor="t" lIns="0" rIns="0" tIns="0" bIns="0">
             <a:spAutoFit/>
           </a:bodyPr>
           <a:lstStyle/>
           <a:p>
-            <a:pPr algn="ctr"/>
-            <a:r>
-              <a:rPr sz="1100" b="1" dirty="0">
+            <a:r>
+              <a:rPr sz="1100" b="1">
                 <a:solidFill>
                   <a:schemeClr val="accent2"/>
                 </a:solidFill>
@@ -17671,7 +17105,7 @@
           <a:noFill/>
         </p:spPr>
         <p:txBody>
-          <a:bodyPr wrap="square" lIns="0" tIns="0" rIns="0" bIns="0" anchor="t">
+          <a:bodyPr wrap="square" anchor="t" lIns="0" rIns="0" tIns="0" bIns="0">
             <a:spAutoFit/>
           </a:bodyPr>
           <a:lstStyle/>
@@ -17704,7 +17138,7 @@
           <a:noFill/>
         </p:spPr>
         <p:txBody>
-          <a:bodyPr wrap="square" lIns="0" tIns="0" rIns="0" bIns="0" anchor="t">
+          <a:bodyPr wrap="square" anchor="t" lIns="0" rIns="0" tIns="0" bIns="0">
             <a:spAutoFit/>
           </a:bodyPr>
           <a:lstStyle/>
@@ -17797,9 +17231,7 @@
         <p:txBody>
           <a:bodyPr rtlCol="0" anchor="ctr"/>
           <a:lstStyle/>
-          <a:p>
-            <a:endParaRPr/>
-          </a:p>
+          <a:p/>
         </p:txBody>
       </p:sp>
       <p:sp>
@@ -17819,7 +17251,7 @@
           <a:noFill/>
         </p:spPr>
         <p:txBody>
-          <a:bodyPr wrap="square" lIns="0" tIns="0" rIns="0" bIns="0" anchor="ctr">
+          <a:bodyPr wrap="square" anchor="ctr" lIns="0" rIns="0" tIns="0" bIns="0">
             <a:spAutoFit/>
           </a:bodyPr>
           <a:lstStyle/>
@@ -17913,9 +17345,7 @@
         <p:txBody>
           <a:bodyPr rtlCol="0" anchor="ctr"/>
           <a:lstStyle/>
-          <a:p>
-            <a:endParaRPr/>
-          </a:p>
+          <a:p/>
         </p:txBody>
       </p:sp>
       <p:sp>
@@ -17935,7 +17365,7 @@
           <a:noFill/>
         </p:spPr>
         <p:txBody>
-          <a:bodyPr wrap="square" lIns="0" tIns="0" rIns="0" bIns="0" anchor="ctr">
+          <a:bodyPr wrap="square" anchor="ctr" lIns="0" rIns="0" tIns="0" bIns="0">
             <a:spAutoFit/>
           </a:bodyPr>
           <a:lstStyle/>
@@ -18005,7 +17435,7 @@
           <a:noFill/>
         </p:spPr>
         <p:txBody>
-          <a:bodyPr wrap="square" lIns="0" tIns="0" rIns="0" bIns="0" anchor="b">
+          <a:bodyPr wrap="square" anchor="b" lIns="0" rIns="0" tIns="0" bIns="0">
             <a:spAutoFit/>
           </a:bodyPr>
           <a:lstStyle/>
@@ -18075,7 +17505,7 @@
           <a:noFill/>
         </p:spPr>
         <p:txBody>
-          <a:bodyPr wrap="square" lIns="0" tIns="0" rIns="0" bIns="0" anchor="b">
+          <a:bodyPr wrap="square" anchor="b" lIns="0" rIns="0" tIns="0" bIns="0">
             <a:spAutoFit/>
           </a:bodyPr>
           <a:lstStyle/>
@@ -18145,7 +17575,7 @@
           <a:noFill/>
         </p:spPr>
         <p:txBody>
-          <a:bodyPr wrap="square" lIns="0" tIns="0" rIns="0" bIns="0" anchor="b">
+          <a:bodyPr wrap="square" anchor="b" lIns="0" rIns="0" tIns="0" bIns="0">
             <a:spAutoFit/>
           </a:bodyPr>
           <a:lstStyle/>
@@ -18171,7 +17601,7 @@
         <p:spPr>
           <a:xfrm>
             <a:off x="2506822" y="4453483"/>
-            <a:ext cx="1997541" cy="169277"/>
+            <a:ext cx="1997541" cy="229931"/>
           </a:xfrm>
           <a:prstGeom prst="rect">
             <a:avLst/>
@@ -18179,12 +17609,11 @@
           <a:noFill/>
         </p:spPr>
         <p:txBody>
-          <a:bodyPr wrap="square" lIns="0" tIns="0" rIns="0" bIns="0" anchor="t">
+          <a:bodyPr wrap="square" anchor="t" lIns="0" rIns="0" tIns="0" bIns="0">
             <a:spAutoFit/>
           </a:bodyPr>
           <a:lstStyle/>
           <a:p>
-            <a:pPr algn="ctr"/>
             <a:r>
               <a:rPr sz="1100" b="1">
                 <a:solidFill>
@@ -18213,7 +17642,7 @@
           <a:noFill/>
         </p:spPr>
         <p:txBody>
-          <a:bodyPr wrap="square" lIns="0" tIns="0" rIns="0" bIns="0" anchor="t">
+          <a:bodyPr wrap="square" anchor="t" lIns="0" rIns="0" tIns="0" bIns="0">
             <a:spAutoFit/>
           </a:bodyPr>
           <a:lstStyle/>
@@ -18246,7 +17675,7 @@
           <a:noFill/>
         </p:spPr>
         <p:txBody>
-          <a:bodyPr wrap="square" lIns="0" tIns="0" rIns="0" bIns="0" anchor="t">
+          <a:bodyPr wrap="square" anchor="t" lIns="0" rIns="0" tIns="0" bIns="0">
             <a:spAutoFit/>
           </a:bodyPr>
           <a:lstStyle/>
@@ -18339,9 +17768,7 @@
         <p:txBody>
           <a:bodyPr rtlCol="0" anchor="ctr"/>
           <a:lstStyle/>
-          <a:p>
-            <a:endParaRPr/>
-          </a:p>
+          <a:p/>
         </p:txBody>
       </p:sp>
       <p:sp>
@@ -18361,7 +17788,7 @@
           <a:noFill/>
         </p:spPr>
         <p:txBody>
-          <a:bodyPr wrap="square" lIns="0" tIns="0" rIns="0" bIns="0" anchor="ctr">
+          <a:bodyPr wrap="square" anchor="ctr" lIns="0" rIns="0" tIns="0" bIns="0">
             <a:spAutoFit/>
           </a:bodyPr>
           <a:lstStyle/>
@@ -18455,9 +17882,7 @@
         <p:txBody>
           <a:bodyPr rtlCol="0" anchor="ctr"/>
           <a:lstStyle/>
-          <a:p>
-            <a:endParaRPr/>
-          </a:p>
+          <a:p/>
         </p:txBody>
       </p:sp>
       <p:sp>
@@ -18477,7 +17902,7 @@
           <a:noFill/>
         </p:spPr>
         <p:txBody>
-          <a:bodyPr wrap="square" lIns="0" tIns="0" rIns="0" bIns="0" anchor="ctr">
+          <a:bodyPr wrap="square" anchor="ctr" lIns="0" rIns="0" tIns="0" bIns="0">
             <a:spAutoFit/>
           </a:bodyPr>
           <a:lstStyle/>
@@ -18547,7 +17972,7 @@
           <a:noFill/>
         </p:spPr>
         <p:txBody>
-          <a:bodyPr wrap="square" lIns="0" tIns="0" rIns="0" bIns="0" anchor="b">
+          <a:bodyPr wrap="square" anchor="b" lIns="0" rIns="0" tIns="0" bIns="0">
             <a:spAutoFit/>
           </a:bodyPr>
           <a:lstStyle/>
@@ -18617,7 +18042,7 @@
           <a:noFill/>
         </p:spPr>
         <p:txBody>
-          <a:bodyPr wrap="square" lIns="0" tIns="0" rIns="0" bIns="0" anchor="b">
+          <a:bodyPr wrap="square" anchor="b" lIns="0" rIns="0" tIns="0" bIns="0">
             <a:spAutoFit/>
           </a:bodyPr>
           <a:lstStyle/>
@@ -18751,7 +18176,7 @@
         <p:spPr>
           <a:xfrm>
             <a:off x="4693604" y="4453483"/>
-            <a:ext cx="1997541" cy="169277"/>
+            <a:ext cx="1997541" cy="229931"/>
           </a:xfrm>
           <a:prstGeom prst="rect">
             <a:avLst/>
@@ -18759,12 +18184,11 @@
           <a:noFill/>
         </p:spPr>
         <p:txBody>
-          <a:bodyPr wrap="square" lIns="0" tIns="0" rIns="0" bIns="0" anchor="t">
+          <a:bodyPr wrap="square" anchor="t" lIns="0" rIns="0" tIns="0" bIns="0">
             <a:spAutoFit/>
           </a:bodyPr>
           <a:lstStyle/>
           <a:p>
-            <a:pPr algn="ctr"/>
             <a:r>
               <a:rPr sz="1100" b="1">
                 <a:solidFill>
@@ -18793,7 +18217,7 @@
           <a:noFill/>
         </p:spPr>
         <p:txBody>
-          <a:bodyPr wrap="square" lIns="0" tIns="0" rIns="0" bIns="0" anchor="t">
+          <a:bodyPr wrap="square" anchor="t" lIns="0" rIns="0" tIns="0" bIns="0">
             <a:spAutoFit/>
           </a:bodyPr>
           <a:lstStyle/>
@@ -18826,7 +18250,7 @@
           <a:noFill/>
         </p:spPr>
         <p:txBody>
-          <a:bodyPr wrap="square" lIns="0" tIns="0" rIns="0" bIns="0" anchor="t">
+          <a:bodyPr wrap="square" anchor="t" lIns="0" rIns="0" tIns="0" bIns="0">
             <a:spAutoFit/>
           </a:bodyPr>
           <a:lstStyle/>
@@ -18919,9 +18343,7 @@
         <p:txBody>
           <a:bodyPr rtlCol="0" anchor="ctr"/>
           <a:lstStyle/>
-          <a:p>
-            <a:endParaRPr/>
-          </a:p>
+          <a:p/>
         </p:txBody>
       </p:sp>
       <p:sp>
@@ -18941,7 +18363,7 @@
           <a:noFill/>
         </p:spPr>
         <p:txBody>
-          <a:bodyPr wrap="square" lIns="0" tIns="0" rIns="0" bIns="0" anchor="ctr">
+          <a:bodyPr wrap="square" anchor="ctr" lIns="0" rIns="0" tIns="0" bIns="0">
             <a:spAutoFit/>
           </a:bodyPr>
           <a:lstStyle/>
@@ -19035,9 +18457,7 @@
         <p:txBody>
           <a:bodyPr rtlCol="0" anchor="ctr"/>
           <a:lstStyle/>
-          <a:p>
-            <a:endParaRPr/>
-          </a:p>
+          <a:p/>
         </p:txBody>
       </p:sp>
       <p:sp>
@@ -19057,7 +18477,7 @@
           <a:noFill/>
         </p:spPr>
         <p:txBody>
-          <a:bodyPr wrap="square" lIns="0" tIns="0" rIns="0" bIns="0" anchor="ctr">
+          <a:bodyPr wrap="square" anchor="ctr" lIns="0" rIns="0" tIns="0" bIns="0">
             <a:spAutoFit/>
           </a:bodyPr>
           <a:lstStyle/>
@@ -19127,7 +18547,7 @@
           <a:noFill/>
         </p:spPr>
         <p:txBody>
-          <a:bodyPr wrap="square" lIns="0" tIns="0" rIns="0" bIns="0" anchor="b">
+          <a:bodyPr wrap="square" anchor="b" lIns="0" rIns="0" tIns="0" bIns="0">
             <a:spAutoFit/>
           </a:bodyPr>
           <a:lstStyle/>
@@ -19297,7 +18717,7 @@
         <p:spPr>
           <a:xfrm>
             <a:off x="6880387" y="4453483"/>
-            <a:ext cx="1997541" cy="169277"/>
+            <a:ext cx="1997541" cy="229931"/>
           </a:xfrm>
           <a:prstGeom prst="rect">
             <a:avLst/>
@@ -19305,12 +18725,11 @@
           <a:noFill/>
         </p:spPr>
         <p:txBody>
-          <a:bodyPr wrap="square" lIns="0" tIns="0" rIns="0" bIns="0" anchor="t">
+          <a:bodyPr wrap="square" anchor="t" lIns="0" rIns="0" tIns="0" bIns="0">
             <a:spAutoFit/>
           </a:bodyPr>
           <a:lstStyle/>
           <a:p>
-            <a:pPr algn="ctr"/>
             <a:r>
               <a:rPr sz="1100" b="1">
                 <a:solidFill>
@@ -19331,7 +18750,7 @@
 </file>
 
 <file path=ppt/slides/slide5.xml><?xml version="1.0" encoding="utf-8"?>
-<p:sld xmlns:a="http://schemas.openxmlformats.org/drawingml/2006/main" xmlns:r="http://schemas.openxmlformats.org/officeDocument/2006/relationships" xmlns:p="http://schemas.openxmlformats.org/presentationml/2006/main">
+<p:sld xmlns:a="http://schemas.openxmlformats.org/drawingml/2006/main" xmlns:p="http://schemas.openxmlformats.org/presentationml/2006/main" xmlns:r="http://schemas.openxmlformats.org/officeDocument/2006/relationships">
   <p:cSld>
     <p:spTree>
       <p:nvGrpSpPr>
@@ -19339,14 +18758,7 @@
         <p:cNvGrpSpPr/>
         <p:nvPr/>
       </p:nvGrpSpPr>
-      <p:grpSpPr>
-        <a:xfrm>
-          <a:off x="0" y="0"/>
-          <a:ext cx="0" cy="0"/>
-          <a:chOff x="0" y="0"/>
-          <a:chExt cx="0" cy="0"/>
-        </a:xfrm>
-      </p:grpSpPr>
+      <p:grpSpPr/>
       <p:sp>
         <p:nvSpPr>
           <p:cNvPr id="2" name="Title 1"/>
@@ -19410,9 +18822,7 @@
         <p:txBody>
           <a:bodyPr rtlCol="0" anchor="ctr"/>
           <a:lstStyle/>
-          <a:p>
-            <a:endParaRPr/>
-          </a:p>
+          <a:p/>
         </p:txBody>
       </p:sp>
       <p:sp>
@@ -19432,7 +18842,7 @@
           <a:noFill/>
         </p:spPr>
         <p:txBody>
-          <a:bodyPr wrap="square" lIns="0" tIns="0" rIns="0" bIns="0" anchor="t">
+          <a:bodyPr wrap="square" anchor="t" lIns="0" rIns="0" tIns="0" bIns="0">
             <a:spAutoFit/>
           </a:bodyPr>
           <a:lstStyle/>
@@ -19465,7 +18875,7 @@
           <a:noFill/>
         </p:spPr>
         <p:txBody>
-          <a:bodyPr wrap="square" lIns="0" tIns="0" rIns="0" bIns="0" anchor="t">
+          <a:bodyPr wrap="square" anchor="t" lIns="0" rIns="0" tIns="0" bIns="0">
             <a:spAutoFit/>
           </a:bodyPr>
           <a:lstStyle/>
@@ -19522,9 +18932,7 @@
         <p:txBody>
           <a:bodyPr rtlCol="0" anchor="ctr"/>
           <a:lstStyle/>
-          <a:p>
-            <a:endParaRPr/>
-          </a:p>
+          <a:p/>
         </p:txBody>
       </p:sp>
       <p:sp>
@@ -19544,7 +18952,7 @@
           <a:noFill/>
         </p:spPr>
         <p:txBody>
-          <a:bodyPr wrap="square" lIns="0" tIns="0" rIns="0" bIns="0" anchor="t">
+          <a:bodyPr wrap="square" anchor="t" lIns="0" rIns="0" tIns="0" bIns="0">
             <a:spAutoFit/>
           </a:bodyPr>
           <a:lstStyle/>
@@ -19557,6 +18965,17 @@
                 <a:latin typeface="APL385 Unicode"/>
               </a:rPr>
               <a:t>r←HttpCommand.Get url</a:t>
+            </a:r>
+          </a:p>
+          <a:p>
+            <a:r>
+              <a:rPr sz="1000" b="0">
+                <a:solidFill>
+                  <a:schemeClr val="tx1"/>
+                </a:solidFill>
+                <a:latin typeface="APL385 Unicode"/>
+              </a:rPr>
+              <a:t>r.IsOK</a:t>
             </a:r>
           </a:p>
           <a:p>
@@ -19613,9 +19032,7 @@
         <p:txBody>
           <a:bodyPr rtlCol="0" anchor="ctr"/>
           <a:lstStyle/>
-          <a:p>
-            <a:endParaRPr/>
-          </a:p>
+          <a:p/>
         </p:txBody>
       </p:sp>
       <p:sp>
@@ -19635,7 +19052,7 @@
           <a:noFill/>
         </p:spPr>
         <p:txBody>
-          <a:bodyPr wrap="square" lIns="0" tIns="0" rIns="0" bIns="0" anchor="t">
+          <a:bodyPr wrap="square" anchor="t" lIns="0" rIns="0" tIns="0" bIns="0">
             <a:spAutoFit/>
           </a:bodyPr>
           <a:lstStyle/>
@@ -19668,7 +19085,7 @@
           <a:noFill/>
         </p:spPr>
         <p:txBody>
-          <a:bodyPr wrap="square" lIns="0" tIns="0" rIns="0" bIns="0" anchor="t">
+          <a:bodyPr wrap="square" anchor="t" lIns="0" rIns="0" tIns="0" bIns="0">
             <a:spAutoFit/>
           </a:bodyPr>
           <a:lstStyle/>
@@ -19725,9 +19142,7 @@
         <p:txBody>
           <a:bodyPr rtlCol="0" anchor="ctr"/>
           <a:lstStyle/>
-          <a:p>
-            <a:endParaRPr/>
-          </a:p>
+          <a:p/>
         </p:txBody>
       </p:sp>
       <p:sp>
@@ -19747,7 +19162,7 @@
           <a:noFill/>
         </p:spPr>
         <p:txBody>
-          <a:bodyPr wrap="square" lIns="0" tIns="0" rIns="0" bIns="0" anchor="t">
+          <a:bodyPr wrap="square" anchor="t" lIns="0" rIns="0" tIns="0" bIns="0">
             <a:spAutoFit/>
           </a:bodyPr>
           <a:lstStyle/>
@@ -19827,9 +19242,7 @@
         <p:txBody>
           <a:bodyPr rtlCol="0" anchor="ctr"/>
           <a:lstStyle/>
-          <a:p>
-            <a:endParaRPr/>
-          </a:p>
+          <a:p/>
         </p:txBody>
       </p:sp>
       <p:sp>
@@ -19849,7 +19262,7 @@
           <a:noFill/>
         </p:spPr>
         <p:txBody>
-          <a:bodyPr wrap="square" lIns="0" tIns="0" rIns="0" bIns="0" anchor="t">
+          <a:bodyPr wrap="square" anchor="t" lIns="0" rIns="0" tIns="0" bIns="0">
             <a:spAutoFit/>
           </a:bodyPr>
           <a:lstStyle/>
@@ -19882,7 +19295,7 @@
           <a:noFill/>
         </p:spPr>
         <p:txBody>
-          <a:bodyPr wrap="square" lIns="0" tIns="0" rIns="0" bIns="0" anchor="t">
+          <a:bodyPr wrap="square" anchor="t" lIns="0" rIns="0" tIns="0" bIns="0">
             <a:spAutoFit/>
           </a:bodyPr>
           <a:lstStyle/>
@@ -19939,9 +19352,7 @@
         <p:txBody>
           <a:bodyPr rtlCol="0" anchor="ctr"/>
           <a:lstStyle/>
-          <a:p>
-            <a:endParaRPr/>
-          </a:p>
+          <a:p/>
         </p:txBody>
       </p:sp>
       <p:sp>
@@ -19961,7 +19372,7 @@
           <a:noFill/>
         </p:spPr>
         <p:txBody>
-          <a:bodyPr wrap="square" lIns="0" tIns="0" rIns="0" bIns="0" anchor="t">
+          <a:bodyPr wrap="square" anchor="t" lIns="0" rIns="0" tIns="0" bIns="0">
             <a:spAutoFit/>
           </a:bodyPr>
           <a:lstStyle/>
@@ -20055,9 +19466,7 @@
         <p:txBody>
           <a:bodyPr rtlCol="0" anchor="ctr"/>
           <a:lstStyle/>
-          <a:p>
-            <a:endParaRPr/>
-          </a:p>
+          <a:p/>
         </p:txBody>
       </p:sp>
       <p:sp>
@@ -20077,7 +19486,7 @@
           <a:noFill/>
         </p:spPr>
         <p:txBody>
-          <a:bodyPr wrap="square" lIns="0" tIns="0" rIns="0" bIns="0" anchor="ctr">
+          <a:bodyPr wrap="square" anchor="ctr" lIns="0" rIns="0" tIns="0" bIns="0">
             <a:spAutoFit/>
           </a:bodyPr>
           <a:lstStyle/>
@@ -20102,7 +19511,7 @@
 </file>
 
 <file path=ppt/slides/slide6.xml><?xml version="1.0" encoding="utf-8"?>
-<p:sld xmlns:a="http://schemas.openxmlformats.org/drawingml/2006/main" xmlns:r="http://schemas.openxmlformats.org/officeDocument/2006/relationships" xmlns:p="http://schemas.openxmlformats.org/presentationml/2006/main">
+<p:sld xmlns:a="http://schemas.openxmlformats.org/drawingml/2006/main" xmlns:p="http://schemas.openxmlformats.org/presentationml/2006/main" xmlns:r="http://schemas.openxmlformats.org/officeDocument/2006/relationships">
   <p:cSld>
     <p:spTree>
       <p:nvGrpSpPr>
@@ -20110,14 +19519,7 @@
         <p:cNvGrpSpPr/>
         <p:nvPr/>
       </p:nvGrpSpPr>
-      <p:grpSpPr>
-        <a:xfrm>
-          <a:off x="0" y="0"/>
-          <a:ext cx="0" cy="0"/>
-          <a:chOff x="0" y="0"/>
-          <a:chExt cx="0" cy="0"/>
-        </a:xfrm>
-      </p:grpSpPr>
+      <p:grpSpPr/>
       <p:sp>
         <p:nvSpPr>
           <p:cNvPr id="2" name="Title 1"/>
@@ -20149,7 +19551,7 @@
         <p:spPr>
           <a:xfrm>
             <a:off x="320040" y="1267287"/>
-            <a:ext cx="5431911" cy="2233621"/>
+            <a:ext cx="4415618" cy="2365011"/>
           </a:xfrm>
           <a:prstGeom prst="roundRect">
             <a:avLst>
@@ -20181,9 +19583,7 @@
         <p:txBody>
           <a:bodyPr rtlCol="0" anchor="ctr"/>
           <a:lstStyle/>
-          <a:p>
-            <a:endParaRPr/>
-          </a:p>
+          <a:p/>
         </p:txBody>
       </p:sp>
       <p:sp>
@@ -20195,7 +19595,7 @@
         <p:spPr>
           <a:xfrm>
             <a:off x="460218" y="1346121"/>
-            <a:ext cx="5151554" cy="2075954"/>
+            <a:ext cx="4135261" cy="2207343"/>
           </a:xfrm>
           <a:prstGeom prst="rect">
             <a:avLst/>
@@ -20203,7 +19603,7 @@
           <a:noFill/>
         </p:spPr>
         <p:txBody>
-          <a:bodyPr wrap="square" lIns="0" tIns="0" rIns="0" bIns="0" anchor="t">
+          <a:bodyPr wrap="square" anchor="t" lIns="0" rIns="0" tIns="0" bIns="0">
             <a:spAutoFit/>
           </a:bodyPr>
           <a:lstStyle/>
@@ -20226,16 +19626,8 @@
                 </a:solidFill>
                 <a:latin typeface="APL385 Unicode"/>
               </a:rPr>
-              <a:t>Setup '&lt;repo&gt;'</a:t>
-            </a:r>
-          </a:p>
-          <a:p>
-            <a:endParaRPr sz="1000" b="0">
-              <a:solidFill>
-                <a:schemeClr val="tx1"/>
-              </a:solidFill>
-              <a:latin typeface="APL385 Unicode"/>
-            </a:endParaRPr>
+              <a:t>Setup ''</a:t>
+            </a:r>
           </a:p>
           <a:p>
             <a:r>
@@ -20245,7 +19637,7 @@
                 </a:solidFill>
                 <a:latin typeface="APL385 Unicode"/>
               </a:rPr>
-              <a:t>2 ⎕FIX 'file://',#.WorkshopRoot,'/Exercises/Ex1-Tools/Run.aplf'</a:t>
+              <a:t/>
             </a:r>
           </a:p>
           <a:p>
@@ -20256,7 +19648,7 @@
                 </a:solidFill>
                 <a:latin typeface="APL385 Unicode"/>
               </a:rPr>
-              <a:t>server←Run 8080</a:t>
+              <a:t>Load 1</a:t>
             </a:r>
           </a:p>
           <a:p>
@@ -20267,18 +19659,21 @@
                 </a:solidFill>
                 <a:latin typeface="APL385 Unicode"/>
               </a:rPr>
+              <a:t>server←Run1 8080</a:t>
+            </a:r>
+          </a:p>
+          <a:p>
+            <a:r>
+              <a:rPr sz="1000" b="0">
+                <a:solidFill>
+                  <a:schemeClr val="tx1"/>
+                </a:solidFill>
+                <a:latin typeface="APL385 Unicode"/>
+              </a:rPr>
               <a:t>)ED #.Ex1.Hello</a:t>
             </a:r>
           </a:p>
           <a:p>
-            <a:endParaRPr sz="1000" b="0">
-              <a:solidFill>
-                <a:schemeClr val="tx1"/>
-              </a:solidFill>
-              <a:latin typeface="APL385 Unicode"/>
-            </a:endParaRPr>
-          </a:p>
-          <a:p>
             <a:r>
               <a:rPr sz="1000" b="0">
                 <a:solidFill>
@@ -20286,7 +19681,18 @@
                 </a:solidFill>
                 <a:latin typeface="APL385 Unicode"/>
               </a:rPr>
-              <a:t>server←'Solution' Run 8080</a:t>
+              <a:t/>
+            </a:r>
+          </a:p>
+          <a:p>
+            <a:r>
+              <a:rPr sz="1000" b="0">
+                <a:solidFill>
+                  <a:schemeClr val="tx1"/>
+                </a:solidFill>
+                <a:latin typeface="APL385 Unicode"/>
+              </a:rPr>
+              <a:t>server←'Solution' Run1 8080</a:t>
             </a:r>
           </a:p>
         </p:txBody>
@@ -20299,8 +19705,8 @@
         </p:nvSpPr>
         <p:spPr>
           <a:xfrm>
-            <a:off x="5962218" y="1267287"/>
-            <a:ext cx="2838611" cy="236501"/>
+            <a:off x="4945925" y="1267287"/>
+            <a:ext cx="3854904" cy="236501"/>
           </a:xfrm>
           <a:prstGeom prst="rect">
             <a:avLst/>
@@ -20308,7 +19714,7 @@
           <a:noFill/>
         </p:spPr>
         <p:txBody>
-          <a:bodyPr wrap="square" lIns="0" tIns="0" rIns="0" bIns="0" anchor="t">
+          <a:bodyPr wrap="square" anchor="t" lIns="0" rIns="0" tIns="0" bIns="0">
             <a:spAutoFit/>
           </a:bodyPr>
           <a:lstStyle/>
@@ -20333,8 +19739,8 @@
         </p:nvSpPr>
         <p:spPr>
           <a:xfrm>
-            <a:off x="5962218" y="1503788"/>
-            <a:ext cx="2838611" cy="328473"/>
+            <a:off x="4945925" y="1503788"/>
+            <a:ext cx="3854904" cy="236501"/>
           </a:xfrm>
           <a:prstGeom prst="rect">
             <a:avLst/>
@@ -20342,7 +19748,7 @@
           <a:noFill/>
         </p:spPr>
         <p:txBody>
-          <a:bodyPr wrap="square" lIns="0" tIns="0" rIns="0" bIns="0" anchor="t">
+          <a:bodyPr wrap="square" anchor="t" lIns="0" rIns="0" tIns="0" bIns="0">
             <a:spAutoFit/>
           </a:bodyPr>
           <a:lstStyle/>
@@ -20353,7 +19759,7 @@
                   <a:schemeClr val="tx1"/>
                 </a:solidFill>
               </a:rPr>
-              <a:t>Loads the tools and checks a server can run. Once per session.</a:t>
+              <a:t>Loads the tools and checks them. Once per session.</a:t>
             </a:r>
           </a:p>
         </p:txBody>
@@ -20366,8 +19772,8 @@
         </p:nvSpPr>
         <p:spPr>
           <a:xfrm>
-            <a:off x="5962218" y="1845401"/>
-            <a:ext cx="2838611" cy="236501"/>
+            <a:off x="4945925" y="1759998"/>
+            <a:ext cx="3854904" cy="236501"/>
           </a:xfrm>
           <a:prstGeom prst="rect">
             <a:avLst/>
@@ -20375,7 +19781,7 @@
           <a:noFill/>
         </p:spPr>
         <p:txBody>
-          <a:bodyPr wrap="square" lIns="0" tIns="0" rIns="0" bIns="0" anchor="t">
+          <a:bodyPr wrap="square" anchor="t" lIns="0" rIns="0" tIns="0" bIns="0">
             <a:spAutoFit/>
           </a:bodyPr>
           <a:lstStyle/>
@@ -20387,7 +19793,7 @@
                 </a:solidFill>
                 <a:latin typeface="APL385 Unicode"/>
               </a:rPr>
-              <a:t>Run</a:t>
+              <a:t>Load 1</a:t>
             </a:r>
           </a:p>
         </p:txBody>
@@ -20400,8 +19806,8 @@
         </p:nvSpPr>
         <p:spPr>
           <a:xfrm>
-            <a:off x="5962218" y="2081902"/>
-            <a:ext cx="2838611" cy="328473"/>
+            <a:off x="4945925" y="1996499"/>
+            <a:ext cx="3854904" cy="236501"/>
           </a:xfrm>
           <a:prstGeom prst="rect">
             <a:avLst/>
@@ -20409,7 +19815,7 @@
           <a:noFill/>
         </p:spPr>
         <p:txBody>
-          <a:bodyPr wrap="square" lIns="0" tIns="0" rIns="0" bIns="0" anchor="t">
+          <a:bodyPr wrap="square" anchor="t" lIns="0" rIns="0" tIns="0" bIns="0">
             <a:spAutoFit/>
           </a:bodyPr>
           <a:lstStyle/>
@@ -20420,7 +19826,7 @@
                   <a:schemeClr val="tx1"/>
                 </a:solidFill>
               </a:rPr>
-              <a:t>Starts the exercise's servers on localhost, from Start/.</a:t>
+              <a:t>Loads what Exercise 1 needs, including Run1.</a:t>
             </a:r>
           </a:p>
         </p:txBody>
@@ -20433,8 +19839,8 @@
         </p:nvSpPr>
         <p:spPr>
           <a:xfrm>
-            <a:off x="5962218" y="2423515"/>
-            <a:ext cx="2838611" cy="236501"/>
+            <a:off x="4945925" y="2252708"/>
+            <a:ext cx="3854904" cy="236501"/>
           </a:xfrm>
           <a:prstGeom prst="rect">
             <a:avLst/>
@@ -20442,7 +19848,7 @@
           <a:noFill/>
         </p:spPr>
         <p:txBody>
-          <a:bodyPr wrap="square" lIns="0" tIns="0" rIns="0" bIns="0" anchor="t">
+          <a:bodyPr wrap="square" anchor="t" lIns="0" rIns="0" tIns="0" bIns="0">
             <a:spAutoFit/>
           </a:bodyPr>
           <a:lstStyle/>
@@ -20454,7 +19860,7 @@
                 </a:solidFill>
                 <a:latin typeface="APL385 Unicode"/>
               </a:rPr>
-              <a:t>)ED</a:t>
+              <a:t>Run1</a:t>
             </a:r>
           </a:p>
         </p:txBody>
@@ -20467,8 +19873,8 @@
         </p:nvSpPr>
         <p:spPr>
           <a:xfrm>
-            <a:off x="5962218" y="2660016"/>
-            <a:ext cx="2838611" cy="328473"/>
+            <a:off x="4945925" y="2489209"/>
+            <a:ext cx="3854904" cy="236501"/>
           </a:xfrm>
           <a:prstGeom prst="rect">
             <a:avLst/>
@@ -20476,7 +19882,7 @@
           <a:noFill/>
         </p:spPr>
         <p:txBody>
-          <a:bodyPr wrap="square" lIns="0" tIns="0" rIns="0" bIns="0" anchor="t">
+          <a:bodyPr wrap="square" anchor="t" lIns="0" rIns="0" tIns="0" bIns="0">
             <a:spAutoFit/>
           </a:bodyPr>
           <a:lstStyle/>
@@ -20487,7 +19893,7 @@
                   <a:schemeClr val="tx1"/>
                 </a:solidFill>
               </a:rPr>
-              <a:t>Edit a function; the running server uses it straight away.</a:t>
+              <a:t>Starts its servers on localhost, from Start/.</a:t>
             </a:r>
           </a:p>
         </p:txBody>
@@ -20500,8 +19906,8 @@
         </p:nvSpPr>
         <p:spPr>
           <a:xfrm>
-            <a:off x="5962218" y="3001628"/>
-            <a:ext cx="2838611" cy="236501"/>
+            <a:off x="4945925" y="2745419"/>
+            <a:ext cx="3854904" cy="236501"/>
           </a:xfrm>
           <a:prstGeom prst="rect">
             <a:avLst/>
@@ -20509,7 +19915,7 @@
           <a:noFill/>
         </p:spPr>
         <p:txBody>
-          <a:bodyPr wrap="square" lIns="0" tIns="0" rIns="0" bIns="0" anchor="t">
+          <a:bodyPr wrap="square" anchor="t" lIns="0" rIns="0" tIns="0" bIns="0">
             <a:spAutoFit/>
           </a:bodyPr>
           <a:lstStyle/>
@@ -20521,7 +19927,7 @@
                 </a:solidFill>
                 <a:latin typeface="APL385 Unicode"/>
               </a:rPr>
-              <a:t>'Solution' Run</a:t>
+              <a:t>)ED</a:t>
             </a:r>
           </a:p>
         </p:txBody>
@@ -20534,8 +19940,8 @@
         </p:nvSpPr>
         <p:spPr>
           <a:xfrm>
-            <a:off x="5962218" y="3238130"/>
-            <a:ext cx="2838611" cy="328473"/>
+            <a:off x="4945925" y="2981920"/>
+            <a:ext cx="3854904" cy="236501"/>
           </a:xfrm>
           <a:prstGeom prst="rect">
             <a:avLst/>
@@ -20543,7 +19949,7 @@
           <a:noFill/>
         </p:spPr>
         <p:txBody>
-          <a:bodyPr wrap="square" lIns="0" tIns="0" rIns="0" bIns="0" anchor="t">
+          <a:bodyPr wrap="square" anchor="t" lIns="0" rIns="0" tIns="0" bIns="0">
             <a:spAutoFit/>
           </a:bodyPr>
           <a:lstStyle/>
@@ -20554,21 +19960,21 @@
                   <a:schemeClr val="tx1"/>
                 </a:solidFill>
               </a:rPr>
-              <a:t>Catch up: loads the finished version.</a:t>
-            </a:r>
-          </a:p>
-        </p:txBody>
-      </p:sp>
-      <p:sp>
-        <p:nvSpPr>
-          <p:cNvPr id="13" name="text"/>
+              <a:t>Edit a function: the server uses it at once.</a:t>
+            </a:r>
+          </a:p>
+        </p:txBody>
+      </p:sp>
+      <p:sp>
+        <p:nvSpPr>
+          <p:cNvPr id="13" name="step head"/>
           <p:cNvSpPr txBox="1"/>
           <p:nvPr/>
         </p:nvSpPr>
         <p:spPr>
           <a:xfrm>
-            <a:off x="320040" y="3796535"/>
-            <a:ext cx="8503920" cy="788337"/>
+            <a:off x="4945925" y="3238130"/>
+            <a:ext cx="3854904" cy="236501"/>
           </a:xfrm>
           <a:prstGeom prst="rect">
             <a:avLst/>
@@ -20576,18 +19982,85 @@
           <a:noFill/>
         </p:spPr>
         <p:txBody>
-          <a:bodyPr wrap="square" lIns="0" tIns="0" rIns="0" bIns="0" anchor="t">
+          <a:bodyPr wrap="square" anchor="t" lIns="0" rIns="0" tIns="0" bIns="0">
             <a:spAutoFit/>
           </a:bodyPr>
           <a:lstStyle/>
           <a:p>
             <a:r>
+              <a:rPr sz="1300" b="0">
+                <a:solidFill>
+                  <a:schemeClr val="accent2"/>
+                </a:solidFill>
+                <a:latin typeface="APL385 Unicode"/>
+              </a:rPr>
+              <a:t>'Solution' Run1</a:t>
+            </a:r>
+          </a:p>
+        </p:txBody>
+      </p:sp>
+      <p:sp>
+        <p:nvSpPr>
+          <p:cNvPr id="14" name="text"/>
+          <p:cNvSpPr txBox="1"/>
+          <p:nvPr/>
+        </p:nvSpPr>
+        <p:spPr>
+          <a:xfrm>
+            <a:off x="4945925" y="3474631"/>
+            <a:ext cx="3854904" cy="236501"/>
+          </a:xfrm>
+          <a:prstGeom prst="rect">
+            <a:avLst/>
+          </a:prstGeom>
+          <a:noFill/>
+        </p:spPr>
+        <p:txBody>
+          <a:bodyPr wrap="square" anchor="t" lIns="0" rIns="0" tIns="0" bIns="0">
+            <a:spAutoFit/>
+          </a:bodyPr>
+          <a:lstStyle/>
+          <a:p>
+            <a:r>
+              <a:rPr sz="1100" b="0">
+                <a:solidFill>
+                  <a:schemeClr val="tx1"/>
+                </a:solidFill>
+              </a:rPr>
+              <a:t>Catch up: loads the finished version.</a:t>
+            </a:r>
+          </a:p>
+        </p:txBody>
+      </p:sp>
+      <p:sp>
+        <p:nvSpPr>
+          <p:cNvPr id="15" name="text"/>
+          <p:cNvSpPr txBox="1"/>
+          <p:nvPr/>
+        </p:nvSpPr>
+        <p:spPr>
+          <a:xfrm>
+            <a:off x="320040" y="3895077"/>
+            <a:ext cx="8503920" cy="722642"/>
+          </a:xfrm>
+          <a:prstGeom prst="rect">
+            <a:avLst/>
+          </a:prstGeom>
+          <a:noFill/>
+        </p:spPr>
+        <p:txBody>
+          <a:bodyPr wrap="square" anchor="t" lIns="0" rIns="0" tIns="0" bIns="0">
+            <a:spAutoFit/>
+          </a:bodyPr>
+          <a:lstStyle/>
+          <a:p>
+            <a:r>
               <a:rPr sz="1400" b="0">
                 <a:solidFill>
                   <a:schemeClr val="tx1"/>
                 </a:solidFill>
               </a:rPr>
-              <a:t>Every line in the READMEs can be pasted into your session. Your edits live in the session; the files in Start/ don't change. Run stops any server it started earlier, so running it again is always safe.</a:t>
+              <a:t>Every line in the READMEs can be pasted into your session. Your edits live in the session; the files in Start/ don't change. Each Run function stops any server it started earlier, so running it again is always safe.</a:t>
             </a:r>
           </a:p>
         </p:txBody>
@@ -20601,7 +20074,7 @@
 </file>
 
 <file path=ppt/slides/slide7.xml><?xml version="1.0" encoding="utf-8"?>
-<p:sld xmlns:a="http://schemas.openxmlformats.org/drawingml/2006/main" xmlns:r="http://schemas.openxmlformats.org/officeDocument/2006/relationships" xmlns:p="http://schemas.openxmlformats.org/presentationml/2006/main">
+<p:sld xmlns:a="http://schemas.openxmlformats.org/drawingml/2006/main" xmlns:p="http://schemas.openxmlformats.org/presentationml/2006/main" xmlns:r="http://schemas.openxmlformats.org/officeDocument/2006/relationships">
   <p:cSld>
     <p:spTree>
       <p:nvGrpSpPr>
@@ -20609,14 +20082,7 @@
         <p:cNvGrpSpPr/>
         <p:nvPr/>
       </p:nvGrpSpPr>
-      <p:grpSpPr>
-        <a:xfrm>
-          <a:off x="0" y="0"/>
-          <a:ext cx="0" cy="0"/>
-          <a:chOff x="0" y="0"/>
-          <a:chExt cx="0" cy="0"/>
-        </a:xfrm>
-      </p:grpSpPr>
+      <p:grpSpPr/>
       <p:sp>
         <p:nvSpPr>
           <p:cNvPr id="2" name="Title 1"/>
@@ -20656,7 +20122,7 @@
           <a:noFill/>
         </p:spPr>
         <p:txBody>
-          <a:bodyPr wrap="square" lIns="0" tIns="0" rIns="0" bIns="0" anchor="t">
+          <a:bodyPr wrap="square" anchor="t" lIns="0" rIns="0" tIns="0" bIns="0">
             <a:spAutoFit/>
           </a:bodyPr>
           <a:lstStyle/>
@@ -20689,7 +20155,7 @@
           <a:noFill/>
         </p:spPr>
         <p:txBody>
-          <a:bodyPr wrap="square" lIns="0" tIns="0" rIns="0" bIns="0" anchor="t">
+          <a:bodyPr wrap="square" anchor="t" lIns="0" rIns="0" tIns="0" bIns="0">
             <a:spAutoFit/>
           </a:bodyPr>
           <a:lstStyle/>
@@ -20746,9 +20212,7 @@
         <p:txBody>
           <a:bodyPr rtlCol="0" anchor="ctr"/>
           <a:lstStyle/>
-          <a:p>
-            <a:endParaRPr/>
-          </a:p>
+          <a:p/>
         </p:txBody>
       </p:sp>
       <p:sp>
@@ -20768,7 +20232,7 @@
           <a:noFill/>
         </p:spPr>
         <p:txBody>
-          <a:bodyPr wrap="square" lIns="0" tIns="0" rIns="0" bIns="0" anchor="t">
+          <a:bodyPr wrap="square" anchor="t" lIns="0" rIns="0" tIns="0" bIns="0">
             <a:spAutoFit/>
           </a:bodyPr>
           <a:lstStyle/>
@@ -20824,7 +20288,7 @@
           <a:noFill/>
         </p:spPr>
         <p:txBody>
-          <a:bodyPr wrap="square" lIns="0" tIns="0" rIns="0" bIns="0" anchor="t">
+          <a:bodyPr wrap="square" anchor="t" lIns="0" rIns="0" tIns="0" bIns="0">
             <a:spAutoFit/>
           </a:bodyPr>
           <a:lstStyle/>
@@ -20881,9 +20345,7 @@
         <p:txBody>
           <a:bodyPr rtlCol="0" anchor="ctr"/>
           <a:lstStyle/>
-          <a:p>
-            <a:endParaRPr/>
-          </a:p>
+          <a:p/>
         </p:txBody>
       </p:sp>
       <p:sp>
@@ -20903,7 +20365,7 @@
           <a:noFill/>
         </p:spPr>
         <p:txBody>
-          <a:bodyPr wrap="square" lIns="0" tIns="0" rIns="0" bIns="0" anchor="t">
+          <a:bodyPr wrap="square" anchor="t" lIns="0" rIns="0" tIns="0" bIns="0">
             <a:spAutoFit/>
           </a:bodyPr>
           <a:lstStyle/>
@@ -20937,7 +20399,7 @@
           <a:noFill/>
         </p:spPr>
         <p:txBody>
-          <a:bodyPr wrap="square" lIns="0" tIns="0" rIns="0" bIns="0" anchor="t">
+          <a:bodyPr wrap="square" anchor="t" lIns="0" rIns="0" tIns="0" bIns="0">
             <a:spAutoFit/>
           </a:bodyPr>
           <a:lstStyle/>
@@ -20996,7 +20458,7 @@
 </file>
 
 <file path=ppt/slides/slide8.xml><?xml version="1.0" encoding="utf-8"?>
-<p:sld xmlns:a="http://schemas.openxmlformats.org/drawingml/2006/main" xmlns:r="http://schemas.openxmlformats.org/officeDocument/2006/relationships" xmlns:p="http://schemas.openxmlformats.org/presentationml/2006/main">
+<p:sld xmlns:a="http://schemas.openxmlformats.org/drawingml/2006/main" xmlns:p="http://schemas.openxmlformats.org/presentationml/2006/main" xmlns:r="http://schemas.openxmlformats.org/officeDocument/2006/relationships">
   <p:cSld>
     <p:spTree>
       <p:nvGrpSpPr>
@@ -21004,14 +20466,7 @@
         <p:cNvGrpSpPr/>
         <p:nvPr/>
       </p:nvGrpSpPr>
-      <p:grpSpPr>
-        <a:xfrm>
-          <a:off x="0" y="0"/>
-          <a:ext cx="0" cy="0"/>
-          <a:chOff x="0" y="0"/>
-          <a:chExt cx="0" cy="0"/>
-        </a:xfrm>
-      </p:grpSpPr>
+      <p:grpSpPr/>
       <p:sp>
         <p:nvSpPr>
           <p:cNvPr id="2" name="Title 1"/>
@@ -21051,7 +20506,7 @@
           <a:noFill/>
         </p:spPr>
         <p:txBody>
-          <a:bodyPr wrap="square" lIns="0" tIns="0" rIns="0" bIns="0" anchor="t">
+          <a:bodyPr wrap="square" anchor="t" lIns="0" rIns="0" tIns="0" bIns="0">
             <a:spAutoFit/>
           </a:bodyPr>
           <a:lstStyle/>
@@ -21084,7 +20539,7 @@
           <a:noFill/>
         </p:spPr>
         <p:txBody>
-          <a:bodyPr wrap="square" lIns="0" tIns="0" rIns="0" bIns="0" anchor="t">
+          <a:bodyPr wrap="square" anchor="t" lIns="0" rIns="0" tIns="0" bIns="0">
             <a:spAutoFit/>
           </a:bodyPr>
           <a:lstStyle/>
@@ -21117,7 +20572,7 @@
           <a:noFill/>
         </p:spPr>
         <p:txBody>
-          <a:bodyPr wrap="square" lIns="0" tIns="0" rIns="0" bIns="0" anchor="t">
+          <a:bodyPr wrap="square" anchor="t" lIns="0" rIns="0" tIns="0" bIns="0">
             <a:spAutoFit/>
           </a:bodyPr>
           <a:lstStyle/>
@@ -21150,7 +20605,7 @@
           <a:noFill/>
         </p:spPr>
         <p:txBody>
-          <a:bodyPr wrap="square" lIns="0" tIns="0" rIns="0" bIns="0" anchor="t">
+          <a:bodyPr wrap="square" anchor="t" lIns="0" rIns="0" tIns="0" bIns="0">
             <a:spAutoFit/>
           </a:bodyPr>
           <a:lstStyle/>
@@ -21203,7 +20658,7 @@
           <a:noFill/>
         </p:spPr>
         <p:txBody>
-          <a:bodyPr wrap="square" lIns="0" tIns="0" rIns="0" bIns="0" anchor="t">
+          <a:bodyPr wrap="square" anchor="t" lIns="0" rIns="0" tIns="0" bIns="0">
             <a:spAutoFit/>
           </a:bodyPr>
           <a:lstStyle/>
@@ -21260,9 +20715,7 @@
         <p:txBody>
           <a:bodyPr rtlCol="0" anchor="ctr"/>
           <a:lstStyle/>
-          <a:p>
-            <a:endParaRPr/>
-          </a:p>
+          <a:p/>
         </p:txBody>
       </p:sp>
       <p:sp>
@@ -21282,7 +20735,7 @@
           <a:noFill/>
         </p:spPr>
         <p:txBody>
-          <a:bodyPr wrap="square" lIns="0" tIns="0" rIns="0" bIns="0" anchor="t">
+          <a:bodyPr wrap="square" anchor="t" lIns="0" rIns="0" tIns="0" bIns="0">
             <a:spAutoFit/>
           </a:bodyPr>
           <a:lstStyle/>
@@ -21294,7 +20747,7 @@
                 </a:solidFill>
                 <a:latin typeface="APL385 Unicode"/>
               </a:rPr>
-              <a:t>2 ⎕FIX 'file://',#.WorkshopRoot,'/Exercises/Ex1-Tools/Run.aplf'</a:t>
+              <a:t>Load 1</a:t>
             </a:r>
           </a:p>
         </p:txBody>
@@ -21316,7 +20769,7 @@
           <a:noFill/>
         </p:spPr>
         <p:txBody>
-          <a:bodyPr wrap="square" lIns="0" tIns="0" rIns="0" bIns="0" anchor="t">
+          <a:bodyPr wrap="square" anchor="t" lIns="0" rIns="0" tIns="0" bIns="0">
             <a:spAutoFit/>
           </a:bodyPr>
           <a:lstStyle/>
@@ -21341,7 +20794,7 @@
 </file>
 
 <file path=ppt/slides/slide9.xml><?xml version="1.0" encoding="utf-8"?>
-<p:sld xmlns:a="http://schemas.openxmlformats.org/drawingml/2006/main" xmlns:r="http://schemas.openxmlformats.org/officeDocument/2006/relationships" xmlns:p="http://schemas.openxmlformats.org/presentationml/2006/main">
+<p:sld xmlns:a="http://schemas.openxmlformats.org/drawingml/2006/main" xmlns:p="http://schemas.openxmlformats.org/presentationml/2006/main" xmlns:r="http://schemas.openxmlformats.org/officeDocument/2006/relationships">
   <p:cSld>
     <p:spTree>
       <p:nvGrpSpPr>
@@ -21349,14 +20802,7 @@
         <p:cNvGrpSpPr/>
         <p:nvPr/>
       </p:nvGrpSpPr>
-      <p:grpSpPr>
-        <a:xfrm>
-          <a:off x="0" y="0"/>
-          <a:ext cx="0" cy="0"/>
-          <a:chOff x="0" y="0"/>
-          <a:chExt cx="0" cy="0"/>
-        </a:xfrm>
-      </p:grpSpPr>
+      <p:grpSpPr/>
       <p:sp>
         <p:nvSpPr>
           <p:cNvPr id="2" name="Title 1"/>
@@ -21385,7 +20831,7 @@
             <a:spLocks noGrp="1"/>
           </p:cNvSpPr>
           <p:nvPr>
-            <p:ph type="body" sz="quarter" idx="10"/>
+            <p:ph type="body" idx="10" sz="quarter"/>
           </p:nvPr>
         </p:nvSpPr>
         <p:spPr/>
